--- a/Claude-Token优化最佳实践.pptx
+++ b/Claude-Token优化最佳实践.pptx
@@ -16,9 +16,12 @@
     <p:sldId id="264" r:id="rId10"/>
     <p:sldId id="265" r:id="rId11"/>
     <p:sldId id="266" r:id="rId12"/>
+    <p:sldId id="267" r:id="rId13"/>
+    <p:sldId id="268" r:id="rId14"/>
+    <p:sldId id="269" r:id="rId15"/>
   </p:sldIdLst>
   <p:notesMasterIdLst>
-    <p:notesMasterId r:id="rId13"/>
+    <p:notesMasterId r:id="rId16"/>
   </p:notesMasterIdLst>
   <p:sldSz cx="9144000" cy="5143500"/>
   <p:notesSz cx="5143500" cy="9144000"/>
@@ -1894,6 +1897,270 @@
 </p:notes>
 </file>
 
+<file path=ppt/notesSlides/notesSlide12.xml><?xml version="1.0" encoding="utf-8"?>
+<p:notes xmlns:a="http://schemas.openxmlformats.org/drawingml/2006/main" xmlns:r="http://schemas.openxmlformats.org/officeDocument/2006/relationships" xmlns:p="http://schemas.openxmlformats.org/presentationml/2006/main">
+  <p:cSld>
+    <p:spTree>
+      <p:nvGrpSpPr>
+        <p:cNvPr id="1" name=""/>
+        <p:cNvGrpSpPr/>
+        <p:nvPr/>
+      </p:nvGrpSpPr>
+      <p:grpSpPr>
+        <a:xfrm>
+          <a:off x="0" y="0"/>
+          <a:ext cx="0" cy="0"/>
+          <a:chOff x="0" y="0"/>
+          <a:chExt cx="0" cy="0"/>
+        </a:xfrm>
+      </p:grpSpPr>
+      <p:sp>
+        <p:nvSpPr>
+          <p:cNvPr id="2" name="Slide Image Placeholder 1"/>
+          <p:cNvSpPr>
+            <a:spLocks noGrp="1" noRot="1" noChangeAspect="1"/>
+          </p:cNvSpPr>
+          <p:nvPr>
+            <p:ph type="sldImg"/>
+          </p:nvPr>
+        </p:nvSpPr>
+        <p:spPr/>
+      </p:sp>
+      <p:sp>
+        <p:nvSpPr>
+          <p:cNvPr id="3" name="Notes Placeholder 2"/>
+          <p:cNvSpPr>
+            <a:spLocks noGrp="1"/>
+          </p:cNvSpPr>
+          <p:nvPr>
+            <p:ph type="body" idx="1"/>
+          </p:nvPr>
+        </p:nvSpPr>
+        <p:spPr/>
+        <p:txBody>
+          <a:bodyPr/>
+          <a:lstStyle/>
+          <a:p>
+            <a:r>
+              <a:rPr lang="en-US" dirty="0"/>
+              <a:t/>
+            </a:r>
+            <a:endParaRPr lang="en-US" dirty="0"/>
+          </a:p>
+        </p:txBody>
+      </p:sp>
+      <p:sp>
+        <p:nvSpPr>
+          <p:cNvPr id="4" name="Slide Number Placeholder 3"/>
+          <p:cNvSpPr>
+            <a:spLocks noGrp="1"/>
+          </p:cNvSpPr>
+          <p:nvPr>
+            <p:ph type="sldNum" sz="quarter" idx="10"/>
+          </p:nvPr>
+        </p:nvSpPr>
+        <p:spPr/>
+        <p:txBody>
+          <a:bodyPr/>
+          <a:lstStyle/>
+          <a:p>
+            <a:fld id="{F7021451-1387-4CA6-816F-3879F97B5CBC}" type="slidenum">
+              <a:rPr lang="en-US"/>
+              <a:t>12</a:t>
+            </a:fld>
+            <a:endParaRPr lang="en-US"/>
+          </a:p>
+        </p:txBody>
+      </p:sp>
+    </p:spTree>
+    <p:extLst>
+      <p:ext uri="{BB962C8B-B14F-4D97-AF65-F5344CB8AC3E}">
+        <p14:creationId xmlns:p14="http://schemas.microsoft.com/office/powerpoint/2010/main" val="1024086991"/>
+      </p:ext>
+    </p:extLst>
+  </p:cSld>
+  <p:clrMapOvr>
+    <a:masterClrMapping/>
+  </p:clrMapOvr>
+</p:notes>
+</file>
+
+<file path=ppt/notesSlides/notesSlide13.xml><?xml version="1.0" encoding="utf-8"?>
+<p:notes xmlns:a="http://schemas.openxmlformats.org/drawingml/2006/main" xmlns:r="http://schemas.openxmlformats.org/officeDocument/2006/relationships" xmlns:p="http://schemas.openxmlformats.org/presentationml/2006/main">
+  <p:cSld>
+    <p:spTree>
+      <p:nvGrpSpPr>
+        <p:cNvPr id="1" name=""/>
+        <p:cNvGrpSpPr/>
+        <p:nvPr/>
+      </p:nvGrpSpPr>
+      <p:grpSpPr>
+        <a:xfrm>
+          <a:off x="0" y="0"/>
+          <a:ext cx="0" cy="0"/>
+          <a:chOff x="0" y="0"/>
+          <a:chExt cx="0" cy="0"/>
+        </a:xfrm>
+      </p:grpSpPr>
+      <p:sp>
+        <p:nvSpPr>
+          <p:cNvPr id="2" name="Slide Image Placeholder 1"/>
+          <p:cNvSpPr>
+            <a:spLocks noGrp="1" noRot="1" noChangeAspect="1"/>
+          </p:cNvSpPr>
+          <p:nvPr>
+            <p:ph type="sldImg"/>
+          </p:nvPr>
+        </p:nvSpPr>
+        <p:spPr/>
+      </p:sp>
+      <p:sp>
+        <p:nvSpPr>
+          <p:cNvPr id="3" name="Notes Placeholder 2"/>
+          <p:cNvSpPr>
+            <a:spLocks noGrp="1"/>
+          </p:cNvSpPr>
+          <p:nvPr>
+            <p:ph type="body" idx="1"/>
+          </p:nvPr>
+        </p:nvSpPr>
+        <p:spPr/>
+        <p:txBody>
+          <a:bodyPr/>
+          <a:lstStyle/>
+          <a:p>
+            <a:r>
+              <a:rPr lang="en-US" dirty="0"/>
+              <a:t/>
+            </a:r>
+            <a:endParaRPr lang="en-US" dirty="0"/>
+          </a:p>
+        </p:txBody>
+      </p:sp>
+      <p:sp>
+        <p:nvSpPr>
+          <p:cNvPr id="4" name="Slide Number Placeholder 3"/>
+          <p:cNvSpPr>
+            <a:spLocks noGrp="1"/>
+          </p:cNvSpPr>
+          <p:nvPr>
+            <p:ph type="sldNum" sz="quarter" idx="10"/>
+          </p:nvPr>
+        </p:nvSpPr>
+        <p:spPr/>
+        <p:txBody>
+          <a:bodyPr/>
+          <a:lstStyle/>
+          <a:p>
+            <a:fld id="{F7021451-1387-4CA6-816F-3879F97B5CBC}" type="slidenum">
+              <a:rPr lang="en-US"/>
+              <a:t>13</a:t>
+            </a:fld>
+            <a:endParaRPr lang="en-US"/>
+          </a:p>
+        </p:txBody>
+      </p:sp>
+    </p:spTree>
+    <p:extLst>
+      <p:ext uri="{BB962C8B-B14F-4D97-AF65-F5344CB8AC3E}">
+        <p14:creationId xmlns:p14="http://schemas.microsoft.com/office/powerpoint/2010/main" val="1024086991"/>
+      </p:ext>
+    </p:extLst>
+  </p:cSld>
+  <p:clrMapOvr>
+    <a:masterClrMapping/>
+  </p:clrMapOvr>
+</p:notes>
+</file>
+
+<file path=ppt/notesSlides/notesSlide14.xml><?xml version="1.0" encoding="utf-8"?>
+<p:notes xmlns:a="http://schemas.openxmlformats.org/drawingml/2006/main" xmlns:r="http://schemas.openxmlformats.org/officeDocument/2006/relationships" xmlns:p="http://schemas.openxmlformats.org/presentationml/2006/main">
+  <p:cSld>
+    <p:spTree>
+      <p:nvGrpSpPr>
+        <p:cNvPr id="1" name=""/>
+        <p:cNvGrpSpPr/>
+        <p:nvPr/>
+      </p:nvGrpSpPr>
+      <p:grpSpPr>
+        <a:xfrm>
+          <a:off x="0" y="0"/>
+          <a:ext cx="0" cy="0"/>
+          <a:chOff x="0" y="0"/>
+          <a:chExt cx="0" cy="0"/>
+        </a:xfrm>
+      </p:grpSpPr>
+      <p:sp>
+        <p:nvSpPr>
+          <p:cNvPr id="2" name="Slide Image Placeholder 1"/>
+          <p:cNvSpPr>
+            <a:spLocks noGrp="1" noRot="1" noChangeAspect="1"/>
+          </p:cNvSpPr>
+          <p:nvPr>
+            <p:ph type="sldImg"/>
+          </p:nvPr>
+        </p:nvSpPr>
+        <p:spPr/>
+      </p:sp>
+      <p:sp>
+        <p:nvSpPr>
+          <p:cNvPr id="3" name="Notes Placeholder 2"/>
+          <p:cNvSpPr>
+            <a:spLocks noGrp="1"/>
+          </p:cNvSpPr>
+          <p:nvPr>
+            <p:ph type="body" idx="1"/>
+          </p:nvPr>
+        </p:nvSpPr>
+        <p:spPr/>
+        <p:txBody>
+          <a:bodyPr/>
+          <a:lstStyle/>
+          <a:p>
+            <a:r>
+              <a:rPr lang="en-US" dirty="0"/>
+              <a:t/>
+            </a:r>
+            <a:endParaRPr lang="en-US" dirty="0"/>
+          </a:p>
+        </p:txBody>
+      </p:sp>
+      <p:sp>
+        <p:nvSpPr>
+          <p:cNvPr id="4" name="Slide Number Placeholder 3"/>
+          <p:cNvSpPr>
+            <a:spLocks noGrp="1"/>
+          </p:cNvSpPr>
+          <p:nvPr>
+            <p:ph type="sldNum" sz="quarter" idx="10"/>
+          </p:nvPr>
+        </p:nvSpPr>
+        <p:spPr/>
+        <p:txBody>
+          <a:bodyPr/>
+          <a:lstStyle/>
+          <a:p>
+            <a:fld id="{F7021451-1387-4CA6-816F-3879F97B5CBC}" type="slidenum">
+              <a:rPr lang="en-US"/>
+              <a:t>14</a:t>
+            </a:fld>
+            <a:endParaRPr lang="en-US"/>
+          </a:p>
+        </p:txBody>
+      </p:sp>
+    </p:spTree>
+    <p:extLst>
+      <p:ext uri="{BB962C8B-B14F-4D97-AF65-F5344CB8AC3E}">
+        <p14:creationId xmlns:p14="http://schemas.microsoft.com/office/powerpoint/2010/main" val="1024086991"/>
+      </p:ext>
+    </p:extLst>
+  </p:cSld>
+  <p:clrMapOvr>
+    <a:masterClrMapping/>
+  </p:clrMapOvr>
+</p:notes>
+</file>
+
 <file path=ppt/notesSlides/notesSlide2.xml><?xml version="1.0" encoding="utf-8"?>
 <p:notes xmlns:a="http://schemas.openxmlformats.org/drawingml/2006/main" xmlns:r="http://schemas.openxmlformats.org/officeDocument/2006/relationships" xmlns:p="http://schemas.openxmlformats.org/presentationml/2006/main">
   <p:cSld>
@@ -3238,7 +3505,7 @@
                 <a:ea typeface="Arial" pitchFamily="34" charset="-122"/>
                 <a:cs typeface="Arial" pitchFamily="34" charset="-120"/>
               </a:rPr>
-              <a:t>行动清单</a:t>
+              <a:t>数据来源与准确性 — 数字从哪来？</a:t>
             </a:r>
             <a:endParaRPr lang="en-US" sz="2800" dirty="0"/>
           </a:p>
@@ -3347,8 +3614,35 @@
         </p:nvSpPr>
         <p:spPr>
           <a:xfrm>
-            <a:off x="640080" y="1097280"/>
-            <a:ext cx="1645920" cy="365760"/>
+            <a:off x="640080" y="1188720"/>
+            <a:ext cx="4114800" cy="731520"/>
+          </a:xfrm>
+          <a:prstGeom prst="rect">
+            <a:avLst/>
+          </a:prstGeom>
+          <a:solidFill>
+            <a:srgbClr val="FFFFFF"/>
+          </a:solidFill>
+          <a:ln/>
+          <a:effectLst>
+            <a:outerShdw sx="100000" sy="100000" kx="0" ky="0" algn="bl" rotWithShape="0" blurRad="76200" dist="25400" dir="8100000">
+              <a:srgbClr val="000000">
+                <a:alpha val="12000"/>
+              </a:srgbClr>
+            </a:outerShdw>
+          </a:effectLst>
+        </p:spPr>
+      </p:sp>
+      <p:sp>
+        <p:nvSpPr>
+          <p:cNvPr id="8" name="Shape 6"/>
+          <p:cNvSpPr/>
+          <p:nvPr/>
+        </p:nvSpPr>
+        <p:spPr>
+          <a:xfrm>
+            <a:off x="640080" y="1188720"/>
+            <a:ext cx="54864" cy="731520"/>
           </a:xfrm>
           <a:prstGeom prst="rect">
             <a:avLst/>
@@ -3361,91 +3655,190 @@
       </p:sp>
       <p:sp>
         <p:nvSpPr>
-          <p:cNvPr id="8" name="Text 6"/>
-          <p:cNvSpPr/>
-          <p:nvPr/>
-        </p:nvSpPr>
-        <p:spPr>
-          <a:xfrm>
-            <a:off x="640080" y="1115568"/>
-            <a:ext cx="1645920" cy="329184"/>
-          </a:xfrm>
-          <a:prstGeom prst="rect">
-            <a:avLst/>
-          </a:prstGeom>
-          <a:noFill/>
-          <a:ln/>
-        </p:spPr>
-        <p:txBody>
-          <a:bodyPr wrap="square" lIns="0" tIns="0" rIns="0" bIns="0" rtlCol="0" anchor="ctr"/>
-          <a:lstStyle/>
-          <a:p>
-            <a:pPr algn="ctr" indent="0" marL="0">
-              <a:buNone/>
-            </a:pPr>
-            <a:r>
-              <a:rPr lang="en-US" sz="1200" b="1" dirty="0">
-                <a:solidFill>
-                  <a:srgbClr val="FFFFFF"/>
-                </a:solidFill>
-              </a:rPr>
-              <a:t>今天 (10分钟)</a:t>
-            </a:r>
-            <a:endParaRPr lang="en-US" sz="1200" dirty="0"/>
-          </a:p>
-        </p:txBody>
-      </p:sp>
-      <p:sp>
-        <p:nvSpPr>
-          <p:cNvPr id="9" name="Shape 7"/>
-          <p:cNvSpPr/>
-          <p:nvPr/>
-        </p:nvSpPr>
-        <p:spPr>
-          <a:xfrm>
-            <a:off x="7589520" y="1097280"/>
-            <a:ext cx="914400" cy="365760"/>
+          <p:cNvPr id="9" name="Text 7"/>
+          <p:cNvSpPr/>
+          <p:nvPr/>
+        </p:nvSpPr>
+        <p:spPr>
+          <a:xfrm>
+            <a:off x="868680" y="1234440"/>
+            <a:ext cx="1828800" cy="274320"/>
+          </a:xfrm>
+          <a:prstGeom prst="rect">
+            <a:avLst/>
+          </a:prstGeom>
+          <a:noFill/>
+          <a:ln/>
+        </p:spPr>
+        <p:txBody>
+          <a:bodyPr wrap="square" lIns="0" tIns="0" rIns="0" bIns="0" rtlCol="0" anchor="ctr"/>
+          <a:lstStyle/>
+          <a:p>
+            <a:pPr indent="0" marL="0">
+              <a:buNone/>
+            </a:pPr>
+            <a:r>
+              <a:rPr lang="en-US" sz="1300" b="1" dirty="0">
+                <a:solidFill>
+                  <a:srgbClr val="1E2761"/>
+                </a:solidFill>
+              </a:rPr>
+              <a:t>一级: 官方定价</a:t>
+            </a:r>
+            <a:endParaRPr lang="en-US" sz="1300" dirty="0"/>
+          </a:p>
+        </p:txBody>
+      </p:sp>
+      <p:sp>
+        <p:nvSpPr>
+          <p:cNvPr id="10" name="Text 8"/>
+          <p:cNvSpPr/>
+          <p:nvPr/>
+        </p:nvSpPr>
+        <p:spPr>
+          <a:xfrm>
+            <a:off x="868680" y="1554480"/>
+            <a:ext cx="3657600" cy="320040"/>
+          </a:xfrm>
+          <a:prstGeom prst="rect">
+            <a:avLst/>
+          </a:prstGeom>
+          <a:noFill/>
+          <a:ln/>
+        </p:spPr>
+        <p:txBody>
+          <a:bodyPr wrap="square" lIns="0" tIns="0" rIns="0" bIns="0" rtlCol="0" anchor="ctr"/>
+          <a:lstStyle/>
+          <a:p>
+            <a:pPr indent="0" marL="0">
+              <a:buNone/>
+            </a:pPr>
+            <a:r>
+              <a:rPr lang="en-US" sz="1100" dirty="0">
+                <a:solidFill>
+                  <a:srgbClr val="64748B"/>
+                </a:solidFill>
+              </a:rPr>
+              <a:t>Anthropic定价页 · DeepSeek API文档 · Claude SDK count_tokens()</a:t>
+            </a:r>
+            <a:endParaRPr lang="en-US" sz="1100" dirty="0"/>
+          </a:p>
+        </p:txBody>
+      </p:sp>
+      <p:sp>
+        <p:nvSpPr>
+          <p:cNvPr id="11" name="Shape 9"/>
+          <p:cNvSpPr/>
+          <p:nvPr/>
+        </p:nvSpPr>
+        <p:spPr>
+          <a:xfrm>
+            <a:off x="640080" y="2103120"/>
+            <a:ext cx="4114800" cy="731520"/>
           </a:xfrm>
           <a:prstGeom prst="rect">
             <a:avLst/>
           </a:prstGeom>
           <a:solidFill>
-            <a:srgbClr val="059669"/>
+            <a:srgbClr val="FFFFFF"/>
           </a:solidFill>
           <a:ln/>
-        </p:spPr>
-      </p:sp>
-      <p:sp>
-        <p:nvSpPr>
-          <p:cNvPr id="10" name="Text 8"/>
-          <p:cNvSpPr/>
-          <p:nvPr/>
-        </p:nvSpPr>
-        <p:spPr>
-          <a:xfrm>
-            <a:off x="6400800" y="1115568"/>
-            <a:ext cx="2103120" cy="329184"/>
-          </a:xfrm>
-          <a:prstGeom prst="rect">
-            <a:avLst/>
-          </a:prstGeom>
-          <a:noFill/>
-          <a:ln/>
-        </p:spPr>
-        <p:txBody>
-          <a:bodyPr wrap="square" lIns="0" tIns="0" rIns="0" bIns="0" rtlCol="0" anchor="ctr"/>
-          <a:lstStyle/>
-          <a:p>
-            <a:pPr algn="r" indent="0" marL="0">
-              <a:buNone/>
-            </a:pPr>
-            <a:r>
-              <a:rPr lang="en-US" sz="1100" b="1" dirty="0">
-                <a:solidFill>
-                  <a:srgbClr val="059669"/>
-                </a:solidFill>
-              </a:rPr>
-              <a:t>→ 立即省 20%</a:t>
+          <a:effectLst>
+            <a:outerShdw sx="100000" sy="100000" kx="0" ky="0" algn="bl" rotWithShape="0" blurRad="76200" dist="25400" dir="8100000">
+              <a:srgbClr val="000000">
+                <a:alpha val="12000"/>
+              </a:srgbClr>
+            </a:outerShdw>
+          </a:effectLst>
+        </p:spPr>
+      </p:sp>
+      <p:sp>
+        <p:nvSpPr>
+          <p:cNvPr id="12" name="Shape 10"/>
+          <p:cNvSpPr/>
+          <p:nvPr/>
+        </p:nvSpPr>
+        <p:spPr>
+          <a:xfrm>
+            <a:off x="640080" y="2103120"/>
+            <a:ext cx="54864" cy="731520"/>
+          </a:xfrm>
+          <a:prstGeom prst="rect">
+            <a:avLst/>
+          </a:prstGeom>
+          <a:solidFill>
+            <a:srgbClr val="028090"/>
+          </a:solidFill>
+          <a:ln/>
+        </p:spPr>
+      </p:sp>
+      <p:sp>
+        <p:nvSpPr>
+          <p:cNvPr id="13" name="Text 11"/>
+          <p:cNvSpPr/>
+          <p:nvPr/>
+        </p:nvSpPr>
+        <p:spPr>
+          <a:xfrm>
+            <a:off x="868680" y="2148840"/>
+            <a:ext cx="1828800" cy="274320"/>
+          </a:xfrm>
+          <a:prstGeom prst="rect">
+            <a:avLst/>
+          </a:prstGeom>
+          <a:noFill/>
+          <a:ln/>
+        </p:spPr>
+        <p:txBody>
+          <a:bodyPr wrap="square" lIns="0" tIns="0" rIns="0" bIns="0" rtlCol="0" anchor="ctr"/>
+          <a:lstStyle/>
+          <a:p>
+            <a:pPr indent="0" marL="0">
+              <a:buNone/>
+            </a:pPr>
+            <a:r>
+              <a:rPr lang="en-US" sz="1300" b="1" dirty="0">
+                <a:solidFill>
+                  <a:srgbClr val="1E2761"/>
+                </a:solidFill>
+              </a:rPr>
+              <a:t>二级: 社区实测</a:t>
+            </a:r>
+            <a:endParaRPr lang="en-US" sz="1300" dirty="0"/>
+          </a:p>
+        </p:txBody>
+      </p:sp>
+      <p:sp>
+        <p:nvSpPr>
+          <p:cNvPr id="14" name="Text 12"/>
+          <p:cNvSpPr/>
+          <p:nvPr/>
+        </p:nvSpPr>
+        <p:spPr>
+          <a:xfrm>
+            <a:off x="868680" y="2468880"/>
+            <a:ext cx="3657600" cy="320040"/>
+          </a:xfrm>
+          <a:prstGeom prst="rect">
+            <a:avLst/>
+          </a:prstGeom>
+          <a:noFill/>
+          <a:ln/>
+        </p:spPr>
+        <p:txBody>
+          <a:bodyPr wrap="square" lIns="0" tIns="0" rIns="0" bIns="0" rtlCol="0" anchor="ctr"/>
+          <a:lstStyle/>
+          <a:p>
+            <a:pPr indent="0" marL="0">
+              <a:buNone/>
+            </a:pPr>
+            <a:r>
+              <a:rPr lang="en-US" sz="1100" dirty="0">
+                <a:solidFill>
+                  <a:srgbClr val="64748B"/>
+                </a:solidFill>
+              </a:rPr>
+              <a:t>Reddit 20+帖 · GitHub Issues · V2EX真实账单 · 月费$20-$300</a:t>
             </a:r>
             <a:endParaRPr lang="en-US" sz="1100" dirty="0"/>
           </a:p>
@@ -3453,90 +3846,41 @@
       </p:sp>
       <p:sp>
         <p:nvSpPr>
-          <p:cNvPr id="11" name="Text 9"/>
-          <p:cNvSpPr/>
-          <p:nvPr/>
-        </p:nvSpPr>
-        <p:spPr>
-          <a:xfrm>
-            <a:off x="822960" y="1508760"/>
-            <a:ext cx="7315200" cy="822960"/>
-          </a:xfrm>
-          <a:prstGeom prst="rect">
-            <a:avLst/>
-          </a:prstGeom>
-          <a:noFill/>
-          <a:ln/>
-        </p:spPr>
-        <p:txBody>
-          <a:bodyPr wrap="square" rtlCol="0" anchor="t"/>
-          <a:lstStyle/>
-          <a:p>
-            <a:pPr marL="342900" indent="-342900">
-              <a:spcAft>
-                <a:spcPts val="200"/>
-              </a:spcAft>
-              <a:buSzPct val="100000"/>
-              <a:buChar char="•"/>
-            </a:pPr>
-            <a:r>
-              <a:rPr lang="en-US" sz="1100" dirty="0">
-                <a:solidFill>
-                  <a:srgbClr val="1E293B"/>
-                </a:solidFill>
-              </a:rPr>
-              <a:t>export CLAUDE_CODE_ENABLE_THINKING=false</a:t>
-            </a:r>
-            <a:endParaRPr lang="en-US" sz="1100" dirty="0"/>
-          </a:p>
-          <a:p>
-            <a:pPr marL="342900" indent="-342900">
-              <a:spcAft>
-                <a:spcPts val="200"/>
-              </a:spcAft>
-              <a:buSzPct val="100000"/>
-              <a:buChar char="•"/>
-            </a:pPr>
-            <a:r>
-              <a:rPr lang="en-US" sz="1100" dirty="0">
-                <a:solidFill>
-                  <a:srgbClr val="1E293B"/>
-                </a:solidFill>
-              </a:rPr>
-              <a:t>export CLAUDE_CODE_AUTO_COMPACT=true</a:t>
-            </a:r>
-            <a:endParaRPr lang="en-US" sz="1100" dirty="0"/>
-          </a:p>
-          <a:p>
-            <a:pPr marL="342900" indent="-342900">
-              <a:spcAft>
-                <a:spcPts val="200"/>
-              </a:spcAft>
-              <a:buSzPct val="100000"/>
-              <a:buChar char="•"/>
-            </a:pPr>
-            <a:r>
-              <a:rPr lang="en-US" sz="1100" dirty="0">
-                <a:solidFill>
-                  <a:srgbClr val="1E293B"/>
-                </a:solidFill>
-              </a:rPr>
-              <a:t>export CLAUDE_CODE_MAX_TOKENS=4096</a:t>
-            </a:r>
-            <a:endParaRPr lang="en-US" sz="1100" dirty="0"/>
-          </a:p>
-        </p:txBody>
-      </p:sp>
-      <p:sp>
-        <p:nvSpPr>
-          <p:cNvPr id="12" name="Shape 10"/>
-          <p:cNvSpPr/>
-          <p:nvPr/>
-        </p:nvSpPr>
-        <p:spPr>
-          <a:xfrm>
-            <a:off x="640080" y="2377440"/>
-            <a:ext cx="1645920" cy="365760"/>
+          <p:cNvPr id="15" name="Shape 13"/>
+          <p:cNvSpPr/>
+          <p:nvPr/>
+        </p:nvSpPr>
+        <p:spPr>
+          <a:xfrm>
+            <a:off x="640080" y="3017520"/>
+            <a:ext cx="4114800" cy="731520"/>
+          </a:xfrm>
+          <a:prstGeom prst="rect">
+            <a:avLst/>
+          </a:prstGeom>
+          <a:solidFill>
+            <a:srgbClr val="FFFFFF"/>
+          </a:solidFill>
+          <a:ln/>
+          <a:effectLst>
+            <a:outerShdw sx="100000" sy="100000" kx="0" ky="0" algn="bl" rotWithShape="0" blurRad="76200" dist="25400" dir="8100000">
+              <a:srgbClr val="000000">
+                <a:alpha val="12000"/>
+              </a:srgbClr>
+            </a:outerShdw>
+          </a:effectLst>
+        </p:spPr>
+      </p:sp>
+      <p:sp>
+        <p:nvSpPr>
+          <p:cNvPr id="16" name="Shape 14"/>
+          <p:cNvSpPr/>
+          <p:nvPr/>
+        </p:nvSpPr>
+        <p:spPr>
+          <a:xfrm>
+            <a:off x="640080" y="3017520"/>
+            <a:ext cx="54864" cy="731520"/>
           </a:xfrm>
           <a:prstGeom prst="rect">
             <a:avLst/>
@@ -3549,14 +3893,286 @@
       </p:sp>
       <p:sp>
         <p:nvSpPr>
-          <p:cNvPr id="13" name="Text 11"/>
-          <p:cNvSpPr/>
-          <p:nvPr/>
-        </p:nvSpPr>
-        <p:spPr>
-          <a:xfrm>
-            <a:off x="640080" y="2395728"/>
-            <a:ext cx="1645920" cy="329184"/>
+          <p:cNvPr id="17" name="Text 15"/>
+          <p:cNvSpPr/>
+          <p:nvPr/>
+        </p:nvSpPr>
+        <p:spPr>
+          <a:xfrm>
+            <a:off x="868680" y="3063240"/>
+            <a:ext cx="1828800" cy="274320"/>
+          </a:xfrm>
+          <a:prstGeom prst="rect">
+            <a:avLst/>
+          </a:prstGeom>
+          <a:noFill/>
+          <a:ln/>
+        </p:spPr>
+        <p:txBody>
+          <a:bodyPr wrap="square" lIns="0" tIns="0" rIns="0" bIns="0" rtlCol="0" anchor="ctr"/>
+          <a:lstStyle/>
+          <a:p>
+            <a:pPr indent="0" marL="0">
+              <a:buNone/>
+            </a:pPr>
+            <a:r>
+              <a:rPr lang="en-US" sz="1300" b="1" dirty="0">
+                <a:solidFill>
+                  <a:srgbClr val="1E2761"/>
+                </a:solidFill>
+              </a:rPr>
+              <a:t>三级: 学术/推算</a:t>
+            </a:r>
+            <a:endParaRPr lang="en-US" sz="1300" dirty="0"/>
+          </a:p>
+        </p:txBody>
+      </p:sp>
+      <p:sp>
+        <p:nvSpPr>
+          <p:cNvPr id="18" name="Text 16"/>
+          <p:cNvSpPr/>
+          <p:nvPr/>
+        </p:nvSpPr>
+        <p:spPr>
+          <a:xfrm>
+            <a:off x="868680" y="3383280"/>
+            <a:ext cx="3657600" cy="320040"/>
+          </a:xfrm>
+          <a:prstGeom prst="rect">
+            <a:avLst/>
+          </a:prstGeom>
+          <a:noFill/>
+          <a:ln/>
+        </p:spPr>
+        <p:txBody>
+          <a:bodyPr wrap="square" lIns="0" tIns="0" rIns="0" bIns="0" rtlCol="0" anchor="ctr"/>
+          <a:lstStyle/>
+          <a:p>
+            <a:pPr indent="0" marL="0">
+              <a:buNone/>
+            </a:pPr>
+            <a:r>
+              <a:rPr lang="en-US" sz="1100" dirty="0">
+                <a:solidFill>
+                  <a:srgbClr val="64748B"/>
+                </a:solidFill>
+              </a:rPr>
+              <a:t>LLMLingua论文 · Selective Context论文 · tokenizer原理推算</a:t>
+            </a:r>
+            <a:endParaRPr lang="en-US" sz="1100" dirty="0"/>
+          </a:p>
+        </p:txBody>
+      </p:sp>
+      <p:sp>
+        <p:nvSpPr>
+          <p:cNvPr id="19" name="Shape 17"/>
+          <p:cNvSpPr/>
+          <p:nvPr/>
+        </p:nvSpPr>
+        <p:spPr>
+          <a:xfrm>
+            <a:off x="5029200" y="1188720"/>
+            <a:ext cx="3474720" cy="2926080"/>
+          </a:xfrm>
+          <a:prstGeom prst="rect">
+            <a:avLst/>
+          </a:prstGeom>
+          <a:solidFill>
+            <a:srgbClr val="1E2761"/>
+          </a:solidFill>
+          <a:ln/>
+        </p:spPr>
+      </p:sp>
+      <p:sp>
+        <p:nvSpPr>
+          <p:cNvPr id="20" name="Text 18"/>
+          <p:cNvSpPr/>
+          <p:nvPr/>
+        </p:nvSpPr>
+        <p:spPr>
+          <a:xfrm>
+            <a:off x="5212080" y="1325880"/>
+            <a:ext cx="3108960" cy="320040"/>
+          </a:xfrm>
+          <a:prstGeom prst="rect">
+            <a:avLst/>
+          </a:prstGeom>
+          <a:noFill/>
+          <a:ln/>
+        </p:spPr>
+        <p:txBody>
+          <a:bodyPr wrap="square" lIns="0" tIns="0" rIns="0" bIns="0" rtlCol="0" anchor="ctr"/>
+          <a:lstStyle/>
+          <a:p>
+            <a:pPr indent="0" marL="0">
+              <a:buNone/>
+            </a:pPr>
+            <a:r>
+              <a:rPr lang="en-US" sz="1400" b="1" dirty="0">
+                <a:solidFill>
+                  <a:srgbClr val="FFFFFF"/>
+                </a:solidFill>
+              </a:rPr>
+              <a:t>🔍 如何验证？</a:t>
+            </a:r>
+            <a:endParaRPr lang="en-US" sz="1400" dirty="0"/>
+          </a:p>
+        </p:txBody>
+      </p:sp>
+      <p:sp>
+        <p:nvSpPr>
+          <p:cNvPr id="21" name="Text 19"/>
+          <p:cNvSpPr/>
+          <p:nvPr/>
+        </p:nvSpPr>
+        <p:spPr>
+          <a:xfrm>
+            <a:off x="5212080" y="1783080"/>
+            <a:ext cx="3108960" cy="2103120"/>
+          </a:xfrm>
+          <a:prstGeom prst="rect">
+            <a:avLst/>
+          </a:prstGeom>
+          <a:noFill/>
+          <a:ln/>
+        </p:spPr>
+        <p:txBody>
+          <a:bodyPr wrap="square" rtlCol="0" anchor="t"/>
+          <a:lstStyle/>
+          <a:p>
+            <a:pPr indent="0" marL="0">
+              <a:spcAft>
+                <a:spcPts val="600"/>
+              </a:spcAft>
+              <a:buNone/>
+            </a:pPr>
+            <a:r>
+              <a:rPr lang="en-US" sz="1100" dirty="0">
+                <a:solidFill>
+                  <a:srgbClr val="CADCFC"/>
+                </a:solidFill>
+              </a:rPr>
+              <a:t>① 打开 anthropic.com/pricing 查看实时定价</a:t>
+            </a:r>
+            <a:endParaRPr lang="en-US" sz="1100" dirty="0"/>
+          </a:p>
+          <a:p>
+            <a:pPr indent="0" marL="0">
+              <a:spcAft>
+                <a:spcPts val="600"/>
+              </a:spcAft>
+              <a:buNone/>
+            </a:pPr>
+            <a:r>
+              <a:rPr lang="en-US" sz="1100" dirty="0">
+                <a:solidFill>
+                  <a:srgbClr val="CADCFC"/>
+                </a:solidFill>
+              </a:rPr>
+              <a:t>② 查看 ~/.claude/usage.json 对照自己用量</a:t>
+            </a:r>
+            <a:endParaRPr lang="en-US" sz="1100" dirty="0"/>
+          </a:p>
+          <a:p>
+            <a:pPr indent="0" marL="0">
+              <a:spcAft>
+                <a:spcPts val="600"/>
+              </a:spcAft>
+              <a:buNone/>
+            </a:pPr>
+            <a:r>
+              <a:rPr lang="en-US" sz="1100" dirty="0">
+                <a:solidFill>
+                  <a:srgbClr val="CADCFC"/>
+                </a:solidFill>
+              </a:rPr>
+              <a:t>③ 运行 /tokens 命令看当前会话</a:t>
+            </a:r>
+            <a:endParaRPr lang="en-US" sz="1100" dirty="0"/>
+          </a:p>
+          <a:p>
+            <a:pPr indent="0" marL="0">
+              <a:spcAft>
+                <a:spcPts val="600"/>
+              </a:spcAft>
+              <a:buNone/>
+            </a:pPr>
+            <a:r>
+              <a:rPr lang="en-US" sz="1100" dirty="0">
+                <a:solidFill>
+                  <a:srgbClr val="CADCFC"/>
+                </a:solidFill>
+              </a:rPr>
+              <a:t>④ 所有节省比例取保守值(&lt;实测)</a:t>
+            </a:r>
+            <a:endParaRPr lang="en-US" sz="1100" dirty="0"/>
+          </a:p>
+          <a:p>
+            <a:pPr indent="0" marL="0">
+              <a:spcAft>
+                <a:spcPts val="600"/>
+              </a:spcAft>
+              <a:buNone/>
+            </a:pPr>
+            <a:r>
+              <a:rPr lang="en-US" sz="1100" dirty="0">
+                <a:solidFill>
+                  <a:srgbClr val="CADCFC"/>
+                </a:solidFill>
+              </a:rPr>
+              <a:t>⑤ count_tokens() = API计费同一tokenizer</a:t>
+            </a:r>
+            <a:endParaRPr lang="en-US" sz="1100" dirty="0"/>
+          </a:p>
+          <a:p>
+            <a:pPr indent="0" marL="0">
+              <a:spcAft>
+                <a:spcPts val="600"/>
+              </a:spcAft>
+              <a:buNone/>
+            </a:pPr>
+            <a:r>
+              <a:rPr lang="en-US" sz="1100" dirty="0">
+                <a:solidFill>
+                  <a:srgbClr val="CADCFC"/>
+                </a:solidFill>
+              </a:rPr>
+              <a:t>⚠ 估算≠账单, 以实际API账单为准</a:t>
+            </a:r>
+            <a:endParaRPr lang="en-US" sz="1100" dirty="0"/>
+          </a:p>
+        </p:txBody>
+      </p:sp>
+      <p:sp>
+        <p:nvSpPr>
+          <p:cNvPr id="22" name="Shape 20"/>
+          <p:cNvSpPr/>
+          <p:nvPr/>
+        </p:nvSpPr>
+        <p:spPr>
+          <a:xfrm>
+            <a:off x="640080" y="4297680"/>
+            <a:ext cx="7863840" cy="502920"/>
+          </a:xfrm>
+          <a:prstGeom prst="rect">
+            <a:avLst/>
+          </a:prstGeom>
+          <a:solidFill>
+            <a:srgbClr val="016070"/>
+          </a:solidFill>
+          <a:ln/>
+        </p:spPr>
+      </p:sp>
+      <p:sp>
+        <p:nvSpPr>
+          <p:cNvPr id="23" name="Text 21"/>
+          <p:cNvSpPr/>
+          <p:nvPr/>
+        </p:nvSpPr>
+        <p:spPr>
+          <a:xfrm>
+            <a:off x="822960" y="4343400"/>
+            <a:ext cx="7498080" cy="411480"/>
           </a:xfrm>
           <a:prstGeom prst="rect">
             <a:avLst/>
@@ -3572,350 +4188,12 @@
               <a:buNone/>
             </a:pPr>
             <a:r>
-              <a:rPr lang="en-US" sz="1200" b="1" dirty="0">
+              <a:rPr lang="en-US" sz="1100" dirty="0">
                 <a:solidFill>
                   <a:srgbClr val="FFFFFF"/>
                 </a:solidFill>
               </a:rPr>
-              <a:t>本周 (40分钟)</a:t>
-            </a:r>
-            <a:endParaRPr lang="en-US" sz="1200" dirty="0"/>
-          </a:p>
-        </p:txBody>
-      </p:sp>
-      <p:sp>
-        <p:nvSpPr>
-          <p:cNvPr id="14" name="Shape 12"/>
-          <p:cNvSpPr/>
-          <p:nvPr/>
-        </p:nvSpPr>
-        <p:spPr>
-          <a:xfrm>
-            <a:off x="7589520" y="2377440"/>
-            <a:ext cx="914400" cy="365760"/>
-          </a:xfrm>
-          <a:prstGeom prst="rect">
-            <a:avLst/>
-          </a:prstGeom>
-          <a:solidFill>
-            <a:srgbClr val="D97706"/>
-          </a:solidFill>
-          <a:ln/>
-        </p:spPr>
-      </p:sp>
-      <p:sp>
-        <p:nvSpPr>
-          <p:cNvPr id="15" name="Text 13"/>
-          <p:cNvSpPr/>
-          <p:nvPr/>
-        </p:nvSpPr>
-        <p:spPr>
-          <a:xfrm>
-            <a:off x="6400800" y="2395728"/>
-            <a:ext cx="2103120" cy="329184"/>
-          </a:xfrm>
-          <a:prstGeom prst="rect">
-            <a:avLst/>
-          </a:prstGeom>
-          <a:noFill/>
-          <a:ln/>
-        </p:spPr>
-        <p:txBody>
-          <a:bodyPr wrap="square" lIns="0" tIns="0" rIns="0" bIns="0" rtlCol="0" anchor="ctr"/>
-          <a:lstStyle/>
-          <a:p>
-            <a:pPr algn="r" indent="0" marL="0">
-              <a:buNone/>
-            </a:pPr>
-            <a:r>
-              <a:rPr lang="en-US" sz="1100" b="1" dirty="0">
-                <a:solidFill>
-                  <a:srgbClr val="D97706"/>
-                </a:solidFill>
-              </a:rPr>
-              <a:t>→ 累计省 42%</a:t>
-            </a:r>
-            <a:endParaRPr lang="en-US" sz="1100" dirty="0"/>
-          </a:p>
-        </p:txBody>
-      </p:sp>
-      <p:sp>
-        <p:nvSpPr>
-          <p:cNvPr id="16" name="Text 14"/>
-          <p:cNvSpPr/>
-          <p:nvPr/>
-        </p:nvSpPr>
-        <p:spPr>
-          <a:xfrm>
-            <a:off x="822960" y="2788920"/>
-            <a:ext cx="7315200" cy="822960"/>
-          </a:xfrm>
-          <a:prstGeom prst="rect">
-            <a:avLst/>
-          </a:prstGeom>
-          <a:noFill/>
-          <a:ln/>
-        </p:spPr>
-        <p:txBody>
-          <a:bodyPr wrap="square" rtlCol="0" anchor="t"/>
-          <a:lstStyle/>
-          <a:p>
-            <a:pPr marL="342900" indent="-342900">
-              <a:spcAft>
-                <a:spcPts val="200"/>
-              </a:spcAft>
-              <a:buSzPct val="100000"/>
-              <a:buChar char="•"/>
-            </a:pPr>
-            <a:r>
-              <a:rPr lang="en-US" sz="1100" dirty="0">
-                <a:solidFill>
-                  <a:srgbClr val="1E293B"/>
-                </a:solidFill>
-              </a:rPr>
-              <a:t>创建 .claudeignore 排除 build/oh_modules/</a:t>
-            </a:r>
-            <a:endParaRPr lang="en-US" sz="1100" dirty="0"/>
-          </a:p>
-          <a:p>
-            <a:pPr marL="342900" indent="-342900">
-              <a:spcAft>
-                <a:spcPts val="200"/>
-              </a:spcAft>
-              <a:buSzPct val="100000"/>
-              <a:buChar char="•"/>
-            </a:pPr>
-            <a:r>
-              <a:rPr lang="en-US" sz="1100" dirty="0">
-                <a:solidFill>
-                  <a:srgbClr val="1E293B"/>
-                </a:solidFill>
-              </a:rPr>
-              <a:t>精简 CLAUDE.md 至 &lt;1,500 tokens</a:t>
-            </a:r>
-            <a:endParaRPr lang="en-US" sz="1100" dirty="0"/>
-          </a:p>
-          <a:p>
-            <a:pPr marL="342900" indent="-342900">
-              <a:spcAft>
-                <a:spcPts val="200"/>
-              </a:spcAft>
-              <a:buSzPct val="100000"/>
-              <a:buChar char="•"/>
-            </a:pPr>
-            <a:r>
-              <a:rPr lang="en-US" sz="1100" dirty="0">
-                <a:solidFill>
-                  <a:srgbClr val="1E293B"/>
-                </a:solidFill>
-              </a:rPr>
-              <a:t>安装 DeepSeek V4 模型配置</a:t>
-            </a:r>
-            <a:endParaRPr lang="en-US" sz="1100" dirty="0"/>
-          </a:p>
-        </p:txBody>
-      </p:sp>
-      <p:sp>
-        <p:nvSpPr>
-          <p:cNvPr id="17" name="Shape 15"/>
-          <p:cNvSpPr/>
-          <p:nvPr/>
-        </p:nvSpPr>
-        <p:spPr>
-          <a:xfrm>
-            <a:off x="640080" y="3657600"/>
-            <a:ext cx="1645920" cy="365760"/>
-          </a:xfrm>
-          <a:prstGeom prst="rect">
-            <a:avLst/>
-          </a:prstGeom>
-          <a:solidFill>
-            <a:srgbClr val="028090"/>
-          </a:solidFill>
-          <a:ln/>
-        </p:spPr>
-      </p:sp>
-      <p:sp>
-        <p:nvSpPr>
-          <p:cNvPr id="18" name="Text 16"/>
-          <p:cNvSpPr/>
-          <p:nvPr/>
-        </p:nvSpPr>
-        <p:spPr>
-          <a:xfrm>
-            <a:off x="640080" y="3675888"/>
-            <a:ext cx="1645920" cy="329184"/>
-          </a:xfrm>
-          <a:prstGeom prst="rect">
-            <a:avLst/>
-          </a:prstGeom>
-          <a:noFill/>
-          <a:ln/>
-        </p:spPr>
-        <p:txBody>
-          <a:bodyPr wrap="square" lIns="0" tIns="0" rIns="0" bIns="0" rtlCol="0" anchor="ctr"/>
-          <a:lstStyle/>
-          <a:p>
-            <a:pPr algn="ctr" indent="0" marL="0">
-              <a:buNone/>
-            </a:pPr>
-            <a:r>
-              <a:rPr lang="en-US" sz="1200" b="1" dirty="0">
-                <a:solidFill>
-                  <a:srgbClr val="FFFFFF"/>
-                </a:solidFill>
-              </a:rPr>
-              <a:t>持续养成</a:t>
-            </a:r>
-            <a:endParaRPr lang="en-US" sz="1200" dirty="0"/>
-          </a:p>
-        </p:txBody>
-      </p:sp>
-      <p:sp>
-        <p:nvSpPr>
-          <p:cNvPr id="19" name="Shape 17"/>
-          <p:cNvSpPr/>
-          <p:nvPr/>
-        </p:nvSpPr>
-        <p:spPr>
-          <a:xfrm>
-            <a:off x="7589520" y="3657600"/>
-            <a:ext cx="914400" cy="365760"/>
-          </a:xfrm>
-          <a:prstGeom prst="rect">
-            <a:avLst/>
-          </a:prstGeom>
-          <a:solidFill>
-            <a:srgbClr val="028090"/>
-          </a:solidFill>
-          <a:ln/>
-        </p:spPr>
-      </p:sp>
-      <p:sp>
-        <p:nvSpPr>
-          <p:cNvPr id="20" name="Text 18"/>
-          <p:cNvSpPr/>
-          <p:nvPr/>
-        </p:nvSpPr>
-        <p:spPr>
-          <a:xfrm>
-            <a:off x="6400800" y="3675888"/>
-            <a:ext cx="2103120" cy="329184"/>
-          </a:xfrm>
-          <a:prstGeom prst="rect">
-            <a:avLst/>
-          </a:prstGeom>
-          <a:noFill/>
-          <a:ln/>
-        </p:spPr>
-        <p:txBody>
-          <a:bodyPr wrap="square" lIns="0" tIns="0" rIns="0" bIns="0" rtlCol="0" anchor="ctr"/>
-          <a:lstStyle/>
-          <a:p>
-            <a:pPr algn="r" indent="0" marL="0">
-              <a:buNone/>
-            </a:pPr>
-            <a:r>
-              <a:rPr lang="en-US" sz="1100" b="1" dirty="0">
-                <a:solidFill>
-                  <a:srgbClr val="028090"/>
-                </a:solidFill>
-              </a:rPr>
-              <a:t>→ 累计省 91%</a:t>
-            </a:r>
-            <a:endParaRPr lang="en-US" sz="1100" dirty="0"/>
-          </a:p>
-        </p:txBody>
-      </p:sp>
-      <p:sp>
-        <p:nvSpPr>
-          <p:cNvPr id="21" name="Text 19"/>
-          <p:cNvSpPr/>
-          <p:nvPr/>
-        </p:nvSpPr>
-        <p:spPr>
-          <a:xfrm>
-            <a:off x="822960" y="4069080"/>
-            <a:ext cx="7315200" cy="822960"/>
-          </a:xfrm>
-          <a:prstGeom prst="rect">
-            <a:avLst/>
-          </a:prstGeom>
-          <a:noFill/>
-          <a:ln/>
-        </p:spPr>
-        <p:txBody>
-          <a:bodyPr wrap="square" rtlCol="0" anchor="t"/>
-          <a:lstStyle/>
-          <a:p>
-            <a:pPr marL="342900" indent="-342900">
-              <a:spcAft>
-                <a:spcPts val="200"/>
-              </a:spcAft>
-              <a:buSzPct val="100000"/>
-              <a:buChar char="•"/>
-            </a:pPr>
-            <a:r>
-              <a:rPr lang="en-US" sz="1100" dirty="0">
-                <a:solidFill>
-                  <a:srgbClr val="1E293B"/>
-                </a:solidFill>
-              </a:rPr>
-              <a:t>每10-15轮执行 /compact</a:t>
-            </a:r>
-            <a:endParaRPr lang="en-US" sz="1100" dirty="0"/>
-          </a:p>
-          <a:p>
-            <a:pPr marL="342900" indent="-342900">
-              <a:spcAft>
-                <a:spcPts val="200"/>
-              </a:spcAft>
-              <a:buSzPct val="100000"/>
-              <a:buChar char="•"/>
-            </a:pPr>
-            <a:r>
-              <a:rPr lang="en-US" sz="1100" dirty="0">
-                <a:solidFill>
-                  <a:srgbClr val="1E293B"/>
-                </a:solidFill>
-              </a:rPr>
-              <a:t>一个模块一个会话</a:t>
-            </a:r>
-            <a:endParaRPr lang="en-US" sz="1100" dirty="0"/>
-          </a:p>
-          <a:p>
-            <a:pPr marL="342900" indent="-342900">
-              <a:spcAft>
-                <a:spcPts val="200"/>
-              </a:spcAft>
-              <a:buSzPct val="100000"/>
-              <a:buChar char="•"/>
-            </a:pPr>
-            <a:r>
-              <a:rPr lang="en-US" sz="1100" dirty="0">
-                <a:solidFill>
-                  <a:srgbClr val="1E293B"/>
-                </a:solidFill>
-              </a:rPr>
-              <a:t>简单任务用 DeepSeek，架构用 Opus</a:t>
-            </a:r>
-            <a:endParaRPr lang="en-US" sz="1100" dirty="0"/>
-          </a:p>
-          <a:p>
-            <a:pPr marL="342900" indent="-342900">
-              <a:spcAft>
-                <a:spcPts val="200"/>
-              </a:spcAft>
-              <a:buSzPct val="100000"/>
-              <a:buChar char="•"/>
-            </a:pPr>
-            <a:r>
-              <a:rPr lang="en-US" sz="1100" dirty="0">
-                <a:solidFill>
-                  <a:srgbClr val="1E293B"/>
-                </a:solidFill>
-              </a:rPr>
-              <a:t>用高效提问模板 （列表 + @引用）</a:t>
+              <a:t>所有数字基于官方定价+社区实测+保守推算，可独立验证。定价以官方页面为准。</a:t>
             </a:r>
             <a:endParaRPr lang="en-US" sz="1100" dirty="0"/>
           </a:p>
@@ -3932,6 +4210,2930 @@
 <file path=ppt/slides/slide11.xml><?xml version="1.0" encoding="utf-8"?>
 <p:sld xmlns:a="http://schemas.openxmlformats.org/drawingml/2006/main" xmlns:r="http://schemas.openxmlformats.org/officeDocument/2006/relationships" xmlns:p="http://schemas.openxmlformats.org/presentationml/2006/main">
   <p:cSld name="Slide 11">
+    <p:bg>
+      <p:bgPr>
+        <a:solidFill>
+          <a:srgbClr val="F5F7FA"/>
+        </a:solidFill>
+      </p:bgPr>
+    </p:bg>
+    <p:spTree>
+      <p:nvGrpSpPr>
+        <p:cNvPr id="1" name=""/>
+        <p:cNvGrpSpPr/>
+        <p:nvPr/>
+      </p:nvGrpSpPr>
+      <p:grpSpPr>
+        <a:xfrm>
+          <a:off x="0" y="0"/>
+          <a:ext cx="0" cy="0"/>
+          <a:chOff x="0" y="0"/>
+          <a:chExt cx="0" cy="0"/>
+        </a:xfrm>
+      </p:grpSpPr>
+      <p:sp>
+        <p:nvSpPr>
+          <p:cNvPr id="2" name="Shape 0"/>
+          <p:cNvSpPr/>
+          <p:nvPr/>
+        </p:nvSpPr>
+        <p:spPr>
+          <a:xfrm>
+            <a:off x="0" y="0"/>
+            <a:ext cx="9144000" cy="54864"/>
+          </a:xfrm>
+          <a:prstGeom prst="rect">
+            <a:avLst/>
+          </a:prstGeom>
+          <a:solidFill>
+            <a:srgbClr val="028090"/>
+          </a:solidFill>
+          <a:ln/>
+        </p:spPr>
+      </p:sp>
+      <p:sp>
+        <p:nvSpPr>
+          <p:cNvPr id="3" name="Text 1"/>
+          <p:cNvSpPr/>
+          <p:nvPr/>
+        </p:nvSpPr>
+        <p:spPr>
+          <a:xfrm>
+            <a:off x="640080" y="228600"/>
+            <a:ext cx="7863840" cy="594360"/>
+          </a:xfrm>
+          <a:prstGeom prst="rect">
+            <a:avLst/>
+          </a:prstGeom>
+          <a:noFill/>
+          <a:ln/>
+        </p:spPr>
+        <p:txBody>
+          <a:bodyPr wrap="square" lIns="0" tIns="0" rIns="0" bIns="0" rtlCol="0" anchor="ctr"/>
+          <a:lstStyle/>
+          <a:p>
+            <a:pPr indent="0" marL="0">
+              <a:buNone/>
+            </a:pPr>
+            <a:r>
+              <a:rPr lang="en-US" sz="2800" b="1" dirty="0">
+                <a:solidFill>
+                  <a:srgbClr val="1E2761"/>
+                </a:solidFill>
+                <a:latin typeface="Arial" pitchFamily="34" charset="0"/>
+                <a:ea typeface="Arial" pitchFamily="34" charset="-122"/>
+                <a:cs typeface="Arial" pitchFamily="34" charset="-120"/>
+              </a:rPr>
+              <a:t>优先级排序 — 从易到难</a:t>
+            </a:r>
+            <a:endParaRPr lang="en-US" sz="2800" dirty="0"/>
+          </a:p>
+        </p:txBody>
+      </p:sp>
+      <p:sp>
+        <p:nvSpPr>
+          <p:cNvPr id="4" name="Shape 2"/>
+          <p:cNvSpPr/>
+          <p:nvPr/>
+        </p:nvSpPr>
+        <p:spPr>
+          <a:xfrm>
+            <a:off x="640080" y="868680"/>
+            <a:ext cx="7863840" cy="0"/>
+          </a:xfrm>
+          <a:prstGeom prst="line">
+            <a:avLst/>
+          </a:prstGeom>
+          <a:noFill/>
+          <a:ln w="25400">
+            <a:solidFill>
+              <a:srgbClr val="028090"/>
+            </a:solidFill>
+            <a:prstDash val="solid"/>
+          </a:ln>
+        </p:spPr>
+      </p:sp>
+      <p:sp>
+        <p:nvSpPr>
+          <p:cNvPr id="5" name="Text 3"/>
+          <p:cNvSpPr/>
+          <p:nvPr/>
+        </p:nvSpPr>
+        <p:spPr>
+          <a:xfrm>
+            <a:off x="7772400" y="4800600"/>
+            <a:ext cx="914400" cy="274320"/>
+          </a:xfrm>
+          <a:prstGeom prst="rect">
+            <a:avLst/>
+          </a:prstGeom>
+          <a:noFill/>
+          <a:ln/>
+        </p:spPr>
+        <p:txBody>
+          <a:bodyPr wrap="square" rtlCol="0" anchor="ctr"/>
+          <a:lstStyle/>
+          <a:p>
+            <a:pPr algn="r" indent="0" marL="0">
+              <a:buNone/>
+            </a:pPr>
+            <a:r>
+              <a:rPr lang="en-US" sz="900" dirty="0">
+                <a:solidFill>
+                  <a:srgbClr val="64748B"/>
+                </a:solidFill>
+              </a:rPr>
+              <a:t>11</a:t>
+            </a:r>
+            <a:endParaRPr lang="en-US" sz="900" dirty="0"/>
+          </a:p>
+        </p:txBody>
+      </p:sp>
+      <p:sp>
+        <p:nvSpPr>
+          <p:cNvPr id="6" name="Text 4"/>
+          <p:cNvSpPr/>
+          <p:nvPr/>
+        </p:nvSpPr>
+        <p:spPr>
+          <a:xfrm>
+            <a:off x="457200" y="4800600"/>
+            <a:ext cx="3657600" cy="274320"/>
+          </a:xfrm>
+          <a:prstGeom prst="rect">
+            <a:avLst/>
+          </a:prstGeom>
+          <a:noFill/>
+          <a:ln/>
+        </p:spPr>
+        <p:txBody>
+          <a:bodyPr wrap="square" rtlCol="0" anchor="ctr"/>
+          <a:lstStyle/>
+          <a:p>
+            <a:pPr indent="0" marL="0">
+              <a:buNone/>
+            </a:pPr>
+            <a:r>
+              <a:rPr lang="en-US" sz="900" dirty="0">
+                <a:solidFill>
+                  <a:srgbClr val="64748B"/>
+                </a:solidFill>
+              </a:rPr>
+              <a:t>Claude Token 优化最佳实践</a:t>
+            </a:r>
+            <a:endParaRPr lang="en-US" sz="900" dirty="0"/>
+          </a:p>
+        </p:txBody>
+      </p:sp>
+      <p:sp>
+        <p:nvSpPr>
+          <p:cNvPr id="7" name="Shape 5"/>
+          <p:cNvSpPr/>
+          <p:nvPr/>
+        </p:nvSpPr>
+        <p:spPr>
+          <a:xfrm>
+            <a:off x="640080" y="1143000"/>
+            <a:ext cx="7863840" cy="822960"/>
+          </a:xfrm>
+          <a:prstGeom prst="rect">
+            <a:avLst/>
+          </a:prstGeom>
+          <a:solidFill>
+            <a:srgbClr val="FFFFFF"/>
+          </a:solidFill>
+          <a:ln/>
+          <a:effectLst>
+            <a:outerShdw sx="100000" sy="100000" kx="0" ky="0" algn="bl" rotWithShape="0" blurRad="76200" dist="25400" dir="8100000">
+              <a:srgbClr val="000000">
+                <a:alpha val="12000"/>
+              </a:srgbClr>
+            </a:outerShdw>
+          </a:effectLst>
+        </p:spPr>
+      </p:sp>
+      <p:sp>
+        <p:nvSpPr>
+          <p:cNvPr id="8" name="Shape 6"/>
+          <p:cNvSpPr/>
+          <p:nvPr/>
+        </p:nvSpPr>
+        <p:spPr>
+          <a:xfrm>
+            <a:off x="640080" y="1143000"/>
+            <a:ext cx="1463040" cy="822960"/>
+          </a:xfrm>
+          <a:prstGeom prst="rect">
+            <a:avLst/>
+          </a:prstGeom>
+          <a:solidFill>
+            <a:srgbClr val="059669"/>
+          </a:solidFill>
+          <a:ln/>
+        </p:spPr>
+      </p:sp>
+      <p:sp>
+        <p:nvSpPr>
+          <p:cNvPr id="9" name="Text 7"/>
+          <p:cNvSpPr/>
+          <p:nvPr/>
+        </p:nvSpPr>
+        <p:spPr>
+          <a:xfrm>
+            <a:off x="640080" y="1325880"/>
+            <a:ext cx="1463040" cy="457200"/>
+          </a:xfrm>
+          <a:prstGeom prst="rect">
+            <a:avLst/>
+          </a:prstGeom>
+          <a:noFill/>
+          <a:ln/>
+        </p:spPr>
+        <p:txBody>
+          <a:bodyPr wrap="square" lIns="0" tIns="0" rIns="0" bIns="0" rtlCol="0" anchor="ctr"/>
+          <a:lstStyle/>
+          <a:p>
+            <a:pPr algn="ctr" indent="0" marL="0">
+              <a:buNone/>
+            </a:pPr>
+            <a:r>
+              <a:rPr lang="en-US" sz="1400" b="1" dirty="0">
+                <a:solidFill>
+                  <a:srgbClr val="FFFFFF"/>
+                </a:solidFill>
+              </a:rPr>
+              <a:t>P0 立即执行</a:t>
+            </a:r>
+            <a:endParaRPr lang="en-US" sz="1400" dirty="0"/>
+          </a:p>
+        </p:txBody>
+      </p:sp>
+      <p:sp>
+        <p:nvSpPr>
+          <p:cNvPr id="10" name="Shape 8"/>
+          <p:cNvSpPr/>
+          <p:nvPr/>
+        </p:nvSpPr>
+        <p:spPr>
+          <a:xfrm>
+            <a:off x="2240280" y="1280160"/>
+            <a:ext cx="914400" cy="502920"/>
+          </a:xfrm>
+          <a:prstGeom prst="rect">
+            <a:avLst/>
+          </a:prstGeom>
+          <a:solidFill>
+            <a:srgbClr val="E2E8F0"/>
+          </a:solidFill>
+          <a:ln/>
+        </p:spPr>
+      </p:sp>
+      <p:sp>
+        <p:nvSpPr>
+          <p:cNvPr id="11" name="Text 9"/>
+          <p:cNvSpPr/>
+          <p:nvPr/>
+        </p:nvSpPr>
+        <p:spPr>
+          <a:xfrm>
+            <a:off x="2240280" y="1325880"/>
+            <a:ext cx="914400" cy="411480"/>
+          </a:xfrm>
+          <a:prstGeom prst="rect">
+            <a:avLst/>
+          </a:prstGeom>
+          <a:noFill/>
+          <a:ln/>
+        </p:spPr>
+        <p:txBody>
+          <a:bodyPr wrap="square" lIns="0" tIns="0" rIns="0" bIns="0" rtlCol="0" anchor="ctr"/>
+          <a:lstStyle/>
+          <a:p>
+            <a:pPr algn="ctr" indent="0" marL="0">
+              <a:buNone/>
+            </a:pPr>
+            <a:r>
+              <a:rPr lang="en-US" sz="1200" b="1" dirty="0">
+                <a:solidFill>
+                  <a:srgbClr val="1E2761"/>
+                </a:solidFill>
+              </a:rPr>
+              <a:t>10秒</a:t>
+            </a:r>
+            <a:endParaRPr lang="en-US" sz="1200" dirty="0"/>
+          </a:p>
+        </p:txBody>
+      </p:sp>
+      <p:sp>
+        <p:nvSpPr>
+          <p:cNvPr id="12" name="Text 10"/>
+          <p:cNvSpPr/>
+          <p:nvPr/>
+        </p:nvSpPr>
+        <p:spPr>
+          <a:xfrm>
+            <a:off x="3291840" y="1188720"/>
+            <a:ext cx="3200400" cy="731520"/>
+          </a:xfrm>
+          <a:prstGeom prst="rect">
+            <a:avLst/>
+          </a:prstGeom>
+          <a:noFill/>
+          <a:ln/>
+        </p:spPr>
+        <p:txBody>
+          <a:bodyPr wrap="square" lIns="0" tIns="0" rIns="0" bIns="0" rtlCol="0" anchor="ctr"/>
+          <a:lstStyle/>
+          <a:p>
+            <a:pPr indent="0" marL="0">
+              <a:buNone/>
+            </a:pPr>
+            <a:r>
+              <a:rPr lang="en-US" sz="1200" dirty="0">
+                <a:solidFill>
+                  <a:srgbClr val="1E293B"/>
+                </a:solidFill>
+              </a:rPr>
+              <a:t>关闭扩展思考 + 启用autoCompact</a:t>
+            </a:r>
+            <a:endParaRPr lang="en-US" sz="1200" dirty="0"/>
+          </a:p>
+        </p:txBody>
+      </p:sp>
+      <p:sp>
+        <p:nvSpPr>
+          <p:cNvPr id="13" name="Shape 11"/>
+          <p:cNvSpPr/>
+          <p:nvPr/>
+        </p:nvSpPr>
+        <p:spPr>
+          <a:xfrm>
+            <a:off x="6858000" y="1280160"/>
+            <a:ext cx="1463040" cy="502920"/>
+          </a:xfrm>
+          <a:prstGeom prst="rect">
+            <a:avLst/>
+          </a:prstGeom>
+          <a:solidFill>
+            <a:srgbClr val="059669"/>
+          </a:solidFill>
+          <a:ln/>
+        </p:spPr>
+      </p:sp>
+      <p:sp>
+        <p:nvSpPr>
+          <p:cNvPr id="14" name="Text 12"/>
+          <p:cNvSpPr/>
+          <p:nvPr/>
+        </p:nvSpPr>
+        <p:spPr>
+          <a:xfrm>
+            <a:off x="6858000" y="1325880"/>
+            <a:ext cx="1463040" cy="411480"/>
+          </a:xfrm>
+          <a:prstGeom prst="rect">
+            <a:avLst/>
+          </a:prstGeom>
+          <a:noFill/>
+          <a:ln/>
+        </p:spPr>
+        <p:txBody>
+          <a:bodyPr wrap="square" lIns="0" tIns="0" rIns="0" bIns="0" rtlCol="0" anchor="ctr"/>
+          <a:lstStyle/>
+          <a:p>
+            <a:pPr algn="ctr" indent="0" marL="0">
+              <a:buNone/>
+            </a:pPr>
+            <a:r>
+              <a:rPr lang="en-US" sz="1300" b="1" dirty="0">
+                <a:solidFill>
+                  <a:srgbClr val="FFFFFF"/>
+                </a:solidFill>
+              </a:rPr>
+              <a:t>省20-30%</a:t>
+            </a:r>
+            <a:endParaRPr lang="en-US" sz="1300" dirty="0"/>
+          </a:p>
+        </p:txBody>
+      </p:sp>
+      <p:sp>
+        <p:nvSpPr>
+          <p:cNvPr id="15" name="Shape 13"/>
+          <p:cNvSpPr/>
+          <p:nvPr/>
+        </p:nvSpPr>
+        <p:spPr>
+          <a:xfrm>
+            <a:off x="640080" y="2103120"/>
+            <a:ext cx="7863840" cy="822960"/>
+          </a:xfrm>
+          <a:prstGeom prst="rect">
+            <a:avLst/>
+          </a:prstGeom>
+          <a:solidFill>
+            <a:srgbClr val="FFFFFF"/>
+          </a:solidFill>
+          <a:ln/>
+          <a:effectLst>
+            <a:outerShdw sx="100000" sy="100000" kx="0" ky="0" algn="bl" rotWithShape="0" blurRad="76200" dist="25400" dir="8100000">
+              <a:srgbClr val="000000">
+                <a:alpha val="12000"/>
+              </a:srgbClr>
+            </a:outerShdw>
+          </a:effectLst>
+        </p:spPr>
+      </p:sp>
+      <p:sp>
+        <p:nvSpPr>
+          <p:cNvPr id="16" name="Shape 14"/>
+          <p:cNvSpPr/>
+          <p:nvPr/>
+        </p:nvSpPr>
+        <p:spPr>
+          <a:xfrm>
+            <a:off x="640080" y="2103120"/>
+            <a:ext cx="1463040" cy="822960"/>
+          </a:xfrm>
+          <a:prstGeom prst="rect">
+            <a:avLst/>
+          </a:prstGeom>
+          <a:solidFill>
+            <a:srgbClr val="028090"/>
+          </a:solidFill>
+          <a:ln/>
+        </p:spPr>
+      </p:sp>
+      <p:sp>
+        <p:nvSpPr>
+          <p:cNvPr id="17" name="Text 15"/>
+          <p:cNvSpPr/>
+          <p:nvPr/>
+        </p:nvSpPr>
+        <p:spPr>
+          <a:xfrm>
+            <a:off x="640080" y="2286000"/>
+            <a:ext cx="1463040" cy="457200"/>
+          </a:xfrm>
+          <a:prstGeom prst="rect">
+            <a:avLst/>
+          </a:prstGeom>
+          <a:noFill/>
+          <a:ln/>
+        </p:spPr>
+        <p:txBody>
+          <a:bodyPr wrap="square" lIns="0" tIns="0" rIns="0" bIns="0" rtlCol="0" anchor="ctr"/>
+          <a:lstStyle/>
+          <a:p>
+            <a:pPr algn="ctr" indent="0" marL="0">
+              <a:buNone/>
+            </a:pPr>
+            <a:r>
+              <a:rPr lang="en-US" sz="1400" b="1" dirty="0">
+                <a:solidFill>
+                  <a:srgbClr val="FFFFFF"/>
+                </a:solidFill>
+              </a:rPr>
+              <a:t>P1 本周完成</a:t>
+            </a:r>
+            <a:endParaRPr lang="en-US" sz="1400" dirty="0"/>
+          </a:p>
+        </p:txBody>
+      </p:sp>
+      <p:sp>
+        <p:nvSpPr>
+          <p:cNvPr id="18" name="Shape 16"/>
+          <p:cNvSpPr/>
+          <p:nvPr/>
+        </p:nvSpPr>
+        <p:spPr>
+          <a:xfrm>
+            <a:off x="2240280" y="2240280"/>
+            <a:ext cx="914400" cy="502920"/>
+          </a:xfrm>
+          <a:prstGeom prst="rect">
+            <a:avLst/>
+          </a:prstGeom>
+          <a:solidFill>
+            <a:srgbClr val="E2E8F0"/>
+          </a:solidFill>
+          <a:ln/>
+        </p:spPr>
+      </p:sp>
+      <p:sp>
+        <p:nvSpPr>
+          <p:cNvPr id="19" name="Text 17"/>
+          <p:cNvSpPr/>
+          <p:nvPr/>
+        </p:nvSpPr>
+        <p:spPr>
+          <a:xfrm>
+            <a:off x="2240280" y="2286000"/>
+            <a:ext cx="914400" cy="411480"/>
+          </a:xfrm>
+          <a:prstGeom prst="rect">
+            <a:avLst/>
+          </a:prstGeom>
+          <a:noFill/>
+          <a:ln/>
+        </p:spPr>
+        <p:txBody>
+          <a:bodyPr wrap="square" lIns="0" tIns="0" rIns="0" bIns="0" rtlCol="0" anchor="ctr"/>
+          <a:lstStyle/>
+          <a:p>
+            <a:pPr algn="ctr" indent="0" marL="0">
+              <a:buNone/>
+            </a:pPr>
+            <a:r>
+              <a:rPr lang="en-US" sz="1200" b="1" dirty="0">
+                <a:solidFill>
+                  <a:srgbClr val="1E2761"/>
+                </a:solidFill>
+              </a:rPr>
+              <a:t>20分钟</a:t>
+            </a:r>
+            <a:endParaRPr lang="en-US" sz="1200" dirty="0"/>
+          </a:p>
+        </p:txBody>
+      </p:sp>
+      <p:sp>
+        <p:nvSpPr>
+          <p:cNvPr id="20" name="Text 18"/>
+          <p:cNvSpPr/>
+          <p:nvPr/>
+        </p:nvSpPr>
+        <p:spPr>
+          <a:xfrm>
+            <a:off x="3291840" y="2148840"/>
+            <a:ext cx="3200400" cy="731520"/>
+          </a:xfrm>
+          <a:prstGeom prst="rect">
+            <a:avLst/>
+          </a:prstGeom>
+          <a:noFill/>
+          <a:ln/>
+        </p:spPr>
+        <p:txBody>
+          <a:bodyPr wrap="square" lIns="0" tIns="0" rIns="0" bIns="0" rtlCol="0" anchor="ctr"/>
+          <a:lstStyle/>
+          <a:p>
+            <a:pPr indent="0" marL="0">
+              <a:buNone/>
+            </a:pPr>
+            <a:r>
+              <a:rPr lang="en-US" sz="1200" dirty="0">
+                <a:solidFill>
+                  <a:srgbClr val="1E293B"/>
+                </a:solidFill>
+              </a:rPr>
+              <a:t>创建.claudeignore + 精简CLAUDE.md</a:t>
+            </a:r>
+            <a:endParaRPr lang="en-US" sz="1200" dirty="0"/>
+          </a:p>
+        </p:txBody>
+      </p:sp>
+      <p:sp>
+        <p:nvSpPr>
+          <p:cNvPr id="21" name="Shape 19"/>
+          <p:cNvSpPr/>
+          <p:nvPr/>
+        </p:nvSpPr>
+        <p:spPr>
+          <a:xfrm>
+            <a:off x="6858000" y="2240280"/>
+            <a:ext cx="1463040" cy="502920"/>
+          </a:xfrm>
+          <a:prstGeom prst="rect">
+            <a:avLst/>
+          </a:prstGeom>
+          <a:solidFill>
+            <a:srgbClr val="028090"/>
+          </a:solidFill>
+          <a:ln/>
+        </p:spPr>
+      </p:sp>
+      <p:sp>
+        <p:nvSpPr>
+          <p:cNvPr id="22" name="Text 20"/>
+          <p:cNvSpPr/>
+          <p:nvPr/>
+        </p:nvSpPr>
+        <p:spPr>
+          <a:xfrm>
+            <a:off x="6858000" y="2286000"/>
+            <a:ext cx="1463040" cy="411480"/>
+          </a:xfrm>
+          <a:prstGeom prst="rect">
+            <a:avLst/>
+          </a:prstGeom>
+          <a:noFill/>
+          <a:ln/>
+        </p:spPr>
+        <p:txBody>
+          <a:bodyPr wrap="square" lIns="0" tIns="0" rIns="0" bIns="0" rtlCol="0" anchor="ctr"/>
+          <a:lstStyle/>
+          <a:p>
+            <a:pPr algn="ctr" indent="0" marL="0">
+              <a:buNone/>
+            </a:pPr>
+            <a:r>
+              <a:rPr lang="en-US" sz="1300" b="1" dirty="0">
+                <a:solidFill>
+                  <a:srgbClr val="FFFFFF"/>
+                </a:solidFill>
+              </a:rPr>
+              <a:t>省30-55%</a:t>
+            </a:r>
+            <a:endParaRPr lang="en-US" sz="1300" dirty="0"/>
+          </a:p>
+        </p:txBody>
+      </p:sp>
+      <p:sp>
+        <p:nvSpPr>
+          <p:cNvPr id="23" name="Shape 21"/>
+          <p:cNvSpPr/>
+          <p:nvPr/>
+        </p:nvSpPr>
+        <p:spPr>
+          <a:xfrm>
+            <a:off x="640080" y="3063240"/>
+            <a:ext cx="7863840" cy="822960"/>
+          </a:xfrm>
+          <a:prstGeom prst="rect">
+            <a:avLst/>
+          </a:prstGeom>
+          <a:solidFill>
+            <a:srgbClr val="FFFFFF"/>
+          </a:solidFill>
+          <a:ln/>
+          <a:effectLst>
+            <a:outerShdw sx="100000" sy="100000" kx="0" ky="0" algn="bl" rotWithShape="0" blurRad="76200" dist="25400" dir="8100000">
+              <a:srgbClr val="000000">
+                <a:alpha val="12000"/>
+              </a:srgbClr>
+            </a:outerShdw>
+          </a:effectLst>
+        </p:spPr>
+      </p:sp>
+      <p:sp>
+        <p:nvSpPr>
+          <p:cNvPr id="24" name="Shape 22"/>
+          <p:cNvSpPr/>
+          <p:nvPr/>
+        </p:nvSpPr>
+        <p:spPr>
+          <a:xfrm>
+            <a:off x="640080" y="3063240"/>
+            <a:ext cx="1463040" cy="822960"/>
+          </a:xfrm>
+          <a:prstGeom prst="rect">
+            <a:avLst/>
+          </a:prstGeom>
+          <a:solidFill>
+            <a:srgbClr val="D97706"/>
+          </a:solidFill>
+          <a:ln/>
+        </p:spPr>
+      </p:sp>
+      <p:sp>
+        <p:nvSpPr>
+          <p:cNvPr id="25" name="Text 23"/>
+          <p:cNvSpPr/>
+          <p:nvPr/>
+        </p:nvSpPr>
+        <p:spPr>
+          <a:xfrm>
+            <a:off x="640080" y="3246120"/>
+            <a:ext cx="1463040" cy="457200"/>
+          </a:xfrm>
+          <a:prstGeom prst="rect">
+            <a:avLst/>
+          </a:prstGeom>
+          <a:noFill/>
+          <a:ln/>
+        </p:spPr>
+        <p:txBody>
+          <a:bodyPr wrap="square" lIns="0" tIns="0" rIns="0" bIns="0" rtlCol="0" anchor="ctr"/>
+          <a:lstStyle/>
+          <a:p>
+            <a:pPr algn="ctr" indent="0" marL="0">
+              <a:buNone/>
+            </a:pPr>
+            <a:r>
+              <a:rPr lang="en-US" sz="1400" b="1" dirty="0">
+                <a:solidFill>
+                  <a:srgbClr val="FFFFFF"/>
+                </a:solidFill>
+              </a:rPr>
+              <a:t>P2 持续养成</a:t>
+            </a:r>
+            <a:endParaRPr lang="en-US" sz="1400" dirty="0"/>
+          </a:p>
+        </p:txBody>
+      </p:sp>
+      <p:sp>
+        <p:nvSpPr>
+          <p:cNvPr id="26" name="Shape 24"/>
+          <p:cNvSpPr/>
+          <p:nvPr/>
+        </p:nvSpPr>
+        <p:spPr>
+          <a:xfrm>
+            <a:off x="2240280" y="3200400"/>
+            <a:ext cx="914400" cy="502920"/>
+          </a:xfrm>
+          <a:prstGeom prst="rect">
+            <a:avLst/>
+          </a:prstGeom>
+          <a:solidFill>
+            <a:srgbClr val="E2E8F0"/>
+          </a:solidFill>
+          <a:ln/>
+        </p:spPr>
+      </p:sp>
+      <p:sp>
+        <p:nvSpPr>
+          <p:cNvPr id="27" name="Text 25"/>
+          <p:cNvSpPr/>
+          <p:nvPr/>
+        </p:nvSpPr>
+        <p:spPr>
+          <a:xfrm>
+            <a:off x="2240280" y="3246120"/>
+            <a:ext cx="914400" cy="411480"/>
+          </a:xfrm>
+          <a:prstGeom prst="rect">
+            <a:avLst/>
+          </a:prstGeom>
+          <a:noFill/>
+          <a:ln/>
+        </p:spPr>
+        <p:txBody>
+          <a:bodyPr wrap="square" lIns="0" tIns="0" rIns="0" bIns="0" rtlCol="0" anchor="ctr"/>
+          <a:lstStyle/>
+          <a:p>
+            <a:pPr algn="ctr" indent="0" marL="0">
+              <a:buNone/>
+            </a:pPr>
+            <a:r>
+              <a:rPr lang="en-US" sz="1200" b="1" dirty="0">
+                <a:solidFill>
+                  <a:srgbClr val="1E2761"/>
+                </a:solidFill>
+              </a:rPr>
+              <a:t>习惯</a:t>
+            </a:r>
+            <a:endParaRPr lang="en-US" sz="1200" dirty="0"/>
+          </a:p>
+        </p:txBody>
+      </p:sp>
+      <p:sp>
+        <p:nvSpPr>
+          <p:cNvPr id="28" name="Text 26"/>
+          <p:cNvSpPr/>
+          <p:nvPr/>
+        </p:nvSpPr>
+        <p:spPr>
+          <a:xfrm>
+            <a:off x="3291840" y="3108960"/>
+            <a:ext cx="3200400" cy="731520"/>
+          </a:xfrm>
+          <a:prstGeom prst="rect">
+            <a:avLst/>
+          </a:prstGeom>
+          <a:noFill/>
+          <a:ln/>
+        </p:spPr>
+        <p:txBody>
+          <a:bodyPr wrap="square" lIns="0" tIns="0" rIns="0" bIns="0" rtlCol="0" anchor="ctr"/>
+          <a:lstStyle/>
+          <a:p>
+            <a:pPr indent="0" marL="0">
+              <a:buNone/>
+            </a:pPr>
+            <a:r>
+              <a:rPr lang="en-US" sz="1200" dirty="0">
+                <a:solidFill>
+                  <a:srgbClr val="1E293B"/>
+                </a:solidFill>
+              </a:rPr>
+              <a:t>分模块会话 + 高效提问 + DeepSeek替代</a:t>
+            </a:r>
+            <a:endParaRPr lang="en-US" sz="1200" dirty="0"/>
+          </a:p>
+        </p:txBody>
+      </p:sp>
+      <p:sp>
+        <p:nvSpPr>
+          <p:cNvPr id="29" name="Shape 27"/>
+          <p:cNvSpPr/>
+          <p:nvPr/>
+        </p:nvSpPr>
+        <p:spPr>
+          <a:xfrm>
+            <a:off x="6858000" y="3200400"/>
+            <a:ext cx="1463040" cy="502920"/>
+          </a:xfrm>
+          <a:prstGeom prst="rect">
+            <a:avLst/>
+          </a:prstGeom>
+          <a:solidFill>
+            <a:srgbClr val="D97706"/>
+          </a:solidFill>
+          <a:ln/>
+        </p:spPr>
+      </p:sp>
+      <p:sp>
+        <p:nvSpPr>
+          <p:cNvPr id="30" name="Text 28"/>
+          <p:cNvSpPr/>
+          <p:nvPr/>
+        </p:nvSpPr>
+        <p:spPr>
+          <a:xfrm>
+            <a:off x="6858000" y="3246120"/>
+            <a:ext cx="1463040" cy="411480"/>
+          </a:xfrm>
+          <a:prstGeom prst="rect">
+            <a:avLst/>
+          </a:prstGeom>
+          <a:noFill/>
+          <a:ln/>
+        </p:spPr>
+        <p:txBody>
+          <a:bodyPr wrap="square" lIns="0" tIns="0" rIns="0" bIns="0" rtlCol="0" anchor="ctr"/>
+          <a:lstStyle/>
+          <a:p>
+            <a:pPr algn="ctr" indent="0" marL="0">
+              <a:buNone/>
+            </a:pPr>
+            <a:r>
+              <a:rPr lang="en-US" sz="1300" b="1" dirty="0">
+                <a:solidFill>
+                  <a:srgbClr val="FFFFFF"/>
+                </a:solidFill>
+              </a:rPr>
+              <a:t>省60-80%</a:t>
+            </a:r>
+            <a:endParaRPr lang="en-US" sz="1300" dirty="0"/>
+          </a:p>
+        </p:txBody>
+      </p:sp>
+      <p:sp>
+        <p:nvSpPr>
+          <p:cNvPr id="31" name="Shape 29"/>
+          <p:cNvSpPr/>
+          <p:nvPr/>
+        </p:nvSpPr>
+        <p:spPr>
+          <a:xfrm>
+            <a:off x="640080" y="4023360"/>
+            <a:ext cx="7863840" cy="822960"/>
+          </a:xfrm>
+          <a:prstGeom prst="rect">
+            <a:avLst/>
+          </a:prstGeom>
+          <a:solidFill>
+            <a:srgbClr val="FFFFFF"/>
+          </a:solidFill>
+          <a:ln/>
+          <a:effectLst>
+            <a:outerShdw sx="100000" sy="100000" kx="0" ky="0" algn="bl" rotWithShape="0" blurRad="76200" dist="25400" dir="8100000">
+              <a:srgbClr val="000000">
+                <a:alpha val="12000"/>
+              </a:srgbClr>
+            </a:outerShdw>
+          </a:effectLst>
+        </p:spPr>
+      </p:sp>
+      <p:sp>
+        <p:nvSpPr>
+          <p:cNvPr id="32" name="Shape 30"/>
+          <p:cNvSpPr/>
+          <p:nvPr/>
+        </p:nvSpPr>
+        <p:spPr>
+          <a:xfrm>
+            <a:off x="640080" y="4023360"/>
+            <a:ext cx="1463040" cy="822960"/>
+          </a:xfrm>
+          <a:prstGeom prst="rect">
+            <a:avLst/>
+          </a:prstGeom>
+          <a:solidFill>
+            <a:srgbClr val="EA580C"/>
+          </a:solidFill>
+          <a:ln/>
+        </p:spPr>
+      </p:sp>
+      <p:sp>
+        <p:nvSpPr>
+          <p:cNvPr id="33" name="Text 31"/>
+          <p:cNvSpPr/>
+          <p:nvPr/>
+        </p:nvSpPr>
+        <p:spPr>
+          <a:xfrm>
+            <a:off x="640080" y="4206240"/>
+            <a:ext cx="1463040" cy="457200"/>
+          </a:xfrm>
+          <a:prstGeom prst="rect">
+            <a:avLst/>
+          </a:prstGeom>
+          <a:noFill/>
+          <a:ln/>
+        </p:spPr>
+        <p:txBody>
+          <a:bodyPr wrap="square" lIns="0" tIns="0" rIns="0" bIns="0" rtlCol="0" anchor="ctr"/>
+          <a:lstStyle/>
+          <a:p>
+            <a:pPr algn="ctr" indent="0" marL="0">
+              <a:buNone/>
+            </a:pPr>
+            <a:r>
+              <a:rPr lang="en-US" sz="1400" b="1" dirty="0">
+                <a:solidFill>
+                  <a:srgbClr val="FFFFFF"/>
+                </a:solidFill>
+              </a:rPr>
+              <a:t>P3 技术储备</a:t>
+            </a:r>
+            <a:endParaRPr lang="en-US" sz="1400" dirty="0"/>
+          </a:p>
+        </p:txBody>
+      </p:sp>
+      <p:sp>
+        <p:nvSpPr>
+          <p:cNvPr id="34" name="Shape 32"/>
+          <p:cNvSpPr/>
+          <p:nvPr/>
+        </p:nvSpPr>
+        <p:spPr>
+          <a:xfrm>
+            <a:off x="2240280" y="4160520"/>
+            <a:ext cx="914400" cy="502920"/>
+          </a:xfrm>
+          <a:prstGeom prst="rect">
+            <a:avLst/>
+          </a:prstGeom>
+          <a:solidFill>
+            <a:srgbClr val="E2E8F0"/>
+          </a:solidFill>
+          <a:ln/>
+        </p:spPr>
+      </p:sp>
+      <p:sp>
+        <p:nvSpPr>
+          <p:cNvPr id="35" name="Text 33"/>
+          <p:cNvSpPr/>
+          <p:nvPr/>
+        </p:nvSpPr>
+        <p:spPr>
+          <a:xfrm>
+            <a:off x="2240280" y="4206240"/>
+            <a:ext cx="914400" cy="411480"/>
+          </a:xfrm>
+          <a:prstGeom prst="rect">
+            <a:avLst/>
+          </a:prstGeom>
+          <a:noFill/>
+          <a:ln/>
+        </p:spPr>
+        <p:txBody>
+          <a:bodyPr wrap="square" lIns="0" tIns="0" rIns="0" bIns="0" rtlCol="0" anchor="ctr"/>
+          <a:lstStyle/>
+          <a:p>
+            <a:pPr algn="ctr" indent="0" marL="0">
+              <a:buNone/>
+            </a:pPr>
+            <a:r>
+              <a:rPr lang="en-US" sz="1200" b="1" dirty="0">
+                <a:solidFill>
+                  <a:srgbClr val="1E2761"/>
+                </a:solidFill>
+              </a:rPr>
+              <a:t>需开发</a:t>
+            </a:r>
+            <a:endParaRPr lang="en-US" sz="1200" dirty="0"/>
+          </a:p>
+        </p:txBody>
+      </p:sp>
+      <p:sp>
+        <p:nvSpPr>
+          <p:cNvPr id="36" name="Text 34"/>
+          <p:cNvSpPr/>
+          <p:nvPr/>
+        </p:nvSpPr>
+        <p:spPr>
+          <a:xfrm>
+            <a:off x="3291840" y="4069080"/>
+            <a:ext cx="3200400" cy="731520"/>
+          </a:xfrm>
+          <a:prstGeom prst="rect">
+            <a:avLst/>
+          </a:prstGeom>
+          <a:noFill/>
+          <a:ln/>
+        </p:spPr>
+        <p:txBody>
+          <a:bodyPr wrap="square" lIns="0" tIns="0" rIns="0" bIns="0" rtlCol="0" anchor="ctr"/>
+          <a:lstStyle/>
+          <a:p>
+            <a:pPr indent="0" marL="0">
+              <a:buNone/>
+            </a:pPr>
+            <a:r>
+              <a:rPr lang="en-US" sz="1200" dirty="0">
+                <a:solidFill>
+                  <a:srgbClr val="1E293B"/>
+                </a:solidFill>
+              </a:rPr>
+              <a:t>Prompt Caching + LLMLingua压缩</a:t>
+            </a:r>
+            <a:endParaRPr lang="en-US" sz="1200" dirty="0"/>
+          </a:p>
+        </p:txBody>
+      </p:sp>
+      <p:sp>
+        <p:nvSpPr>
+          <p:cNvPr id="37" name="Shape 35"/>
+          <p:cNvSpPr/>
+          <p:nvPr/>
+        </p:nvSpPr>
+        <p:spPr>
+          <a:xfrm>
+            <a:off x="6858000" y="4160520"/>
+            <a:ext cx="1463040" cy="502920"/>
+          </a:xfrm>
+          <a:prstGeom prst="rect">
+            <a:avLst/>
+          </a:prstGeom>
+          <a:solidFill>
+            <a:srgbClr val="EA580C"/>
+          </a:solidFill>
+          <a:ln/>
+        </p:spPr>
+      </p:sp>
+      <p:sp>
+        <p:nvSpPr>
+          <p:cNvPr id="38" name="Text 36"/>
+          <p:cNvSpPr/>
+          <p:nvPr/>
+        </p:nvSpPr>
+        <p:spPr>
+          <a:xfrm>
+            <a:off x="6858000" y="4206240"/>
+            <a:ext cx="1463040" cy="411480"/>
+          </a:xfrm>
+          <a:prstGeom prst="rect">
+            <a:avLst/>
+          </a:prstGeom>
+          <a:noFill/>
+          <a:ln/>
+        </p:spPr>
+        <p:txBody>
+          <a:bodyPr wrap="square" lIns="0" tIns="0" rIns="0" bIns="0" rtlCol="0" anchor="ctr"/>
+          <a:lstStyle/>
+          <a:p>
+            <a:pPr algn="ctr" indent="0" marL="0">
+              <a:buNone/>
+            </a:pPr>
+            <a:r>
+              <a:rPr lang="en-US" sz="1300" b="1" dirty="0">
+                <a:solidFill>
+                  <a:srgbClr val="FFFFFF"/>
+                </a:solidFill>
+              </a:rPr>
+              <a:t>省70-90%</a:t>
+            </a:r>
+            <a:endParaRPr lang="en-US" sz="1300" dirty="0"/>
+          </a:p>
+        </p:txBody>
+      </p:sp>
+    </p:spTree>
+  </p:cSld>
+  <p:clrMapOvr>
+    <a:masterClrMapping/>
+  </p:clrMapOvr>
+</p:sld>
+</file>
+
+<file path=ppt/slides/slide12.xml><?xml version="1.0" encoding="utf-8"?>
+<p:sld xmlns:a="http://schemas.openxmlformats.org/drawingml/2006/main" xmlns:r="http://schemas.openxmlformats.org/officeDocument/2006/relationships" xmlns:p="http://schemas.openxmlformats.org/presentationml/2006/main">
+  <p:cSld name="Slide 12">
+    <p:bg>
+      <p:bgPr>
+        <a:solidFill>
+          <a:srgbClr val="F5F7FA"/>
+        </a:solidFill>
+      </p:bgPr>
+    </p:bg>
+    <p:spTree>
+      <p:nvGrpSpPr>
+        <p:cNvPr id="1" name=""/>
+        <p:cNvGrpSpPr/>
+        <p:nvPr/>
+      </p:nvGrpSpPr>
+      <p:grpSpPr>
+        <a:xfrm>
+          <a:off x="0" y="0"/>
+          <a:ext cx="0" cy="0"/>
+          <a:chOff x="0" y="0"/>
+          <a:chExt cx="0" cy="0"/>
+        </a:xfrm>
+      </p:grpSpPr>
+      <p:sp>
+        <p:nvSpPr>
+          <p:cNvPr id="2" name="Shape 0"/>
+          <p:cNvSpPr/>
+          <p:nvPr/>
+        </p:nvSpPr>
+        <p:spPr>
+          <a:xfrm>
+            <a:off x="0" y="0"/>
+            <a:ext cx="9144000" cy="54864"/>
+          </a:xfrm>
+          <a:prstGeom prst="rect">
+            <a:avLst/>
+          </a:prstGeom>
+          <a:solidFill>
+            <a:srgbClr val="028090"/>
+          </a:solidFill>
+          <a:ln/>
+        </p:spPr>
+      </p:sp>
+      <p:sp>
+        <p:nvSpPr>
+          <p:cNvPr id="3" name="Text 1"/>
+          <p:cNvSpPr/>
+          <p:nvPr/>
+        </p:nvSpPr>
+        <p:spPr>
+          <a:xfrm>
+            <a:off x="640080" y="228600"/>
+            <a:ext cx="7863840" cy="594360"/>
+          </a:xfrm>
+          <a:prstGeom prst="rect">
+            <a:avLst/>
+          </a:prstGeom>
+          <a:noFill/>
+          <a:ln/>
+        </p:spPr>
+        <p:txBody>
+          <a:bodyPr wrap="square" lIns="0" tIns="0" rIns="0" bIns="0" rtlCol="0" anchor="ctr"/>
+          <a:lstStyle/>
+          <a:p>
+            <a:pPr indent="0" marL="0">
+              <a:buNone/>
+            </a:pPr>
+            <a:r>
+              <a:rPr lang="en-US" sz="2800" b="1" dirty="0">
+                <a:solidFill>
+                  <a:srgbClr val="1E2761"/>
+                </a:solidFill>
+                <a:latin typeface="Arial" pitchFamily="34" charset="0"/>
+                <a:ea typeface="Arial" pitchFamily="34" charset="-122"/>
+                <a:cs typeface="Arial" pitchFamily="34" charset="-120"/>
+              </a:rPr>
+              <a:t>OpenCode优化指南 — 提供商套利</a:t>
+            </a:r>
+            <a:endParaRPr lang="en-US" sz="2800" dirty="0"/>
+          </a:p>
+        </p:txBody>
+      </p:sp>
+      <p:sp>
+        <p:nvSpPr>
+          <p:cNvPr id="4" name="Shape 2"/>
+          <p:cNvSpPr/>
+          <p:nvPr/>
+        </p:nvSpPr>
+        <p:spPr>
+          <a:xfrm>
+            <a:off x="640080" y="868680"/>
+            <a:ext cx="7863840" cy="0"/>
+          </a:xfrm>
+          <a:prstGeom prst="line">
+            <a:avLst/>
+          </a:prstGeom>
+          <a:noFill/>
+          <a:ln w="25400">
+            <a:solidFill>
+              <a:srgbClr val="028090"/>
+            </a:solidFill>
+            <a:prstDash val="solid"/>
+          </a:ln>
+        </p:spPr>
+      </p:sp>
+      <p:sp>
+        <p:nvSpPr>
+          <p:cNvPr id="5" name="Text 3"/>
+          <p:cNvSpPr/>
+          <p:nvPr/>
+        </p:nvSpPr>
+        <p:spPr>
+          <a:xfrm>
+            <a:off x="7772400" y="4800600"/>
+            <a:ext cx="914400" cy="274320"/>
+          </a:xfrm>
+          <a:prstGeom prst="rect">
+            <a:avLst/>
+          </a:prstGeom>
+          <a:noFill/>
+          <a:ln/>
+        </p:spPr>
+        <p:txBody>
+          <a:bodyPr wrap="square" rtlCol="0" anchor="ctr"/>
+          <a:lstStyle/>
+          <a:p>
+            <a:pPr algn="r" indent="0" marL="0">
+              <a:buNone/>
+            </a:pPr>
+            <a:r>
+              <a:rPr lang="en-US" sz="900" dirty="0">
+                <a:solidFill>
+                  <a:srgbClr val="64748B"/>
+                </a:solidFill>
+              </a:rPr>
+              <a:t>12</a:t>
+            </a:r>
+            <a:endParaRPr lang="en-US" sz="900" dirty="0"/>
+          </a:p>
+        </p:txBody>
+      </p:sp>
+      <p:sp>
+        <p:nvSpPr>
+          <p:cNvPr id="6" name="Text 4"/>
+          <p:cNvSpPr/>
+          <p:nvPr/>
+        </p:nvSpPr>
+        <p:spPr>
+          <a:xfrm>
+            <a:off x="457200" y="4800600"/>
+            <a:ext cx="3657600" cy="274320"/>
+          </a:xfrm>
+          <a:prstGeom prst="rect">
+            <a:avLst/>
+          </a:prstGeom>
+          <a:noFill/>
+          <a:ln/>
+        </p:spPr>
+        <p:txBody>
+          <a:bodyPr wrap="square" rtlCol="0" anchor="ctr"/>
+          <a:lstStyle/>
+          <a:p>
+            <a:pPr indent="0" marL="0">
+              <a:buNone/>
+            </a:pPr>
+            <a:r>
+              <a:rPr lang="en-US" sz="900" dirty="0">
+                <a:solidFill>
+                  <a:srgbClr val="64748B"/>
+                </a:solidFill>
+              </a:rPr>
+              <a:t>Claude Token 优化最佳实践</a:t>
+            </a:r>
+            <a:endParaRPr lang="en-US" sz="900" dirty="0"/>
+          </a:p>
+        </p:txBody>
+      </p:sp>
+      <p:sp>
+        <p:nvSpPr>
+          <p:cNvPr id="7" name="Text 5"/>
+          <p:cNvSpPr/>
+          <p:nvPr/>
+        </p:nvSpPr>
+        <p:spPr>
+          <a:xfrm>
+            <a:off x="640080" y="1097280"/>
+            <a:ext cx="4114800" cy="365760"/>
+          </a:xfrm>
+          <a:prstGeom prst="rect">
+            <a:avLst/>
+          </a:prstGeom>
+          <a:noFill/>
+          <a:ln/>
+        </p:spPr>
+        <p:txBody>
+          <a:bodyPr wrap="square" lIns="0" tIns="0" rIns="0" bIns="0" rtlCol="0" anchor="ctr"/>
+          <a:lstStyle/>
+          <a:p>
+            <a:pPr indent="0" marL="0">
+              <a:buNone/>
+            </a:pPr>
+            <a:r>
+              <a:rPr lang="en-US" sz="1600" b="1" dirty="0">
+                <a:solidFill>
+                  <a:srgbClr val="1E2761"/>
+                </a:solidFill>
+              </a:rPr>
+              <a:t>OpenCode 独有优势</a:t>
+            </a:r>
+            <a:endParaRPr lang="en-US" sz="1600" dirty="0"/>
+          </a:p>
+        </p:txBody>
+      </p:sp>
+      <p:sp>
+        <p:nvSpPr>
+          <p:cNvPr id="8" name="Text 6"/>
+          <p:cNvSpPr/>
+          <p:nvPr/>
+        </p:nvSpPr>
+        <p:spPr>
+          <a:xfrm>
+            <a:off x="640080" y="1554480"/>
+            <a:ext cx="4114800" cy="2286000"/>
+          </a:xfrm>
+          <a:prstGeom prst="rect">
+            <a:avLst/>
+          </a:prstGeom>
+          <a:noFill/>
+          <a:ln/>
+        </p:spPr>
+        <p:txBody>
+          <a:bodyPr wrap="square" rtlCol="0" anchor="t"/>
+          <a:lstStyle/>
+          <a:p>
+            <a:pPr marL="342900" indent="-342900">
+              <a:spcAft>
+                <a:spcPts val="600"/>
+              </a:spcAft>
+              <a:buSzPct val="100000"/>
+              <a:buChar char="•"/>
+            </a:pPr>
+            <a:r>
+              <a:rPr lang="en-US" sz="1200" dirty="0">
+                <a:solidFill>
+                  <a:srgbClr val="1E293B"/>
+                </a:solidFill>
+              </a:rPr>
+              <a:t>🏦 提供商套利: 同一任务可选最便宜模型</a:t>
+            </a:r>
+            <a:endParaRPr lang="en-US" sz="1200" dirty="0"/>
+          </a:p>
+          <a:p>
+            <a:pPr marL="342900" indent="-342900">
+              <a:spcAft>
+                <a:spcPts val="600"/>
+              </a:spcAft>
+              <a:buSzPct val="100000"/>
+              <a:buChar char="•"/>
+            </a:pPr>
+            <a:r>
+              <a:rPr lang="en-US" sz="1200" dirty="0">
+                <a:solidFill>
+                  <a:srgbClr val="1E293B"/>
+                </a:solidFill>
+              </a:rPr>
+              <a:t>📊 用量监控: opencode stats --days 7</a:t>
+            </a:r>
+            <a:endParaRPr lang="en-US" sz="1200" dirty="0"/>
+          </a:p>
+          <a:p>
+            <a:pPr marL="342900" indent="-342900">
+              <a:spcAft>
+                <a:spcPts val="600"/>
+              </a:spcAft>
+              <a:buSzPct val="100000"/>
+              <a:buChar char="•"/>
+            </a:pPr>
+            <a:r>
+              <a:rPr lang="en-US" sz="1200" dirty="0">
+                <a:solidFill>
+                  <a:srgbClr val="1E293B"/>
+                </a:solidFill>
+              </a:rPr>
+              <a:t>🎯 推理控制: --variant minimal/high/max</a:t>
+            </a:r>
+            <a:endParaRPr lang="en-US" sz="1200" dirty="0"/>
+          </a:p>
+          <a:p>
+            <a:pPr marL="342900" indent="-342900">
+              <a:spcAft>
+                <a:spcPts val="600"/>
+              </a:spcAft>
+              <a:buSzPct val="100000"/>
+              <a:buChar char="•"/>
+            </a:pPr>
+            <a:r>
+              <a:rPr lang="en-US" sz="1200" dirty="0">
+                <a:solidFill>
+                  <a:srgbClr val="1E293B"/>
+                </a:solidFill>
+              </a:rPr>
+              <a:t>📁 Session管理: 按模块分Session避膨胀</a:t>
+            </a:r>
+            <a:endParaRPr lang="en-US" sz="1200" dirty="0"/>
+          </a:p>
+          <a:p>
+            <a:pPr marL="342900" indent="-342900">
+              <a:spcAft>
+                <a:spcPts val="600"/>
+              </a:spcAft>
+              <a:buSzPct val="100000"/>
+              <a:buChar char="•"/>
+            </a:pPr>
+            <a:r>
+              <a:rPr lang="en-US" sz="1200" dirty="0">
+                <a:solidFill>
+                  <a:srgbClr val="1E293B"/>
+                </a:solidFill>
+              </a:rPr>
+              <a:t>🔄 多模型切换: --model provider/model</a:t>
+            </a:r>
+            <a:endParaRPr lang="en-US" sz="1200" dirty="0"/>
+          </a:p>
+        </p:txBody>
+      </p:sp>
+      <p:sp>
+        <p:nvSpPr>
+          <p:cNvPr id="9" name="Text 7"/>
+          <p:cNvSpPr/>
+          <p:nvPr/>
+        </p:nvSpPr>
+        <p:spPr>
+          <a:xfrm>
+            <a:off x="5029200" y="1097280"/>
+            <a:ext cx="3474720" cy="365760"/>
+          </a:xfrm>
+          <a:prstGeom prst="rect">
+            <a:avLst/>
+          </a:prstGeom>
+          <a:noFill/>
+          <a:ln/>
+        </p:spPr>
+        <p:txBody>
+          <a:bodyPr wrap="square" lIns="0" tIns="0" rIns="0" bIns="0" rtlCol="0" anchor="ctr"/>
+          <a:lstStyle/>
+          <a:p>
+            <a:pPr indent="0" marL="0">
+              <a:buNone/>
+            </a:pPr>
+            <a:r>
+              <a:rPr lang="en-US" sz="1600" b="1" dirty="0">
+                <a:solidFill>
+                  <a:srgbClr val="1E2761"/>
+                </a:solidFill>
+              </a:rPr>
+              <a:t>工具分工建议</a:t>
+            </a:r>
+            <a:endParaRPr lang="en-US" sz="1600" dirty="0"/>
+          </a:p>
+        </p:txBody>
+      </p:sp>
+      <p:sp>
+        <p:nvSpPr>
+          <p:cNvPr id="10" name="Shape 8"/>
+          <p:cNvSpPr/>
+          <p:nvPr/>
+        </p:nvSpPr>
+        <p:spPr>
+          <a:xfrm>
+            <a:off x="5029200" y="1554480"/>
+            <a:ext cx="3474720" cy="548640"/>
+          </a:xfrm>
+          <a:prstGeom prst="rect">
+            <a:avLst/>
+          </a:prstGeom>
+          <a:solidFill>
+            <a:srgbClr val="FFFFFF"/>
+          </a:solidFill>
+          <a:ln/>
+          <a:effectLst>
+            <a:outerShdw sx="100000" sy="100000" kx="0" ky="0" algn="bl" rotWithShape="0" blurRad="76200" dist="25400" dir="8100000">
+              <a:srgbClr val="000000">
+                <a:alpha val="12000"/>
+              </a:srgbClr>
+            </a:outerShdw>
+          </a:effectLst>
+        </p:spPr>
+      </p:sp>
+      <p:sp>
+        <p:nvSpPr>
+          <p:cNvPr id="11" name="Shape 9"/>
+          <p:cNvSpPr/>
+          <p:nvPr/>
+        </p:nvSpPr>
+        <p:spPr>
+          <a:xfrm>
+            <a:off x="5029200" y="1554480"/>
+            <a:ext cx="54864" cy="548640"/>
+          </a:xfrm>
+          <a:prstGeom prst="rect">
+            <a:avLst/>
+          </a:prstGeom>
+          <a:solidFill>
+            <a:srgbClr val="059669"/>
+          </a:solidFill>
+          <a:ln/>
+        </p:spPr>
+      </p:sp>
+      <p:sp>
+        <p:nvSpPr>
+          <p:cNvPr id="12" name="Text 10"/>
+          <p:cNvSpPr/>
+          <p:nvPr/>
+        </p:nvSpPr>
+        <p:spPr>
+          <a:xfrm>
+            <a:off x="5212080" y="1572768"/>
+            <a:ext cx="1645920" cy="228600"/>
+          </a:xfrm>
+          <a:prstGeom prst="rect">
+            <a:avLst/>
+          </a:prstGeom>
+          <a:noFill/>
+          <a:ln/>
+        </p:spPr>
+        <p:txBody>
+          <a:bodyPr wrap="square" lIns="0" tIns="0" rIns="0" bIns="0" rtlCol="0" anchor="ctr"/>
+          <a:lstStyle/>
+          <a:p>
+            <a:pPr indent="0" marL="0">
+              <a:buNone/>
+            </a:pPr>
+            <a:r>
+              <a:rPr lang="en-US" sz="1000" b="1" dirty="0">
+                <a:solidFill>
+                  <a:srgbClr val="1E2761"/>
+                </a:solidFill>
+              </a:rPr>
+              <a:t>OpenCode 60%</a:t>
+            </a:r>
+            <a:endParaRPr lang="en-US" sz="1000" dirty="0"/>
+          </a:p>
+        </p:txBody>
+      </p:sp>
+      <p:sp>
+        <p:nvSpPr>
+          <p:cNvPr id="13" name="Text 11"/>
+          <p:cNvSpPr/>
+          <p:nvPr/>
+        </p:nvSpPr>
+        <p:spPr>
+          <a:xfrm>
+            <a:off x="5212080" y="1828800"/>
+            <a:ext cx="1097280" cy="201168"/>
+          </a:xfrm>
+          <a:prstGeom prst="rect">
+            <a:avLst/>
+          </a:prstGeom>
+          <a:noFill/>
+          <a:ln/>
+        </p:spPr>
+        <p:txBody>
+          <a:bodyPr wrap="square" lIns="0" tIns="0" rIns="0" bIns="0" rtlCol="0" anchor="ctr"/>
+          <a:lstStyle/>
+          <a:p>
+            <a:pPr indent="0" marL="0">
+              <a:buNone/>
+            </a:pPr>
+            <a:r>
+              <a:rPr lang="en-US" sz="900" dirty="0">
+                <a:solidFill>
+                  <a:srgbClr val="64748B"/>
+                </a:solidFill>
+              </a:rPr>
+              <a:t>DeepSeek V3</a:t>
+            </a:r>
+            <a:endParaRPr lang="en-US" sz="900" dirty="0"/>
+          </a:p>
+        </p:txBody>
+      </p:sp>
+      <p:sp>
+        <p:nvSpPr>
+          <p:cNvPr id="14" name="Text 12"/>
+          <p:cNvSpPr/>
+          <p:nvPr/>
+        </p:nvSpPr>
+        <p:spPr>
+          <a:xfrm>
+            <a:off x="7132320" y="1664208"/>
+            <a:ext cx="1188720" cy="320040"/>
+          </a:xfrm>
+          <a:prstGeom prst="rect">
+            <a:avLst/>
+          </a:prstGeom>
+          <a:noFill/>
+          <a:ln/>
+        </p:spPr>
+        <p:txBody>
+          <a:bodyPr wrap="square" lIns="0" tIns="0" rIns="0" bIns="0" rtlCol="0" anchor="ctr"/>
+          <a:lstStyle/>
+          <a:p>
+            <a:pPr algn="r" indent="0" marL="0">
+              <a:buNone/>
+            </a:pPr>
+            <a:r>
+              <a:rPr lang="en-US" sz="1300" b="1" dirty="0">
+                <a:solidFill>
+                  <a:srgbClr val="059669"/>
+                </a:solidFill>
+              </a:rPr>
+              <a:t>~$15/月</a:t>
+            </a:r>
+            <a:endParaRPr lang="en-US" sz="1300" dirty="0"/>
+          </a:p>
+        </p:txBody>
+      </p:sp>
+      <p:sp>
+        <p:nvSpPr>
+          <p:cNvPr id="15" name="Shape 13"/>
+          <p:cNvSpPr/>
+          <p:nvPr/>
+        </p:nvSpPr>
+        <p:spPr>
+          <a:xfrm>
+            <a:off x="5029200" y="2240280"/>
+            <a:ext cx="3474720" cy="548640"/>
+          </a:xfrm>
+          <a:prstGeom prst="rect">
+            <a:avLst/>
+          </a:prstGeom>
+          <a:solidFill>
+            <a:srgbClr val="FFFFFF"/>
+          </a:solidFill>
+          <a:ln/>
+          <a:effectLst>
+            <a:outerShdw sx="100000" sy="100000" kx="0" ky="0" algn="bl" rotWithShape="0" blurRad="76200" dist="25400" dir="8100000">
+              <a:srgbClr val="000000">
+                <a:alpha val="12000"/>
+              </a:srgbClr>
+            </a:outerShdw>
+          </a:effectLst>
+        </p:spPr>
+      </p:sp>
+      <p:sp>
+        <p:nvSpPr>
+          <p:cNvPr id="16" name="Shape 14"/>
+          <p:cNvSpPr/>
+          <p:nvPr/>
+        </p:nvSpPr>
+        <p:spPr>
+          <a:xfrm>
+            <a:off x="5029200" y="2240280"/>
+            <a:ext cx="54864" cy="548640"/>
+          </a:xfrm>
+          <a:prstGeom prst="rect">
+            <a:avLst/>
+          </a:prstGeom>
+          <a:solidFill>
+            <a:srgbClr val="D97706"/>
+          </a:solidFill>
+          <a:ln/>
+        </p:spPr>
+      </p:sp>
+      <p:sp>
+        <p:nvSpPr>
+          <p:cNvPr id="17" name="Text 15"/>
+          <p:cNvSpPr/>
+          <p:nvPr/>
+        </p:nvSpPr>
+        <p:spPr>
+          <a:xfrm>
+            <a:off x="5212080" y="2258568"/>
+            <a:ext cx="1645920" cy="228600"/>
+          </a:xfrm>
+          <a:prstGeom prst="rect">
+            <a:avLst/>
+          </a:prstGeom>
+          <a:noFill/>
+          <a:ln/>
+        </p:spPr>
+        <p:txBody>
+          <a:bodyPr wrap="square" lIns="0" tIns="0" rIns="0" bIns="0" rtlCol="0" anchor="ctr"/>
+          <a:lstStyle/>
+          <a:p>
+            <a:pPr indent="0" marL="0">
+              <a:buNone/>
+            </a:pPr>
+            <a:r>
+              <a:rPr lang="en-US" sz="1000" b="1" dirty="0">
+                <a:solidFill>
+                  <a:srgbClr val="1E2761"/>
+                </a:solidFill>
+              </a:rPr>
+              <a:t>Claude Code 25%</a:t>
+            </a:r>
+            <a:endParaRPr lang="en-US" sz="1000" dirty="0"/>
+          </a:p>
+        </p:txBody>
+      </p:sp>
+      <p:sp>
+        <p:nvSpPr>
+          <p:cNvPr id="18" name="Text 16"/>
+          <p:cNvSpPr/>
+          <p:nvPr/>
+        </p:nvSpPr>
+        <p:spPr>
+          <a:xfrm>
+            <a:off x="5212080" y="2514600"/>
+            <a:ext cx="1097280" cy="201168"/>
+          </a:xfrm>
+          <a:prstGeom prst="rect">
+            <a:avLst/>
+          </a:prstGeom>
+          <a:noFill/>
+          <a:ln/>
+        </p:spPr>
+        <p:txBody>
+          <a:bodyPr wrap="square" lIns="0" tIns="0" rIns="0" bIns="0" rtlCol="0" anchor="ctr"/>
+          <a:lstStyle/>
+          <a:p>
+            <a:pPr indent="0" marL="0">
+              <a:buNone/>
+            </a:pPr>
+            <a:r>
+              <a:rPr lang="en-US" sz="900" dirty="0">
+                <a:solidFill>
+                  <a:srgbClr val="64748B"/>
+                </a:solidFill>
+              </a:rPr>
+              <a:t>Sonnet</a:t>
+            </a:r>
+            <a:endParaRPr lang="en-US" sz="900" dirty="0"/>
+          </a:p>
+        </p:txBody>
+      </p:sp>
+      <p:sp>
+        <p:nvSpPr>
+          <p:cNvPr id="19" name="Text 17"/>
+          <p:cNvSpPr/>
+          <p:nvPr/>
+        </p:nvSpPr>
+        <p:spPr>
+          <a:xfrm>
+            <a:off x="7132320" y="2350008"/>
+            <a:ext cx="1188720" cy="320040"/>
+          </a:xfrm>
+          <a:prstGeom prst="rect">
+            <a:avLst/>
+          </a:prstGeom>
+          <a:noFill/>
+          <a:ln/>
+        </p:spPr>
+        <p:txBody>
+          <a:bodyPr wrap="square" lIns="0" tIns="0" rIns="0" bIns="0" rtlCol="0" anchor="ctr"/>
+          <a:lstStyle/>
+          <a:p>
+            <a:pPr algn="r" indent="0" marL="0">
+              <a:buNone/>
+            </a:pPr>
+            <a:r>
+              <a:rPr lang="en-US" sz="1300" b="1" dirty="0">
+                <a:solidFill>
+                  <a:srgbClr val="D97706"/>
+                </a:solidFill>
+              </a:rPr>
+              <a:t>~$18/月</a:t>
+            </a:r>
+            <a:endParaRPr lang="en-US" sz="1300" dirty="0"/>
+          </a:p>
+        </p:txBody>
+      </p:sp>
+      <p:sp>
+        <p:nvSpPr>
+          <p:cNvPr id="20" name="Shape 18"/>
+          <p:cNvSpPr/>
+          <p:nvPr/>
+        </p:nvSpPr>
+        <p:spPr>
+          <a:xfrm>
+            <a:off x="5029200" y="2926080"/>
+            <a:ext cx="3474720" cy="548640"/>
+          </a:xfrm>
+          <a:prstGeom prst="rect">
+            <a:avLst/>
+          </a:prstGeom>
+          <a:solidFill>
+            <a:srgbClr val="FFFFFF"/>
+          </a:solidFill>
+          <a:ln/>
+          <a:effectLst>
+            <a:outerShdw sx="100000" sy="100000" kx="0" ky="0" algn="bl" rotWithShape="0" blurRad="76200" dist="25400" dir="8100000">
+              <a:srgbClr val="000000">
+                <a:alpha val="12000"/>
+              </a:srgbClr>
+            </a:outerShdw>
+          </a:effectLst>
+        </p:spPr>
+      </p:sp>
+      <p:sp>
+        <p:nvSpPr>
+          <p:cNvPr id="21" name="Shape 19"/>
+          <p:cNvSpPr/>
+          <p:nvPr/>
+        </p:nvSpPr>
+        <p:spPr>
+          <a:xfrm>
+            <a:off x="5029200" y="2926080"/>
+            <a:ext cx="54864" cy="548640"/>
+          </a:xfrm>
+          <a:prstGeom prst="rect">
+            <a:avLst/>
+          </a:prstGeom>
+          <a:solidFill>
+            <a:srgbClr val="DC2626"/>
+          </a:solidFill>
+          <a:ln/>
+        </p:spPr>
+      </p:sp>
+      <p:sp>
+        <p:nvSpPr>
+          <p:cNvPr id="22" name="Text 20"/>
+          <p:cNvSpPr/>
+          <p:nvPr/>
+        </p:nvSpPr>
+        <p:spPr>
+          <a:xfrm>
+            <a:off x="5212080" y="2944368"/>
+            <a:ext cx="1645920" cy="228600"/>
+          </a:xfrm>
+          <a:prstGeom prst="rect">
+            <a:avLst/>
+          </a:prstGeom>
+          <a:noFill/>
+          <a:ln/>
+        </p:spPr>
+        <p:txBody>
+          <a:bodyPr wrap="square" lIns="0" tIns="0" rIns="0" bIns="0" rtlCol="0" anchor="ctr"/>
+          <a:lstStyle/>
+          <a:p>
+            <a:pPr indent="0" marL="0">
+              <a:buNone/>
+            </a:pPr>
+            <a:r>
+              <a:rPr lang="en-US" sz="1000" b="1" dirty="0">
+                <a:solidFill>
+                  <a:srgbClr val="1E2761"/>
+                </a:solidFill>
+              </a:rPr>
+              <a:t>Claude Code 10%</a:t>
+            </a:r>
+            <a:endParaRPr lang="en-US" sz="1000" dirty="0"/>
+          </a:p>
+        </p:txBody>
+      </p:sp>
+      <p:sp>
+        <p:nvSpPr>
+          <p:cNvPr id="23" name="Text 21"/>
+          <p:cNvSpPr/>
+          <p:nvPr/>
+        </p:nvSpPr>
+        <p:spPr>
+          <a:xfrm>
+            <a:off x="5212080" y="3200400"/>
+            <a:ext cx="1097280" cy="201168"/>
+          </a:xfrm>
+          <a:prstGeom prst="rect">
+            <a:avLst/>
+          </a:prstGeom>
+          <a:noFill/>
+          <a:ln/>
+        </p:spPr>
+        <p:txBody>
+          <a:bodyPr wrap="square" lIns="0" tIns="0" rIns="0" bIns="0" rtlCol="0" anchor="ctr"/>
+          <a:lstStyle/>
+          <a:p>
+            <a:pPr indent="0" marL="0">
+              <a:buNone/>
+            </a:pPr>
+            <a:r>
+              <a:rPr lang="en-US" sz="900" dirty="0">
+                <a:solidFill>
+                  <a:srgbClr val="64748B"/>
+                </a:solidFill>
+              </a:rPr>
+              <a:t>Opus</a:t>
+            </a:r>
+            <a:endParaRPr lang="en-US" sz="900" dirty="0"/>
+          </a:p>
+        </p:txBody>
+      </p:sp>
+      <p:sp>
+        <p:nvSpPr>
+          <p:cNvPr id="24" name="Text 22"/>
+          <p:cNvSpPr/>
+          <p:nvPr/>
+        </p:nvSpPr>
+        <p:spPr>
+          <a:xfrm>
+            <a:off x="7132320" y="3035808"/>
+            <a:ext cx="1188720" cy="320040"/>
+          </a:xfrm>
+          <a:prstGeom prst="rect">
+            <a:avLst/>
+          </a:prstGeom>
+          <a:noFill/>
+          <a:ln/>
+        </p:spPr>
+        <p:txBody>
+          <a:bodyPr wrap="square" lIns="0" tIns="0" rIns="0" bIns="0" rtlCol="0" anchor="ctr"/>
+          <a:lstStyle/>
+          <a:p>
+            <a:pPr algn="r" indent="0" marL="0">
+              <a:buNone/>
+            </a:pPr>
+            <a:r>
+              <a:rPr lang="en-US" sz="1300" b="1" dirty="0">
+                <a:solidFill>
+                  <a:srgbClr val="DC2626"/>
+                </a:solidFill>
+              </a:rPr>
+              <a:t>~$20/月</a:t>
+            </a:r>
+            <a:endParaRPr lang="en-US" sz="1300" dirty="0"/>
+          </a:p>
+        </p:txBody>
+      </p:sp>
+      <p:sp>
+        <p:nvSpPr>
+          <p:cNvPr id="25" name="Shape 23"/>
+          <p:cNvSpPr/>
+          <p:nvPr/>
+        </p:nvSpPr>
+        <p:spPr>
+          <a:xfrm>
+            <a:off x="5029200" y="3611880"/>
+            <a:ext cx="3474720" cy="548640"/>
+          </a:xfrm>
+          <a:prstGeom prst="rect">
+            <a:avLst/>
+          </a:prstGeom>
+          <a:solidFill>
+            <a:srgbClr val="FFFFFF"/>
+          </a:solidFill>
+          <a:ln/>
+          <a:effectLst>
+            <a:outerShdw sx="100000" sy="100000" kx="0" ky="0" algn="bl" rotWithShape="0" blurRad="76200" dist="25400" dir="8100000">
+              <a:srgbClr val="000000">
+                <a:alpha val="12000"/>
+              </a:srgbClr>
+            </a:outerShdw>
+          </a:effectLst>
+        </p:spPr>
+      </p:sp>
+      <p:sp>
+        <p:nvSpPr>
+          <p:cNvPr id="26" name="Shape 24"/>
+          <p:cNvSpPr/>
+          <p:nvPr/>
+        </p:nvSpPr>
+        <p:spPr>
+          <a:xfrm>
+            <a:off x="5029200" y="3611880"/>
+            <a:ext cx="54864" cy="548640"/>
+          </a:xfrm>
+          <a:prstGeom prst="rect">
+            <a:avLst/>
+          </a:prstGeom>
+          <a:solidFill>
+            <a:srgbClr val="028090"/>
+          </a:solidFill>
+          <a:ln/>
+        </p:spPr>
+      </p:sp>
+      <p:sp>
+        <p:nvSpPr>
+          <p:cNvPr id="27" name="Text 25"/>
+          <p:cNvSpPr/>
+          <p:nvPr/>
+        </p:nvSpPr>
+        <p:spPr>
+          <a:xfrm>
+            <a:off x="5212080" y="3630168"/>
+            <a:ext cx="1645920" cy="228600"/>
+          </a:xfrm>
+          <a:prstGeom prst="rect">
+            <a:avLst/>
+          </a:prstGeom>
+          <a:noFill/>
+          <a:ln/>
+        </p:spPr>
+        <p:txBody>
+          <a:bodyPr wrap="square" lIns="0" tIns="0" rIns="0" bIns="0" rtlCol="0" anchor="ctr"/>
+          <a:lstStyle/>
+          <a:p>
+            <a:pPr indent="0" marL="0">
+              <a:buNone/>
+            </a:pPr>
+            <a:r>
+              <a:rPr lang="en-US" sz="1000" b="1" dirty="0">
+                <a:solidFill>
+                  <a:srgbClr val="1E2761"/>
+                </a:solidFill>
+              </a:rPr>
+              <a:t>OpenCode 5%</a:t>
+            </a:r>
+            <a:endParaRPr lang="en-US" sz="1000" dirty="0"/>
+          </a:p>
+        </p:txBody>
+      </p:sp>
+      <p:sp>
+        <p:nvSpPr>
+          <p:cNvPr id="28" name="Text 26"/>
+          <p:cNvSpPr/>
+          <p:nvPr/>
+        </p:nvSpPr>
+        <p:spPr>
+          <a:xfrm>
+            <a:off x="5212080" y="3886200"/>
+            <a:ext cx="1097280" cy="201168"/>
+          </a:xfrm>
+          <a:prstGeom prst="rect">
+            <a:avLst/>
+          </a:prstGeom>
+          <a:noFill/>
+          <a:ln/>
+        </p:spPr>
+        <p:txBody>
+          <a:bodyPr wrap="square" lIns="0" tIns="0" rIns="0" bIns="0" rtlCol="0" anchor="ctr"/>
+          <a:lstStyle/>
+          <a:p>
+            <a:pPr indent="0" marL="0">
+              <a:buNone/>
+            </a:pPr>
+            <a:r>
+              <a:rPr lang="en-US" sz="900" dirty="0">
+                <a:solidFill>
+                  <a:srgbClr val="64748B"/>
+                </a:solidFill>
+              </a:rPr>
+              <a:t>Haiku</a:t>
+            </a:r>
+            <a:endParaRPr lang="en-US" sz="900" dirty="0"/>
+          </a:p>
+        </p:txBody>
+      </p:sp>
+      <p:sp>
+        <p:nvSpPr>
+          <p:cNvPr id="29" name="Text 27"/>
+          <p:cNvSpPr/>
+          <p:nvPr/>
+        </p:nvSpPr>
+        <p:spPr>
+          <a:xfrm>
+            <a:off x="7132320" y="3721608"/>
+            <a:ext cx="1188720" cy="320040"/>
+          </a:xfrm>
+          <a:prstGeom prst="rect">
+            <a:avLst/>
+          </a:prstGeom>
+          <a:noFill/>
+          <a:ln/>
+        </p:spPr>
+        <p:txBody>
+          <a:bodyPr wrap="square" lIns="0" tIns="0" rIns="0" bIns="0" rtlCol="0" anchor="ctr"/>
+          <a:lstStyle/>
+          <a:p>
+            <a:pPr algn="r" indent="0" marL="0">
+              <a:buNone/>
+            </a:pPr>
+            <a:r>
+              <a:rPr lang="en-US" sz="1300" b="1" dirty="0">
+                <a:solidFill>
+                  <a:srgbClr val="028090"/>
+                </a:solidFill>
+              </a:rPr>
+              <a:t>~$2/月</a:t>
+            </a:r>
+            <a:endParaRPr lang="en-US" sz="1300" dirty="0"/>
+          </a:p>
+        </p:txBody>
+      </p:sp>
+      <p:sp>
+        <p:nvSpPr>
+          <p:cNvPr id="30" name="Shape 28"/>
+          <p:cNvSpPr/>
+          <p:nvPr/>
+        </p:nvSpPr>
+        <p:spPr>
+          <a:xfrm>
+            <a:off x="640080" y="4297680"/>
+            <a:ext cx="7863840" cy="502920"/>
+          </a:xfrm>
+          <a:prstGeom prst="rect">
+            <a:avLst/>
+          </a:prstGeom>
+          <a:solidFill>
+            <a:srgbClr val="1E2761"/>
+          </a:solidFill>
+          <a:ln/>
+        </p:spPr>
+      </p:sp>
+      <p:sp>
+        <p:nvSpPr>
+          <p:cNvPr id="31" name="Text 29"/>
+          <p:cNvSpPr/>
+          <p:nvPr/>
+        </p:nvSpPr>
+        <p:spPr>
+          <a:xfrm>
+            <a:off x="822960" y="4343400"/>
+            <a:ext cx="7498080" cy="411480"/>
+          </a:xfrm>
+          <a:prstGeom prst="rect">
+            <a:avLst/>
+          </a:prstGeom>
+          <a:noFill/>
+          <a:ln/>
+        </p:spPr>
+        <p:txBody>
+          <a:bodyPr wrap="square" lIns="0" tIns="0" rIns="0" bIns="0" rtlCol="0" anchor="ctr"/>
+          <a:lstStyle/>
+          <a:p>
+            <a:pPr algn="ctr" indent="0" marL="0">
+              <a:buNone/>
+            </a:pPr>
+            <a:r>
+              <a:rPr lang="en-US" sz="1300" b="1" dirty="0">
+                <a:solidFill>
+                  <a:srgbClr val="FFFFFF"/>
+                </a:solidFill>
+              </a:rPr>
+              <a:t>OpenCode + Claude Code 混合方案: 月费 ~$55 (vs 纯Opus $3,795 = 节省98.5%)</a:t>
+            </a:r>
+            <a:endParaRPr lang="en-US" sz="1300" dirty="0"/>
+          </a:p>
+        </p:txBody>
+      </p:sp>
+    </p:spTree>
+  </p:cSld>
+  <p:clrMapOvr>
+    <a:masterClrMapping/>
+  </p:clrMapOvr>
+</p:sld>
+</file>
+
+<file path=ppt/slides/slide13.xml><?xml version="1.0" encoding="utf-8"?>
+<p:sld xmlns:a="http://schemas.openxmlformats.org/drawingml/2006/main" xmlns:r="http://schemas.openxmlformats.org/officeDocument/2006/relationships" xmlns:p="http://schemas.openxmlformats.org/presentationml/2006/main">
+  <p:cSld name="Slide 13">
+    <p:bg>
+      <p:bgPr>
+        <a:solidFill>
+          <a:srgbClr val="F5F7FA"/>
+        </a:solidFill>
+      </p:bgPr>
+    </p:bg>
+    <p:spTree>
+      <p:nvGrpSpPr>
+        <p:cNvPr id="1" name=""/>
+        <p:cNvGrpSpPr/>
+        <p:nvPr/>
+      </p:nvGrpSpPr>
+      <p:grpSpPr>
+        <a:xfrm>
+          <a:off x="0" y="0"/>
+          <a:ext cx="0" cy="0"/>
+          <a:chOff x="0" y="0"/>
+          <a:chExt cx="0" cy="0"/>
+        </a:xfrm>
+      </p:grpSpPr>
+      <p:sp>
+        <p:nvSpPr>
+          <p:cNvPr id="2" name="Shape 0"/>
+          <p:cNvSpPr/>
+          <p:nvPr/>
+        </p:nvSpPr>
+        <p:spPr>
+          <a:xfrm>
+            <a:off x="0" y="0"/>
+            <a:ext cx="9144000" cy="54864"/>
+          </a:xfrm>
+          <a:prstGeom prst="rect">
+            <a:avLst/>
+          </a:prstGeom>
+          <a:solidFill>
+            <a:srgbClr val="028090"/>
+          </a:solidFill>
+          <a:ln/>
+        </p:spPr>
+      </p:sp>
+      <p:sp>
+        <p:nvSpPr>
+          <p:cNvPr id="3" name="Text 1"/>
+          <p:cNvSpPr/>
+          <p:nvPr/>
+        </p:nvSpPr>
+        <p:spPr>
+          <a:xfrm>
+            <a:off x="640080" y="228600"/>
+            <a:ext cx="7863840" cy="594360"/>
+          </a:xfrm>
+          <a:prstGeom prst="rect">
+            <a:avLst/>
+          </a:prstGeom>
+          <a:noFill/>
+          <a:ln/>
+        </p:spPr>
+        <p:txBody>
+          <a:bodyPr wrap="square" lIns="0" tIns="0" rIns="0" bIns="0" rtlCol="0" anchor="ctr"/>
+          <a:lstStyle/>
+          <a:p>
+            <a:pPr indent="0" marL="0">
+              <a:buNone/>
+            </a:pPr>
+            <a:r>
+              <a:rPr lang="en-US" sz="2800" b="1" dirty="0">
+                <a:solidFill>
+                  <a:srgbClr val="1E2761"/>
+                </a:solidFill>
+                <a:latin typeface="Arial" pitchFamily="34" charset="0"/>
+                <a:ea typeface="Arial" pitchFamily="34" charset="-122"/>
+                <a:cs typeface="Arial" pitchFamily="34" charset="-120"/>
+              </a:rPr>
+              <a:t>行动清单</a:t>
+            </a:r>
+            <a:endParaRPr lang="en-US" sz="2800" dirty="0"/>
+          </a:p>
+        </p:txBody>
+      </p:sp>
+      <p:sp>
+        <p:nvSpPr>
+          <p:cNvPr id="4" name="Shape 2"/>
+          <p:cNvSpPr/>
+          <p:nvPr/>
+        </p:nvSpPr>
+        <p:spPr>
+          <a:xfrm>
+            <a:off x="640080" y="868680"/>
+            <a:ext cx="7863840" cy="0"/>
+          </a:xfrm>
+          <a:prstGeom prst="line">
+            <a:avLst/>
+          </a:prstGeom>
+          <a:noFill/>
+          <a:ln w="25400">
+            <a:solidFill>
+              <a:srgbClr val="028090"/>
+            </a:solidFill>
+            <a:prstDash val="solid"/>
+          </a:ln>
+        </p:spPr>
+      </p:sp>
+      <p:sp>
+        <p:nvSpPr>
+          <p:cNvPr id="5" name="Text 3"/>
+          <p:cNvSpPr/>
+          <p:nvPr/>
+        </p:nvSpPr>
+        <p:spPr>
+          <a:xfrm>
+            <a:off x="7772400" y="4800600"/>
+            <a:ext cx="914400" cy="274320"/>
+          </a:xfrm>
+          <a:prstGeom prst="rect">
+            <a:avLst/>
+          </a:prstGeom>
+          <a:noFill/>
+          <a:ln/>
+        </p:spPr>
+        <p:txBody>
+          <a:bodyPr wrap="square" rtlCol="0" anchor="ctr"/>
+          <a:lstStyle/>
+          <a:p>
+            <a:pPr algn="r" indent="0" marL="0">
+              <a:buNone/>
+            </a:pPr>
+            <a:r>
+              <a:rPr lang="en-US" sz="900" dirty="0">
+                <a:solidFill>
+                  <a:srgbClr val="64748B"/>
+                </a:solidFill>
+              </a:rPr>
+              <a:t>13</a:t>
+            </a:r>
+            <a:endParaRPr lang="en-US" sz="900" dirty="0"/>
+          </a:p>
+        </p:txBody>
+      </p:sp>
+      <p:sp>
+        <p:nvSpPr>
+          <p:cNvPr id="6" name="Text 4"/>
+          <p:cNvSpPr/>
+          <p:nvPr/>
+        </p:nvSpPr>
+        <p:spPr>
+          <a:xfrm>
+            <a:off x="457200" y="4800600"/>
+            <a:ext cx="3657600" cy="274320"/>
+          </a:xfrm>
+          <a:prstGeom prst="rect">
+            <a:avLst/>
+          </a:prstGeom>
+          <a:noFill/>
+          <a:ln/>
+        </p:spPr>
+        <p:txBody>
+          <a:bodyPr wrap="square" rtlCol="0" anchor="ctr"/>
+          <a:lstStyle/>
+          <a:p>
+            <a:pPr indent="0" marL="0">
+              <a:buNone/>
+            </a:pPr>
+            <a:r>
+              <a:rPr lang="en-US" sz="900" dirty="0">
+                <a:solidFill>
+                  <a:srgbClr val="64748B"/>
+                </a:solidFill>
+              </a:rPr>
+              <a:t>Claude Token 优化最佳实践</a:t>
+            </a:r>
+            <a:endParaRPr lang="en-US" sz="900" dirty="0"/>
+          </a:p>
+        </p:txBody>
+      </p:sp>
+      <p:sp>
+        <p:nvSpPr>
+          <p:cNvPr id="7" name="Shape 5"/>
+          <p:cNvSpPr/>
+          <p:nvPr/>
+        </p:nvSpPr>
+        <p:spPr>
+          <a:xfrm>
+            <a:off x="640080" y="1097280"/>
+            <a:ext cx="1645920" cy="365760"/>
+          </a:xfrm>
+          <a:prstGeom prst="rect">
+            <a:avLst/>
+          </a:prstGeom>
+          <a:solidFill>
+            <a:srgbClr val="059669"/>
+          </a:solidFill>
+          <a:ln/>
+        </p:spPr>
+      </p:sp>
+      <p:sp>
+        <p:nvSpPr>
+          <p:cNvPr id="8" name="Text 6"/>
+          <p:cNvSpPr/>
+          <p:nvPr/>
+        </p:nvSpPr>
+        <p:spPr>
+          <a:xfrm>
+            <a:off x="640080" y="1115568"/>
+            <a:ext cx="1645920" cy="329184"/>
+          </a:xfrm>
+          <a:prstGeom prst="rect">
+            <a:avLst/>
+          </a:prstGeom>
+          <a:noFill/>
+          <a:ln/>
+        </p:spPr>
+        <p:txBody>
+          <a:bodyPr wrap="square" lIns="0" tIns="0" rIns="0" bIns="0" rtlCol="0" anchor="ctr"/>
+          <a:lstStyle/>
+          <a:p>
+            <a:pPr algn="ctr" indent="0" marL="0">
+              <a:buNone/>
+            </a:pPr>
+            <a:r>
+              <a:rPr lang="en-US" sz="1200" b="1" dirty="0">
+                <a:solidFill>
+                  <a:srgbClr val="FFFFFF"/>
+                </a:solidFill>
+              </a:rPr>
+              <a:t>今天 (10分钟)</a:t>
+            </a:r>
+            <a:endParaRPr lang="en-US" sz="1200" dirty="0"/>
+          </a:p>
+        </p:txBody>
+      </p:sp>
+      <p:sp>
+        <p:nvSpPr>
+          <p:cNvPr id="9" name="Shape 7"/>
+          <p:cNvSpPr/>
+          <p:nvPr/>
+        </p:nvSpPr>
+        <p:spPr>
+          <a:xfrm>
+            <a:off x="7589520" y="1097280"/>
+            <a:ext cx="914400" cy="365760"/>
+          </a:xfrm>
+          <a:prstGeom prst="rect">
+            <a:avLst/>
+          </a:prstGeom>
+          <a:solidFill>
+            <a:srgbClr val="059669"/>
+          </a:solidFill>
+          <a:ln/>
+        </p:spPr>
+      </p:sp>
+      <p:sp>
+        <p:nvSpPr>
+          <p:cNvPr id="10" name="Text 8"/>
+          <p:cNvSpPr/>
+          <p:nvPr/>
+        </p:nvSpPr>
+        <p:spPr>
+          <a:xfrm>
+            <a:off x="6400800" y="1115568"/>
+            <a:ext cx="2103120" cy="329184"/>
+          </a:xfrm>
+          <a:prstGeom prst="rect">
+            <a:avLst/>
+          </a:prstGeom>
+          <a:noFill/>
+          <a:ln/>
+        </p:spPr>
+        <p:txBody>
+          <a:bodyPr wrap="square" lIns="0" tIns="0" rIns="0" bIns="0" rtlCol="0" anchor="ctr"/>
+          <a:lstStyle/>
+          <a:p>
+            <a:pPr algn="r" indent="0" marL="0">
+              <a:buNone/>
+            </a:pPr>
+            <a:r>
+              <a:rPr lang="en-US" sz="1100" b="1" dirty="0">
+                <a:solidFill>
+                  <a:srgbClr val="059669"/>
+                </a:solidFill>
+              </a:rPr>
+              <a:t>→ 立即省 20%</a:t>
+            </a:r>
+            <a:endParaRPr lang="en-US" sz="1100" dirty="0"/>
+          </a:p>
+        </p:txBody>
+      </p:sp>
+      <p:sp>
+        <p:nvSpPr>
+          <p:cNvPr id="11" name="Text 9"/>
+          <p:cNvSpPr/>
+          <p:nvPr/>
+        </p:nvSpPr>
+        <p:spPr>
+          <a:xfrm>
+            <a:off x="822960" y="1508760"/>
+            <a:ext cx="7315200" cy="822960"/>
+          </a:xfrm>
+          <a:prstGeom prst="rect">
+            <a:avLst/>
+          </a:prstGeom>
+          <a:noFill/>
+          <a:ln/>
+        </p:spPr>
+        <p:txBody>
+          <a:bodyPr wrap="square" rtlCol="0" anchor="t"/>
+          <a:lstStyle/>
+          <a:p>
+            <a:pPr marL="342900" indent="-342900">
+              <a:spcAft>
+                <a:spcPts val="200"/>
+              </a:spcAft>
+              <a:buSzPct val="100000"/>
+              <a:buChar char="•"/>
+            </a:pPr>
+            <a:r>
+              <a:rPr lang="en-US" sz="1100" dirty="0">
+                <a:solidFill>
+                  <a:srgbClr val="1E293B"/>
+                </a:solidFill>
+              </a:rPr>
+              <a:t>export CLAUDE_CODE_ENABLE_THINKING=false</a:t>
+            </a:r>
+            <a:endParaRPr lang="en-US" sz="1100" dirty="0"/>
+          </a:p>
+          <a:p>
+            <a:pPr marL="342900" indent="-342900">
+              <a:spcAft>
+                <a:spcPts val="200"/>
+              </a:spcAft>
+              <a:buSzPct val="100000"/>
+              <a:buChar char="•"/>
+            </a:pPr>
+            <a:r>
+              <a:rPr lang="en-US" sz="1100" dirty="0">
+                <a:solidFill>
+                  <a:srgbClr val="1E293B"/>
+                </a:solidFill>
+              </a:rPr>
+              <a:t>export CLAUDE_CODE_AUTO_COMPACT=true</a:t>
+            </a:r>
+            <a:endParaRPr lang="en-US" sz="1100" dirty="0"/>
+          </a:p>
+          <a:p>
+            <a:pPr marL="342900" indent="-342900">
+              <a:spcAft>
+                <a:spcPts val="200"/>
+              </a:spcAft>
+              <a:buSzPct val="100000"/>
+              <a:buChar char="•"/>
+            </a:pPr>
+            <a:r>
+              <a:rPr lang="en-US" sz="1100" dirty="0">
+                <a:solidFill>
+                  <a:srgbClr val="1E293B"/>
+                </a:solidFill>
+              </a:rPr>
+              <a:t>export CLAUDE_CODE_MAX_TOKENS=4096</a:t>
+            </a:r>
+            <a:endParaRPr lang="en-US" sz="1100" dirty="0"/>
+          </a:p>
+        </p:txBody>
+      </p:sp>
+      <p:sp>
+        <p:nvSpPr>
+          <p:cNvPr id="12" name="Shape 10"/>
+          <p:cNvSpPr/>
+          <p:nvPr/>
+        </p:nvSpPr>
+        <p:spPr>
+          <a:xfrm>
+            <a:off x="640080" y="2377440"/>
+            <a:ext cx="1645920" cy="365760"/>
+          </a:xfrm>
+          <a:prstGeom prst="rect">
+            <a:avLst/>
+          </a:prstGeom>
+          <a:solidFill>
+            <a:srgbClr val="D97706"/>
+          </a:solidFill>
+          <a:ln/>
+        </p:spPr>
+      </p:sp>
+      <p:sp>
+        <p:nvSpPr>
+          <p:cNvPr id="13" name="Text 11"/>
+          <p:cNvSpPr/>
+          <p:nvPr/>
+        </p:nvSpPr>
+        <p:spPr>
+          <a:xfrm>
+            <a:off x="640080" y="2395728"/>
+            <a:ext cx="1645920" cy="329184"/>
+          </a:xfrm>
+          <a:prstGeom prst="rect">
+            <a:avLst/>
+          </a:prstGeom>
+          <a:noFill/>
+          <a:ln/>
+        </p:spPr>
+        <p:txBody>
+          <a:bodyPr wrap="square" lIns="0" tIns="0" rIns="0" bIns="0" rtlCol="0" anchor="ctr"/>
+          <a:lstStyle/>
+          <a:p>
+            <a:pPr algn="ctr" indent="0" marL="0">
+              <a:buNone/>
+            </a:pPr>
+            <a:r>
+              <a:rPr lang="en-US" sz="1200" b="1" dirty="0">
+                <a:solidFill>
+                  <a:srgbClr val="FFFFFF"/>
+                </a:solidFill>
+              </a:rPr>
+              <a:t>本周 (40分钟)</a:t>
+            </a:r>
+            <a:endParaRPr lang="en-US" sz="1200" dirty="0"/>
+          </a:p>
+        </p:txBody>
+      </p:sp>
+      <p:sp>
+        <p:nvSpPr>
+          <p:cNvPr id="14" name="Shape 12"/>
+          <p:cNvSpPr/>
+          <p:nvPr/>
+        </p:nvSpPr>
+        <p:spPr>
+          <a:xfrm>
+            <a:off x="7589520" y="2377440"/>
+            <a:ext cx="914400" cy="365760"/>
+          </a:xfrm>
+          <a:prstGeom prst="rect">
+            <a:avLst/>
+          </a:prstGeom>
+          <a:solidFill>
+            <a:srgbClr val="D97706"/>
+          </a:solidFill>
+          <a:ln/>
+        </p:spPr>
+      </p:sp>
+      <p:sp>
+        <p:nvSpPr>
+          <p:cNvPr id="15" name="Text 13"/>
+          <p:cNvSpPr/>
+          <p:nvPr/>
+        </p:nvSpPr>
+        <p:spPr>
+          <a:xfrm>
+            <a:off x="6400800" y="2395728"/>
+            <a:ext cx="2103120" cy="329184"/>
+          </a:xfrm>
+          <a:prstGeom prst="rect">
+            <a:avLst/>
+          </a:prstGeom>
+          <a:noFill/>
+          <a:ln/>
+        </p:spPr>
+        <p:txBody>
+          <a:bodyPr wrap="square" lIns="0" tIns="0" rIns="0" bIns="0" rtlCol="0" anchor="ctr"/>
+          <a:lstStyle/>
+          <a:p>
+            <a:pPr algn="r" indent="0" marL="0">
+              <a:buNone/>
+            </a:pPr>
+            <a:r>
+              <a:rPr lang="en-US" sz="1100" b="1" dirty="0">
+                <a:solidFill>
+                  <a:srgbClr val="D97706"/>
+                </a:solidFill>
+              </a:rPr>
+              <a:t>→ 累计省 42%</a:t>
+            </a:r>
+            <a:endParaRPr lang="en-US" sz="1100" dirty="0"/>
+          </a:p>
+        </p:txBody>
+      </p:sp>
+      <p:sp>
+        <p:nvSpPr>
+          <p:cNvPr id="16" name="Text 14"/>
+          <p:cNvSpPr/>
+          <p:nvPr/>
+        </p:nvSpPr>
+        <p:spPr>
+          <a:xfrm>
+            <a:off x="822960" y="2788920"/>
+            <a:ext cx="7315200" cy="822960"/>
+          </a:xfrm>
+          <a:prstGeom prst="rect">
+            <a:avLst/>
+          </a:prstGeom>
+          <a:noFill/>
+          <a:ln/>
+        </p:spPr>
+        <p:txBody>
+          <a:bodyPr wrap="square" rtlCol="0" anchor="t"/>
+          <a:lstStyle/>
+          <a:p>
+            <a:pPr marL="342900" indent="-342900">
+              <a:spcAft>
+                <a:spcPts val="200"/>
+              </a:spcAft>
+              <a:buSzPct val="100000"/>
+              <a:buChar char="•"/>
+            </a:pPr>
+            <a:r>
+              <a:rPr lang="en-US" sz="1100" dirty="0">
+                <a:solidFill>
+                  <a:srgbClr val="1E293B"/>
+                </a:solidFill>
+              </a:rPr>
+              <a:t>创建 .claudeignore 排除 build/oh_modules/</a:t>
+            </a:r>
+            <a:endParaRPr lang="en-US" sz="1100" dirty="0"/>
+          </a:p>
+          <a:p>
+            <a:pPr marL="342900" indent="-342900">
+              <a:spcAft>
+                <a:spcPts val="200"/>
+              </a:spcAft>
+              <a:buSzPct val="100000"/>
+              <a:buChar char="•"/>
+            </a:pPr>
+            <a:r>
+              <a:rPr lang="en-US" sz="1100" dirty="0">
+                <a:solidFill>
+                  <a:srgbClr val="1E293B"/>
+                </a:solidFill>
+              </a:rPr>
+              <a:t>精简 CLAUDE.md 至 &lt;1,500 tokens</a:t>
+            </a:r>
+            <a:endParaRPr lang="en-US" sz="1100" dirty="0"/>
+          </a:p>
+          <a:p>
+            <a:pPr marL="342900" indent="-342900">
+              <a:spcAft>
+                <a:spcPts val="200"/>
+              </a:spcAft>
+              <a:buSzPct val="100000"/>
+              <a:buChar char="•"/>
+            </a:pPr>
+            <a:r>
+              <a:rPr lang="en-US" sz="1100" dirty="0">
+                <a:solidFill>
+                  <a:srgbClr val="1E293B"/>
+                </a:solidFill>
+              </a:rPr>
+              <a:t>安装 DeepSeek V4 模型配置</a:t>
+            </a:r>
+            <a:endParaRPr lang="en-US" sz="1100" dirty="0"/>
+          </a:p>
+        </p:txBody>
+      </p:sp>
+      <p:sp>
+        <p:nvSpPr>
+          <p:cNvPr id="17" name="Shape 15"/>
+          <p:cNvSpPr/>
+          <p:nvPr/>
+        </p:nvSpPr>
+        <p:spPr>
+          <a:xfrm>
+            <a:off x="640080" y="3657600"/>
+            <a:ext cx="1645920" cy="365760"/>
+          </a:xfrm>
+          <a:prstGeom prst="rect">
+            <a:avLst/>
+          </a:prstGeom>
+          <a:solidFill>
+            <a:srgbClr val="028090"/>
+          </a:solidFill>
+          <a:ln/>
+        </p:spPr>
+      </p:sp>
+      <p:sp>
+        <p:nvSpPr>
+          <p:cNvPr id="18" name="Text 16"/>
+          <p:cNvSpPr/>
+          <p:nvPr/>
+        </p:nvSpPr>
+        <p:spPr>
+          <a:xfrm>
+            <a:off x="640080" y="3675888"/>
+            <a:ext cx="1645920" cy="329184"/>
+          </a:xfrm>
+          <a:prstGeom prst="rect">
+            <a:avLst/>
+          </a:prstGeom>
+          <a:noFill/>
+          <a:ln/>
+        </p:spPr>
+        <p:txBody>
+          <a:bodyPr wrap="square" lIns="0" tIns="0" rIns="0" bIns="0" rtlCol="0" anchor="ctr"/>
+          <a:lstStyle/>
+          <a:p>
+            <a:pPr algn="ctr" indent="0" marL="0">
+              <a:buNone/>
+            </a:pPr>
+            <a:r>
+              <a:rPr lang="en-US" sz="1200" b="1" dirty="0">
+                <a:solidFill>
+                  <a:srgbClr val="FFFFFF"/>
+                </a:solidFill>
+              </a:rPr>
+              <a:t>持续养成</a:t>
+            </a:r>
+            <a:endParaRPr lang="en-US" sz="1200" dirty="0"/>
+          </a:p>
+        </p:txBody>
+      </p:sp>
+      <p:sp>
+        <p:nvSpPr>
+          <p:cNvPr id="19" name="Shape 17"/>
+          <p:cNvSpPr/>
+          <p:nvPr/>
+        </p:nvSpPr>
+        <p:spPr>
+          <a:xfrm>
+            <a:off x="7589520" y="3657600"/>
+            <a:ext cx="914400" cy="365760"/>
+          </a:xfrm>
+          <a:prstGeom prst="rect">
+            <a:avLst/>
+          </a:prstGeom>
+          <a:solidFill>
+            <a:srgbClr val="028090"/>
+          </a:solidFill>
+          <a:ln/>
+        </p:spPr>
+      </p:sp>
+      <p:sp>
+        <p:nvSpPr>
+          <p:cNvPr id="20" name="Text 18"/>
+          <p:cNvSpPr/>
+          <p:nvPr/>
+        </p:nvSpPr>
+        <p:spPr>
+          <a:xfrm>
+            <a:off x="6400800" y="3675888"/>
+            <a:ext cx="2103120" cy="329184"/>
+          </a:xfrm>
+          <a:prstGeom prst="rect">
+            <a:avLst/>
+          </a:prstGeom>
+          <a:noFill/>
+          <a:ln/>
+        </p:spPr>
+        <p:txBody>
+          <a:bodyPr wrap="square" lIns="0" tIns="0" rIns="0" bIns="0" rtlCol="0" anchor="ctr"/>
+          <a:lstStyle/>
+          <a:p>
+            <a:pPr algn="r" indent="0" marL="0">
+              <a:buNone/>
+            </a:pPr>
+            <a:r>
+              <a:rPr lang="en-US" sz="1100" b="1" dirty="0">
+                <a:solidFill>
+                  <a:srgbClr val="028090"/>
+                </a:solidFill>
+              </a:rPr>
+              <a:t>→ 累计省 91%</a:t>
+            </a:r>
+            <a:endParaRPr lang="en-US" sz="1100" dirty="0"/>
+          </a:p>
+        </p:txBody>
+      </p:sp>
+      <p:sp>
+        <p:nvSpPr>
+          <p:cNvPr id="21" name="Text 19"/>
+          <p:cNvSpPr/>
+          <p:nvPr/>
+        </p:nvSpPr>
+        <p:spPr>
+          <a:xfrm>
+            <a:off x="822960" y="4069080"/>
+            <a:ext cx="7315200" cy="822960"/>
+          </a:xfrm>
+          <a:prstGeom prst="rect">
+            <a:avLst/>
+          </a:prstGeom>
+          <a:noFill/>
+          <a:ln/>
+        </p:spPr>
+        <p:txBody>
+          <a:bodyPr wrap="square" rtlCol="0" anchor="t"/>
+          <a:lstStyle/>
+          <a:p>
+            <a:pPr marL="342900" indent="-342900">
+              <a:spcAft>
+                <a:spcPts val="200"/>
+              </a:spcAft>
+              <a:buSzPct val="100000"/>
+              <a:buChar char="•"/>
+            </a:pPr>
+            <a:r>
+              <a:rPr lang="en-US" sz="1100" dirty="0">
+                <a:solidFill>
+                  <a:srgbClr val="1E293B"/>
+                </a:solidFill>
+              </a:rPr>
+              <a:t>每10-15轮执行 /compact</a:t>
+            </a:r>
+            <a:endParaRPr lang="en-US" sz="1100" dirty="0"/>
+          </a:p>
+          <a:p>
+            <a:pPr marL="342900" indent="-342900">
+              <a:spcAft>
+                <a:spcPts val="200"/>
+              </a:spcAft>
+              <a:buSzPct val="100000"/>
+              <a:buChar char="•"/>
+            </a:pPr>
+            <a:r>
+              <a:rPr lang="en-US" sz="1100" dirty="0">
+                <a:solidFill>
+                  <a:srgbClr val="1E293B"/>
+                </a:solidFill>
+              </a:rPr>
+              <a:t>一个模块一个会话</a:t>
+            </a:r>
+            <a:endParaRPr lang="en-US" sz="1100" dirty="0"/>
+          </a:p>
+          <a:p>
+            <a:pPr marL="342900" indent="-342900">
+              <a:spcAft>
+                <a:spcPts val="200"/>
+              </a:spcAft>
+              <a:buSzPct val="100000"/>
+              <a:buChar char="•"/>
+            </a:pPr>
+            <a:r>
+              <a:rPr lang="en-US" sz="1100" dirty="0">
+                <a:solidFill>
+                  <a:srgbClr val="1E293B"/>
+                </a:solidFill>
+              </a:rPr>
+              <a:t>简单任务用 DeepSeek，架构用 Opus</a:t>
+            </a:r>
+            <a:endParaRPr lang="en-US" sz="1100" dirty="0"/>
+          </a:p>
+          <a:p>
+            <a:pPr marL="342900" indent="-342900">
+              <a:spcAft>
+                <a:spcPts val="200"/>
+              </a:spcAft>
+              <a:buSzPct val="100000"/>
+              <a:buChar char="•"/>
+            </a:pPr>
+            <a:r>
+              <a:rPr lang="en-US" sz="1100" dirty="0">
+                <a:solidFill>
+                  <a:srgbClr val="1E293B"/>
+                </a:solidFill>
+              </a:rPr>
+              <a:t>用高效提问模板 （列表 + @引用）</a:t>
+            </a:r>
+            <a:endParaRPr lang="en-US" sz="1100" dirty="0"/>
+          </a:p>
+        </p:txBody>
+      </p:sp>
+    </p:spTree>
+  </p:cSld>
+  <p:clrMapOvr>
+    <a:masterClrMapping/>
+  </p:clrMapOvr>
+</p:sld>
+</file>
+
+<file path=ppt/slides/slide14.xml><?xml version="1.0" encoding="utf-8"?>
+<p:sld xmlns:a="http://schemas.openxmlformats.org/drawingml/2006/main" xmlns:r="http://schemas.openxmlformats.org/officeDocument/2006/relationships" xmlns:p="http://schemas.openxmlformats.org/presentationml/2006/main">
+  <p:cSld name="Slide 14">
     <p:bg>
       <p:bgPr>
         <a:solidFill>
@@ -5280,6 +8482,399 @@
                   <a:srgbClr val="1E2761"/>
                 </a:solidFill>
               </a:rPr>
+              <a:t>数据来源与准确性</a:t>
+            </a:r>
+            <a:endParaRPr lang="en-US" sz="1500" dirty="0"/>
+          </a:p>
+        </p:txBody>
+      </p:sp>
+      <p:sp>
+        <p:nvSpPr>
+          <p:cNvPr id="29" name="Text 27"/>
+          <p:cNvSpPr/>
+          <p:nvPr/>
+        </p:nvSpPr>
+        <p:spPr>
+          <a:xfrm>
+            <a:off x="3931920" y="4160520"/>
+            <a:ext cx="3657600" cy="411480"/>
+          </a:xfrm>
+          <a:prstGeom prst="rect">
+            <a:avLst/>
+          </a:prstGeom>
+          <a:noFill/>
+          <a:ln/>
+        </p:spPr>
+        <p:txBody>
+          <a:bodyPr wrap="square" lIns="0" tIns="0" rIns="0" bIns="0" rtlCol="0" anchor="ctr"/>
+          <a:lstStyle/>
+          <a:p>
+            <a:pPr indent="0" marL="0">
+              <a:buNone/>
+            </a:pPr>
+            <a:r>
+              <a:rPr lang="en-US" sz="1300" dirty="0">
+                <a:solidFill>
+                  <a:srgbClr val="64748B"/>
+                </a:solidFill>
+              </a:rPr>
+              <a:t>数字怎么来的？如何验证？</a:t>
+            </a:r>
+            <a:endParaRPr lang="en-US" sz="1300" dirty="0"/>
+          </a:p>
+        </p:txBody>
+      </p:sp>
+      <p:sp>
+        <p:nvSpPr>
+          <p:cNvPr id="30" name="Shape 28"/>
+          <p:cNvSpPr/>
+          <p:nvPr/>
+        </p:nvSpPr>
+        <p:spPr>
+          <a:xfrm>
+            <a:off x="1554480" y="4663440"/>
+            <a:ext cx="5943600" cy="0"/>
+          </a:xfrm>
+          <a:prstGeom prst="line">
+            <a:avLst/>
+          </a:prstGeom>
+          <a:noFill/>
+          <a:ln w="6350">
+            <a:solidFill>
+              <a:srgbClr val="E2E8F0"/>
+            </a:solidFill>
+            <a:prstDash val="solid"/>
+          </a:ln>
+        </p:spPr>
+      </p:sp>
+      <p:sp>
+        <p:nvSpPr>
+          <p:cNvPr id="31" name="Text 29"/>
+          <p:cNvSpPr/>
+          <p:nvPr/>
+        </p:nvSpPr>
+        <p:spPr>
+          <a:xfrm>
+            <a:off x="914400" y="4754880"/>
+            <a:ext cx="548640" cy="411480"/>
+          </a:xfrm>
+          <a:prstGeom prst="rect">
+            <a:avLst/>
+          </a:prstGeom>
+          <a:noFill/>
+          <a:ln/>
+        </p:spPr>
+        <p:txBody>
+          <a:bodyPr wrap="square" lIns="0" tIns="0" rIns="0" bIns="0" rtlCol="0" anchor="ctr"/>
+          <a:lstStyle/>
+          <a:p>
+            <a:pPr indent="0" marL="0">
+              <a:buNone/>
+            </a:pPr>
+            <a:r>
+              <a:rPr lang="en-US" sz="1800" b="1" dirty="0">
+                <a:solidFill>
+                  <a:srgbClr val="028090"/>
+                </a:solidFill>
+              </a:rPr>
+              <a:t>07</a:t>
+            </a:r>
+            <a:endParaRPr lang="en-US" sz="1800" dirty="0"/>
+          </a:p>
+        </p:txBody>
+      </p:sp>
+      <p:sp>
+        <p:nvSpPr>
+          <p:cNvPr id="32" name="Text 30"/>
+          <p:cNvSpPr/>
+          <p:nvPr/>
+        </p:nvSpPr>
+        <p:spPr>
+          <a:xfrm>
+            <a:off x="1554480" y="4754880"/>
+            <a:ext cx="2286000" cy="411480"/>
+          </a:xfrm>
+          <a:prstGeom prst="rect">
+            <a:avLst/>
+          </a:prstGeom>
+          <a:noFill/>
+          <a:ln/>
+        </p:spPr>
+        <p:txBody>
+          <a:bodyPr wrap="square" lIns="0" tIns="0" rIns="0" bIns="0" rtlCol="0" anchor="ctr"/>
+          <a:lstStyle/>
+          <a:p>
+            <a:pPr indent="0" marL="0">
+              <a:buNone/>
+            </a:pPr>
+            <a:r>
+              <a:rPr lang="en-US" sz="1500" b="1" dirty="0">
+                <a:solidFill>
+                  <a:srgbClr val="1E2761"/>
+                </a:solidFill>
+              </a:rPr>
+              <a:t>优先级排序</a:t>
+            </a:r>
+            <a:endParaRPr lang="en-US" sz="1500" dirty="0"/>
+          </a:p>
+        </p:txBody>
+      </p:sp>
+      <p:sp>
+        <p:nvSpPr>
+          <p:cNvPr id="33" name="Text 31"/>
+          <p:cNvSpPr/>
+          <p:nvPr/>
+        </p:nvSpPr>
+        <p:spPr>
+          <a:xfrm>
+            <a:off x="3931920" y="4754880"/>
+            <a:ext cx="3657600" cy="411480"/>
+          </a:xfrm>
+          <a:prstGeom prst="rect">
+            <a:avLst/>
+          </a:prstGeom>
+          <a:noFill/>
+          <a:ln/>
+        </p:spPr>
+        <p:txBody>
+          <a:bodyPr wrap="square" lIns="0" tIns="0" rIns="0" bIns="0" rtlCol="0" anchor="ctr"/>
+          <a:lstStyle/>
+          <a:p>
+            <a:pPr indent="0" marL="0">
+              <a:buNone/>
+            </a:pPr>
+            <a:r>
+              <a:rPr lang="en-US" sz="1300" dirty="0">
+                <a:solidFill>
+                  <a:srgbClr val="64748B"/>
+                </a:solidFill>
+              </a:rPr>
+              <a:t>从易到难，从快到慢</a:t>
+            </a:r>
+            <a:endParaRPr lang="en-US" sz="1300" dirty="0"/>
+          </a:p>
+        </p:txBody>
+      </p:sp>
+      <p:sp>
+        <p:nvSpPr>
+          <p:cNvPr id="34" name="Shape 32"/>
+          <p:cNvSpPr/>
+          <p:nvPr/>
+        </p:nvSpPr>
+        <p:spPr>
+          <a:xfrm>
+            <a:off x="1554480" y="5257800"/>
+            <a:ext cx="5943600" cy="0"/>
+          </a:xfrm>
+          <a:prstGeom prst="line">
+            <a:avLst/>
+          </a:prstGeom>
+          <a:noFill/>
+          <a:ln w="6350">
+            <a:solidFill>
+              <a:srgbClr val="E2E8F0"/>
+            </a:solidFill>
+            <a:prstDash val="solid"/>
+          </a:ln>
+        </p:spPr>
+      </p:sp>
+      <p:sp>
+        <p:nvSpPr>
+          <p:cNvPr id="35" name="Text 33"/>
+          <p:cNvSpPr/>
+          <p:nvPr/>
+        </p:nvSpPr>
+        <p:spPr>
+          <a:xfrm>
+            <a:off x="914400" y="5349240"/>
+            <a:ext cx="548640" cy="411480"/>
+          </a:xfrm>
+          <a:prstGeom prst="rect">
+            <a:avLst/>
+          </a:prstGeom>
+          <a:noFill/>
+          <a:ln/>
+        </p:spPr>
+        <p:txBody>
+          <a:bodyPr wrap="square" lIns="0" tIns="0" rIns="0" bIns="0" rtlCol="0" anchor="ctr"/>
+          <a:lstStyle/>
+          <a:p>
+            <a:pPr indent="0" marL="0">
+              <a:buNone/>
+            </a:pPr>
+            <a:r>
+              <a:rPr lang="en-US" sz="1800" b="1" dirty="0">
+                <a:solidFill>
+                  <a:srgbClr val="028090"/>
+                </a:solidFill>
+              </a:rPr>
+              <a:t>08</a:t>
+            </a:r>
+            <a:endParaRPr lang="en-US" sz="1800" dirty="0"/>
+          </a:p>
+        </p:txBody>
+      </p:sp>
+      <p:sp>
+        <p:nvSpPr>
+          <p:cNvPr id="36" name="Text 34"/>
+          <p:cNvSpPr/>
+          <p:nvPr/>
+        </p:nvSpPr>
+        <p:spPr>
+          <a:xfrm>
+            <a:off x="1554480" y="5349240"/>
+            <a:ext cx="2286000" cy="411480"/>
+          </a:xfrm>
+          <a:prstGeom prst="rect">
+            <a:avLst/>
+          </a:prstGeom>
+          <a:noFill/>
+          <a:ln/>
+        </p:spPr>
+        <p:txBody>
+          <a:bodyPr wrap="square" lIns="0" tIns="0" rIns="0" bIns="0" rtlCol="0" anchor="ctr"/>
+          <a:lstStyle/>
+          <a:p>
+            <a:pPr indent="0" marL="0">
+              <a:buNone/>
+            </a:pPr>
+            <a:r>
+              <a:rPr lang="en-US" sz="1500" b="1" dirty="0">
+                <a:solidFill>
+                  <a:srgbClr val="1E2761"/>
+                </a:solidFill>
+              </a:rPr>
+              <a:t>OpenCode优化指南</a:t>
+            </a:r>
+            <a:endParaRPr lang="en-US" sz="1500" dirty="0"/>
+          </a:p>
+        </p:txBody>
+      </p:sp>
+      <p:sp>
+        <p:nvSpPr>
+          <p:cNvPr id="37" name="Text 35"/>
+          <p:cNvSpPr/>
+          <p:nvPr/>
+        </p:nvSpPr>
+        <p:spPr>
+          <a:xfrm>
+            <a:off x="3931920" y="5349240"/>
+            <a:ext cx="3657600" cy="411480"/>
+          </a:xfrm>
+          <a:prstGeom prst="rect">
+            <a:avLst/>
+          </a:prstGeom>
+          <a:noFill/>
+          <a:ln/>
+        </p:spPr>
+        <p:txBody>
+          <a:bodyPr wrap="square" lIns="0" tIns="0" rIns="0" bIns="0" rtlCol="0" anchor="ctr"/>
+          <a:lstStyle/>
+          <a:p>
+            <a:pPr indent="0" marL="0">
+              <a:buNone/>
+            </a:pPr>
+            <a:r>
+              <a:rPr lang="en-US" sz="1300" dirty="0">
+                <a:solidFill>
+                  <a:srgbClr val="64748B"/>
+                </a:solidFill>
+              </a:rPr>
+              <a:t>提供商套利 + 多模型策略</a:t>
+            </a:r>
+            <a:endParaRPr lang="en-US" sz="1300" dirty="0"/>
+          </a:p>
+        </p:txBody>
+      </p:sp>
+      <p:sp>
+        <p:nvSpPr>
+          <p:cNvPr id="38" name="Shape 36"/>
+          <p:cNvSpPr/>
+          <p:nvPr/>
+        </p:nvSpPr>
+        <p:spPr>
+          <a:xfrm>
+            <a:off x="1554480" y="5852160"/>
+            <a:ext cx="5943600" cy="0"/>
+          </a:xfrm>
+          <a:prstGeom prst="line">
+            <a:avLst/>
+          </a:prstGeom>
+          <a:noFill/>
+          <a:ln w="6350">
+            <a:solidFill>
+              <a:srgbClr val="E2E8F0"/>
+            </a:solidFill>
+            <a:prstDash val="solid"/>
+          </a:ln>
+        </p:spPr>
+      </p:sp>
+      <p:sp>
+        <p:nvSpPr>
+          <p:cNvPr id="39" name="Text 37"/>
+          <p:cNvSpPr/>
+          <p:nvPr/>
+        </p:nvSpPr>
+        <p:spPr>
+          <a:xfrm>
+            <a:off x="914400" y="5943600"/>
+            <a:ext cx="548640" cy="411480"/>
+          </a:xfrm>
+          <a:prstGeom prst="rect">
+            <a:avLst/>
+          </a:prstGeom>
+          <a:noFill/>
+          <a:ln/>
+        </p:spPr>
+        <p:txBody>
+          <a:bodyPr wrap="square" lIns="0" tIns="0" rIns="0" bIns="0" rtlCol="0" anchor="ctr"/>
+          <a:lstStyle/>
+          <a:p>
+            <a:pPr indent="0" marL="0">
+              <a:buNone/>
+            </a:pPr>
+            <a:r>
+              <a:rPr lang="en-US" sz="1800" b="1" dirty="0">
+                <a:solidFill>
+                  <a:srgbClr val="028090"/>
+                </a:solidFill>
+              </a:rPr>
+              <a:t>09</a:t>
+            </a:r>
+            <a:endParaRPr lang="en-US" sz="1800" dirty="0"/>
+          </a:p>
+        </p:txBody>
+      </p:sp>
+      <p:sp>
+        <p:nvSpPr>
+          <p:cNvPr id="40" name="Text 38"/>
+          <p:cNvSpPr/>
+          <p:nvPr/>
+        </p:nvSpPr>
+        <p:spPr>
+          <a:xfrm>
+            <a:off x="1554480" y="5943600"/>
+            <a:ext cx="2286000" cy="411480"/>
+          </a:xfrm>
+          <a:prstGeom prst="rect">
+            <a:avLst/>
+          </a:prstGeom>
+          <a:noFill/>
+          <a:ln/>
+        </p:spPr>
+        <p:txBody>
+          <a:bodyPr wrap="square" lIns="0" tIns="0" rIns="0" bIns="0" rtlCol="0" anchor="ctr"/>
+          <a:lstStyle/>
+          <a:p>
+            <a:pPr indent="0" marL="0">
+              <a:buNone/>
+            </a:pPr>
+            <a:r>
+              <a:rPr lang="en-US" sz="1500" b="1" dirty="0">
+                <a:solidFill>
+                  <a:srgbClr val="1E2761"/>
+                </a:solidFill>
+              </a:rPr>
               <a:t>行动清单</a:t>
             </a:r>
             <a:endParaRPr lang="en-US" sz="1500" dirty="0"/>
@@ -5288,13 +8883,13 @@
       </p:sp>
       <p:sp>
         <p:nvSpPr>
-          <p:cNvPr id="29" name="Text 27"/>
-          <p:cNvSpPr/>
-          <p:nvPr/>
-        </p:nvSpPr>
-        <p:spPr>
-          <a:xfrm>
-            <a:off x="3931920" y="4160520"/>
+          <p:cNvPr id="41" name="Text 39"/>
+          <p:cNvSpPr/>
+          <p:nvPr/>
+        </p:nvSpPr>
+        <p:spPr>
+          <a:xfrm>
+            <a:off x="3931920" y="5943600"/>
             <a:ext cx="3657600" cy="411480"/>
           </a:xfrm>
           <a:prstGeom prst="rect">

--- a/Claude-Token优化最佳实践.pptx
+++ b/Claude-Token优化最佳实践.pptx
@@ -8387,7 +8387,7 @@
                   <a:srgbClr val="64748B"/>
                 </a:solidFill>
               </a:rPr>
-              <a:t>针对迁移项目的特殊策略</a:t>
+              <a:t>四大任务特征 × 针对性优化策略</a:t>
             </a:r>
             <a:endParaRPr lang="en-US" sz="1300" dirty="0"/>
           </a:p>
@@ -13932,7 +13932,7 @@
                 <a:ea typeface="Arial" pitchFamily="34" charset="-122"/>
                 <a:cs typeface="Arial" pitchFamily="34" charset="-120"/>
               </a:rPr>
-              <a:t>安卓转鸿蒙场景专项</a:t>
+              <a:t>安卓转鸿蒙专项 — 四大任务特征</a:t>
             </a:r>
             <a:endParaRPr lang="en-US" sz="2800" dirty="0"/>
           </a:p>
@@ -14035,198 +14035,14 @@
       </p:sp>
       <p:sp>
         <p:nvSpPr>
-          <p:cNvPr id="7" name="Text 5"/>
+          <p:cNvPr id="7" name="Shape 5"/>
           <p:cNvSpPr/>
           <p:nvPr/>
         </p:nvSpPr>
         <p:spPr>
           <a:xfrm>
             <a:off x="640080" y="1097280"/>
-            <a:ext cx="3657600" cy="365760"/>
-          </a:xfrm>
-          <a:prstGeom prst="rect">
-            <a:avLst/>
-          </a:prstGeom>
-          <a:noFill/>
-          <a:ln/>
-        </p:spPr>
-        <p:txBody>
-          <a:bodyPr wrap="square" lIns="0" tIns="0" rIns="0" bIns="0" rtlCol="0" anchor="ctr"/>
-          <a:lstStyle/>
-          <a:p>
-            <a:pPr indent="0" marL="0">
-              <a:buNone/>
-            </a:pPr>
-            <a:r>
-              <a:rPr lang="en-US" sz="1600" b="1" dirty="0">
-                <a:solidFill>
-                  <a:srgbClr val="1E2761"/>
-                </a:solidFill>
-              </a:rPr>
-              <a:t>独特挑战</a:t>
-            </a:r>
-            <a:endParaRPr lang="en-US" sz="1600" dirty="0"/>
-          </a:p>
-        </p:txBody>
-      </p:sp>
-      <p:sp>
-        <p:nvSpPr>
-          <p:cNvPr id="8" name="Text 6"/>
-          <p:cNvSpPr/>
-          <p:nvPr/>
-        </p:nvSpPr>
-        <p:spPr>
-          <a:xfrm>
-            <a:off x="640080" y="1554480"/>
-            <a:ext cx="4114800" cy="3200400"/>
-          </a:xfrm>
-          <a:prstGeom prst="rect">
-            <a:avLst/>
-          </a:prstGeom>
-          <a:noFill/>
-          <a:ln/>
-        </p:spPr>
-        <p:txBody>
-          <a:bodyPr wrap="square" rtlCol="0" anchor="t"/>
-          <a:lstStyle/>
-          <a:p>
-            <a:pPr marL="342900" indent="-342900">
-              <a:spcAft>
-                <a:spcPts val="400"/>
-              </a:spcAft>
-              <a:buSzPct val="100000"/>
-              <a:buChar char="•"/>
-            </a:pPr>
-            <a:r>
-              <a:rPr lang="en-US" sz="1100" dirty="0">
-                <a:solidFill>
-                  <a:srgbClr val="1E293B"/>
-                </a:solidFill>
-              </a:rPr>
-              <a:t>📁 双语言上下文: Kotlin原文 + ArkTS译文 = 2倍文件读取</a:t>
-            </a:r>
-            <a:endParaRPr lang="en-US" sz="1100" dirty="0"/>
-          </a:p>
-          <a:p>
-            <a:pPr marL="342900" indent="-342900">
-              <a:spcAft>
-                <a:spcPts val="400"/>
-              </a:spcAft>
-              <a:buSzPct val="100000"/>
-              <a:buChar char="•"/>
-            </a:pPr>
-            <a:r>
-              <a:rPr lang="en-US" sz="1100" dirty="0">
-                <a:solidFill>
-                  <a:srgbClr val="1E293B"/>
-                </a:solidFill>
-              </a:rPr>
-              <a:t>🔄 API映射查询: findViewById→@State, 每次需额外token</a:t>
-            </a:r>
-            <a:endParaRPr lang="en-US" sz="1100" dirty="0"/>
-          </a:p>
-          <a:p>
-            <a:pPr marL="342900" indent="-342900">
-              <a:spcAft>
-                <a:spcPts val="400"/>
-              </a:spcAft>
-              <a:buSzPct val="100000"/>
-              <a:buChar char="•"/>
-            </a:pPr>
-            <a:r>
-              <a:rPr lang="en-US" sz="1100" dirty="0">
-                <a:solidFill>
-                  <a:srgbClr val="1E293B"/>
-                </a:solidFill>
-              </a:rPr>
-              <a:t>📚 大量参考代码: 12+ Activity → 12+ Page需要原文对照</a:t>
-            </a:r>
-            <a:endParaRPr lang="en-US" sz="1100" dirty="0"/>
-          </a:p>
-          <a:p>
-            <a:pPr marL="342900" indent="-342900">
-              <a:spcAft>
-                <a:spcPts val="400"/>
-              </a:spcAft>
-              <a:buSzPct val="100000"/>
-              <a:buChar char="•"/>
-            </a:pPr>
-            <a:r>
-              <a:rPr lang="en-US" sz="1100" dirty="0">
-                <a:solidFill>
-                  <a:srgbClr val="1E293B"/>
-                </a:solidFill>
-              </a:rPr>
-              <a:t>🏗️ 架构差异: Android组件→鸿蒙组件, 持续需要解释</a:t>
-            </a:r>
-            <a:endParaRPr lang="en-US" sz="1100" dirty="0"/>
-          </a:p>
-          <a:p>
-            <a:pPr marL="342900" indent="-342900">
-              <a:spcAft>
-                <a:spcPts val="400"/>
-              </a:spcAft>
-              <a:buSzPct val="100000"/>
-              <a:buChar char="•"/>
-            </a:pPr>
-            <a:r>
-              <a:rPr lang="en-US" sz="1100" dirty="0">
-                <a:solidFill>
-                  <a:srgbClr val="1E293B"/>
-                </a:solidFill>
-              </a:rPr>
-              <a:t>🔧 反复迭代修改: UI调整/API替换→累积对话历史</a:t>
-            </a:r>
-            <a:endParaRPr lang="en-US" sz="1100" dirty="0"/>
-          </a:p>
-        </p:txBody>
-      </p:sp>
-      <p:sp>
-        <p:nvSpPr>
-          <p:cNvPr id="9" name="Text 7"/>
-          <p:cNvSpPr/>
-          <p:nvPr/>
-        </p:nvSpPr>
-        <p:spPr>
-          <a:xfrm>
-            <a:off x="5029200" y="1097280"/>
-            <a:ext cx="3657600" cy="365760"/>
-          </a:xfrm>
-          <a:prstGeom prst="rect">
-            <a:avLst/>
-          </a:prstGeom>
-          <a:noFill/>
-          <a:ln/>
-        </p:spPr>
-        <p:txBody>
-          <a:bodyPr wrap="square" lIns="0" tIns="0" rIns="0" bIns="0" rtlCol="0" anchor="ctr"/>
-          <a:lstStyle/>
-          <a:p>
-            <a:pPr indent="0" marL="0">
-              <a:buNone/>
-            </a:pPr>
-            <a:r>
-              <a:rPr lang="en-US" sz="1600" b="1" dirty="0">
-                <a:solidFill>
-                  <a:srgbClr val="1E2761"/>
-                </a:solidFill>
-              </a:rPr>
-              <a:t>优化策略</a:t>
-            </a:r>
-            <a:endParaRPr lang="en-US" sz="1600" dirty="0"/>
-          </a:p>
-        </p:txBody>
-      </p:sp>
-      <p:sp>
-        <p:nvSpPr>
-          <p:cNvPr id="10" name="Shape 8"/>
-          <p:cNvSpPr/>
-          <p:nvPr/>
-        </p:nvSpPr>
-        <p:spPr>
-          <a:xfrm>
-            <a:off x="5029200" y="1554480"/>
-            <a:ext cx="3474720" cy="777240"/>
+            <a:ext cx="3840480" cy="1371600"/>
           </a:xfrm>
           <a:prstGeom prst="rect">
             <a:avLst/>
@@ -14246,20 +14062,112 @@
       </p:sp>
       <p:sp>
         <p:nvSpPr>
+          <p:cNvPr id="8" name="Shape 6"/>
+          <p:cNvSpPr/>
+          <p:nvPr/>
+        </p:nvSpPr>
+        <p:spPr>
+          <a:xfrm>
+            <a:off x="640080" y="1097280"/>
+            <a:ext cx="54864" cy="1371600"/>
+          </a:xfrm>
+          <a:prstGeom prst="rect">
+            <a:avLst/>
+          </a:prstGeom>
+          <a:solidFill>
+            <a:srgbClr val="DC2626"/>
+          </a:solidFill>
+          <a:ln/>
+        </p:spPr>
+      </p:sp>
+      <p:sp>
+        <p:nvSpPr>
+          <p:cNvPr id="9" name="Text 7"/>
+          <p:cNvSpPr/>
+          <p:nvPr/>
+        </p:nvSpPr>
+        <p:spPr>
+          <a:xfrm>
+            <a:off x="822960" y="1170432"/>
+            <a:ext cx="3474720" cy="320040"/>
+          </a:xfrm>
+          <a:prstGeom prst="rect">
+            <a:avLst/>
+          </a:prstGeom>
+          <a:noFill/>
+          <a:ln/>
+        </p:spPr>
+        <p:txBody>
+          <a:bodyPr wrap="square" lIns="0" tIns="0" rIns="0" bIns="0" rtlCol="0" anchor="ctr"/>
+          <a:lstStyle/>
+          <a:p>
+            <a:pPr indent="0" marL="0">
+              <a:buNone/>
+            </a:pPr>
+            <a:r>
+              <a:rPr lang="en-US" sz="1100" b="1" dirty="0">
+                <a:solidFill>
+                  <a:srgbClr val="1E2761"/>
+                </a:solidFill>
+              </a:rPr>
+              <a:t>📖 读多写少 (Input 90% vs Output 10%)</a:t>
+            </a:r>
+            <a:endParaRPr lang="en-US" sz="1100" dirty="0"/>
+          </a:p>
+        </p:txBody>
+      </p:sp>
+      <p:sp>
+        <p:nvSpPr>
+          <p:cNvPr id="10" name="Text 8"/>
+          <p:cNvSpPr/>
+          <p:nvPr/>
+        </p:nvSpPr>
+        <p:spPr>
+          <a:xfrm>
+            <a:off x="822960" y="1508760"/>
+            <a:ext cx="3474720" cy="457200"/>
+          </a:xfrm>
+          <a:prstGeom prst="rect">
+            <a:avLst/>
+          </a:prstGeom>
+          <a:noFill/>
+          <a:ln/>
+        </p:spPr>
+        <p:txBody>
+          <a:bodyPr wrap="square" lIns="0" tIns="0" rIns="0" bIns="0" rtlCol="0" anchor="t"/>
+          <a:lstStyle/>
+          <a:p>
+            <a:pPr indent="0" marL="0">
+              <a:buNone/>
+            </a:pPr>
+            <a:r>
+              <a:rPr lang="en-US" sz="900" dirty="0">
+                <a:solidFill>
+                  <a:srgbClr val="64748B"/>
+                </a:solidFill>
+              </a:rPr>
+              <a:t>迁移需完整理解源文件逻辑(50K/r)&lt;br/&gt;但输出仅翻译后的代码(3K/r)</a:t>
+            </a:r>
+            <a:endParaRPr lang="en-US" sz="900" dirty="0"/>
+          </a:p>
+        </p:txBody>
+      </p:sp>
+      <p:sp>
+        <p:nvSpPr>
           <p:cNvPr id="11" name="Shape 9"/>
           <p:cNvSpPr/>
           <p:nvPr/>
         </p:nvSpPr>
         <p:spPr>
           <a:xfrm>
-            <a:off x="5029200" y="1554480"/>
-            <a:ext cx="54864" cy="777240"/>
+            <a:off x="822960" y="2057400"/>
+            <a:ext cx="3474720" cy="320040"/>
           </a:xfrm>
           <a:prstGeom prst="rect">
             <a:avLst/>
           </a:prstGeom>
           <a:solidFill>
-            <a:srgbClr val="028090"/>
+            <a:srgbClr val="DC2626"/>
           </a:solidFill>
           <a:ln/>
         </p:spPr>
@@ -14272,80 +14180,44 @@
         </p:nvSpPr>
         <p:spPr>
           <a:xfrm>
-            <a:off x="5212080" y="1645920"/>
-            <a:ext cx="3108960" cy="365760"/>
-          </a:xfrm>
-          <a:prstGeom prst="rect">
-            <a:avLst/>
-          </a:prstGeom>
-          <a:noFill/>
-          <a:ln/>
-        </p:spPr>
-        <p:txBody>
-          <a:bodyPr wrap="square" lIns="0" tIns="0" rIns="0" bIns="0" rtlCol="0" anchor="ctr"/>
-          <a:lstStyle/>
-          <a:p>
-            <a:pPr indent="0" marL="0">
-              <a:buNone/>
-            </a:pPr>
-            <a:r>
-              <a:rPr lang="en-US" sz="1300" b="1" dirty="0">
-                <a:solidFill>
-                  <a:srgbClr val="1E2761"/>
-                </a:solidFill>
-              </a:rPr>
-              <a:t>API映射表缓存</a:t>
-            </a:r>
-            <a:endParaRPr lang="en-US" sz="1300" dirty="0"/>
-          </a:p>
-        </p:txBody>
-      </p:sp>
-      <p:sp>
-        <p:nvSpPr>
-          <p:cNvPr id="13" name="Text 11"/>
-          <p:cNvSpPr/>
-          <p:nvPr/>
-        </p:nvSpPr>
-        <p:spPr>
-          <a:xfrm>
-            <a:off x="5212080" y="2011680"/>
-            <a:ext cx="3108960" cy="228600"/>
-          </a:xfrm>
-          <a:prstGeom prst="rect">
-            <a:avLst/>
-          </a:prstGeom>
-          <a:noFill/>
-          <a:ln/>
-        </p:spPr>
-        <p:txBody>
-          <a:bodyPr wrap="square" lIns="0" tIns="0" rIns="0" bIns="0" rtlCol="0" anchor="t"/>
-          <a:lstStyle/>
-          <a:p>
-            <a:pPr indent="0" marL="0">
-              <a:buNone/>
-            </a:pPr>
-            <a:r>
-              <a:rPr lang="en-US" sz="1100" dirty="0">
-                <a:solidFill>
-                  <a:srgbClr val="64748B"/>
-                </a:solidFill>
-              </a:rPr>
-              <a:t>CLAUDE.md内置映射表，启用Prompt Caching 省70%</a:t>
-            </a:r>
-            <a:endParaRPr lang="en-US" sz="1100" dirty="0"/>
-          </a:p>
-        </p:txBody>
-      </p:sp>
-      <p:sp>
-        <p:nvSpPr>
-          <p:cNvPr id="14" name="Shape 12"/>
-          <p:cNvSpPr/>
-          <p:nvPr/>
-        </p:nvSpPr>
-        <p:spPr>
-          <a:xfrm>
-            <a:off x="5029200" y="2468880"/>
-            <a:ext cx="3474720" cy="777240"/>
+            <a:off x="914400" y="2084832"/>
+            <a:ext cx="3291840" cy="274320"/>
+          </a:xfrm>
+          <a:prstGeom prst="rect">
+            <a:avLst/>
+          </a:prstGeom>
+          <a:noFill/>
+          <a:ln/>
+        </p:spPr>
+        <p:txBody>
+          <a:bodyPr wrap="square" lIns="0" tIns="0" rIns="0" bIns="0" rtlCol="0" anchor="ctr"/>
+          <a:lstStyle/>
+          <a:p>
+            <a:pPr indent="0" marL="0">
+              <a:buNone/>
+            </a:pPr>
+            <a:r>
+              <a:rPr lang="en-US" sz="900" b="1" dirty="0">
+                <a:solidFill>
+                  <a:srgbClr val="FFFFFF"/>
+                </a:solidFill>
+              </a:rPr>
+              <a:t>策略: 方法级引用 + /memory保存分析&lt;br/&gt;节省: 读token ↓60-80%</a:t>
+            </a:r>
+            <a:endParaRPr lang="en-US" sz="900" dirty="0"/>
+          </a:p>
+        </p:txBody>
+      </p:sp>
+      <p:sp>
+        <p:nvSpPr>
+          <p:cNvPr id="13" name="Shape 11"/>
+          <p:cNvSpPr/>
+          <p:nvPr/>
+        </p:nvSpPr>
+        <p:spPr>
+          <a:xfrm>
+            <a:off x="4754880" y="1097280"/>
+            <a:ext cx="3840480" cy="1371600"/>
           </a:xfrm>
           <a:prstGeom prst="rect">
             <a:avLst/>
@@ -14365,70 +14237,70 @@
       </p:sp>
       <p:sp>
         <p:nvSpPr>
-          <p:cNvPr id="15" name="Shape 13"/>
-          <p:cNvSpPr/>
-          <p:nvPr/>
-        </p:nvSpPr>
-        <p:spPr>
-          <a:xfrm>
-            <a:off x="5029200" y="2468880"/>
-            <a:ext cx="54864" cy="777240"/>
+          <p:cNvPr id="14" name="Shape 12"/>
+          <p:cNvSpPr/>
+          <p:nvPr/>
+        </p:nvSpPr>
+        <p:spPr>
+          <a:xfrm>
+            <a:off x="4754880" y="1097280"/>
+            <a:ext cx="54864" cy="1371600"/>
           </a:xfrm>
           <a:prstGeom prst="rect">
             <a:avLst/>
           </a:prstGeom>
           <a:solidFill>
-            <a:srgbClr val="00A896"/>
+            <a:srgbClr val="EA580C"/>
           </a:solidFill>
           <a:ln/>
         </p:spPr>
       </p:sp>
       <p:sp>
         <p:nvSpPr>
+          <p:cNvPr id="15" name="Text 13"/>
+          <p:cNvSpPr/>
+          <p:nvPr/>
+        </p:nvSpPr>
+        <p:spPr>
+          <a:xfrm>
+            <a:off x="4937760" y="1170432"/>
+            <a:ext cx="3474720" cy="320040"/>
+          </a:xfrm>
+          <a:prstGeom prst="rect">
+            <a:avLst/>
+          </a:prstGeom>
+          <a:noFill/>
+          <a:ln/>
+        </p:spPr>
+        <p:txBody>
+          <a:bodyPr wrap="square" lIns="0" tIns="0" rIns="0" bIns="0" rtlCol="0" anchor="ctr"/>
+          <a:lstStyle/>
+          <a:p>
+            <a:pPr indent="0" marL="0">
+              <a:buNone/>
+            </a:pPr>
+            <a:r>
+              <a:rPr lang="en-US" sz="1100" b="1" dirty="0">
+                <a:solidFill>
+                  <a:srgbClr val="1E2761"/>
+                </a:solidFill>
+              </a:rPr>
+              <a:t>🔄 对照翻译 (双文件上下文)</a:t>
+            </a:r>
+            <a:endParaRPr lang="en-US" sz="1100" dirty="0"/>
+          </a:p>
+        </p:txBody>
+      </p:sp>
+      <p:sp>
+        <p:nvSpPr>
           <p:cNvPr id="16" name="Text 14"/>
           <p:cNvSpPr/>
           <p:nvPr/>
         </p:nvSpPr>
         <p:spPr>
           <a:xfrm>
-            <a:off x="5212080" y="2560320"/>
-            <a:ext cx="3108960" cy="365760"/>
-          </a:xfrm>
-          <a:prstGeom prst="rect">
-            <a:avLst/>
-          </a:prstGeom>
-          <a:noFill/>
-          <a:ln/>
-        </p:spPr>
-        <p:txBody>
-          <a:bodyPr wrap="square" lIns="0" tIns="0" rIns="0" bIns="0" rtlCol="0" anchor="ctr"/>
-          <a:lstStyle/>
-          <a:p>
-            <a:pPr indent="0" marL="0">
-              <a:buNone/>
-            </a:pPr>
-            <a:r>
-              <a:rPr lang="en-US" sz="1300" b="1" dirty="0">
-                <a:solidFill>
-                  <a:srgbClr val="1E2761"/>
-                </a:solidFill>
-              </a:rPr>
-              <a:t>分模块迁移</a:t>
-            </a:r>
-            <a:endParaRPr lang="en-US" sz="1300" dirty="0"/>
-          </a:p>
-        </p:txBody>
-      </p:sp>
-      <p:sp>
-        <p:nvSpPr>
-          <p:cNvPr id="17" name="Text 15"/>
-          <p:cNvSpPr/>
-          <p:nvPr/>
-        </p:nvSpPr>
-        <p:spPr>
-          <a:xfrm>
-            <a:off x="5212080" y="2926080"/>
-            <a:ext cx="3108960" cy="228600"/>
+            <a:off x="4937760" y="1508760"/>
+            <a:ext cx="3474720" cy="457200"/>
           </a:xfrm>
           <a:prstGeom prst="rect">
             <a:avLst/>
@@ -14444,27 +14316,83 @@
               <a:buNone/>
             </a:pPr>
             <a:r>
-              <a:rPr lang="en-US" sz="1100" dirty="0">
+              <a:rPr lang="en-US" sz="900" dirty="0">
                 <a:solidFill>
                   <a:srgbClr val="64748B"/>
                 </a:solidFill>
               </a:rPr>
-              <a:t>1模块1会话，完成即compact 省80%</a:t>
-            </a:r>
-            <a:endParaRPr lang="en-US" sz="1100" dirty="0"/>
-          </a:p>
-        </p:txBody>
-      </p:sp>
-      <p:sp>
-        <p:nvSpPr>
-          <p:cNvPr id="18" name="Shape 16"/>
-          <p:cNvSpPr/>
-          <p:nvPr/>
-        </p:nvSpPr>
-        <p:spPr>
-          <a:xfrm>
-            <a:off x="5029200" y="3383280"/>
-            <a:ext cx="3474720" cy="777240"/>
+              <a:t>Kotlin原文 + ArkTS译文 = 2倍读取&lt;br/&gt;12个模块重复读取相同源文件</a:t>
+            </a:r>
+            <a:endParaRPr lang="en-US" sz="900" dirty="0"/>
+          </a:p>
+        </p:txBody>
+      </p:sp>
+      <p:sp>
+        <p:nvSpPr>
+          <p:cNvPr id="17" name="Shape 15"/>
+          <p:cNvSpPr/>
+          <p:nvPr/>
+        </p:nvSpPr>
+        <p:spPr>
+          <a:xfrm>
+            <a:off x="4937760" y="2057400"/>
+            <a:ext cx="3474720" cy="320040"/>
+          </a:xfrm>
+          <a:prstGeom prst="rect">
+            <a:avLst/>
+          </a:prstGeom>
+          <a:solidFill>
+            <a:srgbClr val="EA580C"/>
+          </a:solidFill>
+          <a:ln/>
+        </p:spPr>
+      </p:sp>
+      <p:sp>
+        <p:nvSpPr>
+          <p:cNvPr id="18" name="Text 16"/>
+          <p:cNvSpPr/>
+          <p:nvPr/>
+        </p:nvSpPr>
+        <p:spPr>
+          <a:xfrm>
+            <a:off x="5029200" y="2084832"/>
+            <a:ext cx="3291840" cy="274320"/>
+          </a:xfrm>
+          <a:prstGeom prst="rect">
+            <a:avLst/>
+          </a:prstGeom>
+          <a:noFill/>
+          <a:ln/>
+        </p:spPr>
+        <p:txBody>
+          <a:bodyPr wrap="square" lIns="0" tIns="0" rIns="0" bIns="0" rtlCol="0" anchor="ctr"/>
+          <a:lstStyle/>
+          <a:p>
+            <a:pPr indent="0" marL="0">
+              <a:buNone/>
+            </a:pPr>
+            <a:r>
+              <a:rPr lang="en-US" sz="900" b="1" dirty="0">
+                <a:solidFill>
+                  <a:srgbClr val="FFFFFF"/>
+                </a:solidFill>
+              </a:rPr>
+              <a:t>策略: Prompt Caching 缓存源文件&lt;br/&gt;节省: 跨模块读取 ↓87%</a:t>
+            </a:r>
+            <a:endParaRPr lang="en-US" sz="900" dirty="0"/>
+          </a:p>
+        </p:txBody>
+      </p:sp>
+      <p:sp>
+        <p:nvSpPr>
+          <p:cNvPr id="19" name="Shape 17"/>
+          <p:cNvSpPr/>
+          <p:nvPr/>
+        </p:nvSpPr>
+        <p:spPr>
+          <a:xfrm>
+            <a:off x="640080" y="2651760"/>
+            <a:ext cx="3840480" cy="1371600"/>
           </a:xfrm>
           <a:prstGeom prst="rect">
             <a:avLst/>
@@ -14484,70 +14412,70 @@
       </p:sp>
       <p:sp>
         <p:nvSpPr>
-          <p:cNvPr id="19" name="Shape 17"/>
-          <p:cNvSpPr/>
-          <p:nvPr/>
-        </p:nvSpPr>
-        <p:spPr>
-          <a:xfrm>
-            <a:off x="5029200" y="3383280"/>
-            <a:ext cx="54864" cy="777240"/>
+          <p:cNvPr id="20" name="Shape 18"/>
+          <p:cNvSpPr/>
+          <p:nvPr/>
+        </p:nvSpPr>
+        <p:spPr>
+          <a:xfrm>
+            <a:off x="640080" y="2651760"/>
+            <a:ext cx="54864" cy="1371600"/>
           </a:xfrm>
           <a:prstGeom prst="rect">
             <a:avLst/>
           </a:prstGeom>
           <a:solidFill>
-            <a:srgbClr val="059669"/>
+            <a:srgbClr val="D97706"/>
           </a:solidFill>
           <a:ln/>
         </p:spPr>
       </p:sp>
       <p:sp>
         <p:nvSpPr>
-          <p:cNvPr id="20" name="Text 18"/>
-          <p:cNvSpPr/>
-          <p:nvPr/>
-        </p:nvSpPr>
-        <p:spPr>
-          <a:xfrm>
-            <a:off x="5212080" y="3474720"/>
-            <a:ext cx="3108960" cy="365760"/>
-          </a:xfrm>
-          <a:prstGeom prst="rect">
-            <a:avLst/>
-          </a:prstGeom>
-          <a:noFill/>
-          <a:ln/>
-        </p:spPr>
-        <p:txBody>
-          <a:bodyPr wrap="square" lIns="0" tIns="0" rIns="0" bIns="0" rtlCol="0" anchor="ctr"/>
-          <a:lstStyle/>
-          <a:p>
-            <a:pPr indent="0" marL="0">
-              <a:buNone/>
-            </a:pPr>
-            <a:r>
-              <a:rPr lang="en-US" sz="1300" b="1" dirty="0">
+          <p:cNvPr id="21" name="Text 19"/>
+          <p:cNvSpPr/>
+          <p:nvPr/>
+        </p:nvSpPr>
+        <p:spPr>
+          <a:xfrm>
+            <a:off x="822960" y="2724912"/>
+            <a:ext cx="3474720" cy="320040"/>
+          </a:xfrm>
+          <a:prstGeom prst="rect">
+            <a:avLst/>
+          </a:prstGeom>
+          <a:noFill/>
+          <a:ln/>
+        </p:spPr>
+        <p:txBody>
+          <a:bodyPr wrap="square" lIns="0" tIns="0" rIns="0" bIns="0" rtlCol="0" anchor="ctr"/>
+          <a:lstStyle/>
+          <a:p>
+            <a:pPr indent="0" marL="0">
+              <a:buNone/>
+            </a:pPr>
+            <a:r>
+              <a:rPr lang="en-US" sz="1100" b="1" dirty="0">
                 <a:solidFill>
                   <a:srgbClr val="1E2761"/>
                 </a:solidFill>
               </a:rPr>
-              <a:t>DeepSeek主力</a:t>
-            </a:r>
-            <a:endParaRPr lang="en-US" sz="1300" dirty="0"/>
-          </a:p>
-        </p:txBody>
-      </p:sp>
-      <p:sp>
-        <p:nvSpPr>
-          <p:cNvPr id="21" name="Text 19"/>
-          <p:cNvSpPr/>
-          <p:nvPr/>
-        </p:nvSpPr>
-        <p:spPr>
-          <a:xfrm>
-            <a:off x="5212080" y="3840480"/>
-            <a:ext cx="3108960" cy="228600"/>
+              <a:t>🔁 增量迭代 (编译→修复循环)</a:t>
+            </a:r>
+            <a:endParaRPr lang="en-US" sz="1100" dirty="0"/>
+          </a:p>
+        </p:txBody>
+      </p:sp>
+      <p:sp>
+        <p:nvSpPr>
+          <p:cNvPr id="22" name="Text 20"/>
+          <p:cNvSpPr/>
+          <p:nvPr/>
+        </p:nvSpPr>
+        <p:spPr>
+          <a:xfrm>
+            <a:off x="822960" y="3063240"/>
+            <a:ext cx="3474720" cy="457200"/>
           </a:xfrm>
           <a:prstGeom prst="rect">
             <a:avLst/>
@@ -14563,12 +14491,151 @@
               <a:buNone/>
             </a:pPr>
             <a:r>
-              <a:rPr lang="en-US" sz="1100" dirty="0">
+              <a:rPr lang="en-US" sz="900" dirty="0">
                 <a:solidFill>
                   <a:srgbClr val="64748B"/>
                 </a:solidFill>
               </a:rPr>
-              <a:t>70%任务用DeepSeek V4 省60%总费</a:t>
+              <a:t>每模块20-30轮迭代,每次累积历史&lt;br/&gt;编译错误全文发送(浪费80%)</a:t>
+            </a:r>
+            <a:endParaRPr lang="en-US" sz="900" dirty="0"/>
+          </a:p>
+        </p:txBody>
+      </p:sp>
+      <p:sp>
+        <p:nvSpPr>
+          <p:cNvPr id="23" name="Shape 21"/>
+          <p:cNvSpPr/>
+          <p:nvPr/>
+        </p:nvSpPr>
+        <p:spPr>
+          <a:xfrm>
+            <a:off x="822960" y="3611880"/>
+            <a:ext cx="3474720" cy="320040"/>
+          </a:xfrm>
+          <a:prstGeom prst="rect">
+            <a:avLst/>
+          </a:prstGeom>
+          <a:solidFill>
+            <a:srgbClr val="D97706"/>
+          </a:solidFill>
+          <a:ln/>
+        </p:spPr>
+      </p:sp>
+      <p:sp>
+        <p:nvSpPr>
+          <p:cNvPr id="24" name="Text 22"/>
+          <p:cNvSpPr/>
+          <p:nvPr/>
+        </p:nvSpPr>
+        <p:spPr>
+          <a:xfrm>
+            <a:off x="914400" y="3639312"/>
+            <a:ext cx="3291840" cy="274320"/>
+          </a:xfrm>
+          <a:prstGeom prst="rect">
+            <a:avLst/>
+          </a:prstGeom>
+          <a:noFill/>
+          <a:ln/>
+        </p:spPr>
+        <p:txBody>
+          <a:bodyPr wrap="square" lIns="0" tIns="0" rIns="0" bIns="0" rtlCol="0" anchor="ctr"/>
+          <a:lstStyle/>
+          <a:p>
+            <a:pPr indent="0" marL="0">
+              <a:buNone/>
+            </a:pPr>
+            <a:r>
+              <a:rPr lang="en-US" sz="900" b="1" dirty="0">
+                <a:solidFill>
+                  <a:srgbClr val="FFFFFF"/>
+                </a:solidFill>
+              </a:rPr>
+              <a:t>策略: 错误批处理+DeepSeek修&lt;br/&gt;节省: 编译修复 ↓84%</a:t>
+            </a:r>
+            <a:endParaRPr lang="en-US" sz="900" dirty="0"/>
+          </a:p>
+        </p:txBody>
+      </p:sp>
+      <p:sp>
+        <p:nvSpPr>
+          <p:cNvPr id="25" name="Shape 23"/>
+          <p:cNvSpPr/>
+          <p:nvPr/>
+        </p:nvSpPr>
+        <p:spPr>
+          <a:xfrm>
+            <a:off x="4754880" y="2651760"/>
+            <a:ext cx="3840480" cy="1371600"/>
+          </a:xfrm>
+          <a:prstGeom prst="rect">
+            <a:avLst/>
+          </a:prstGeom>
+          <a:solidFill>
+            <a:srgbClr val="FFFFFF"/>
+          </a:solidFill>
+          <a:ln/>
+          <a:effectLst>
+            <a:outerShdw sx="100000" sy="100000" kx="0" ky="0" algn="bl" rotWithShape="0" blurRad="76200" dist="25400" dir="8100000">
+              <a:srgbClr val="000000">
+                <a:alpha val="12000"/>
+              </a:srgbClr>
+            </a:outerShdw>
+          </a:effectLst>
+        </p:spPr>
+      </p:sp>
+      <p:sp>
+        <p:nvSpPr>
+          <p:cNvPr id="26" name="Shape 24"/>
+          <p:cNvSpPr/>
+          <p:nvPr/>
+        </p:nvSpPr>
+        <p:spPr>
+          <a:xfrm>
+            <a:off x="4754880" y="2651760"/>
+            <a:ext cx="54864" cy="1371600"/>
+          </a:xfrm>
+          <a:prstGeom prst="rect">
+            <a:avLst/>
+          </a:prstGeom>
+          <a:solidFill>
+            <a:srgbClr val="028090"/>
+          </a:solidFill>
+          <a:ln/>
+        </p:spPr>
+      </p:sp>
+      <p:sp>
+        <p:nvSpPr>
+          <p:cNvPr id="27" name="Text 25"/>
+          <p:cNvSpPr/>
+          <p:nvPr/>
+        </p:nvSpPr>
+        <p:spPr>
+          <a:xfrm>
+            <a:off x="4937760" y="2724912"/>
+            <a:ext cx="3474720" cy="320040"/>
+          </a:xfrm>
+          <a:prstGeom prst="rect">
+            <a:avLst/>
+          </a:prstGeom>
+          <a:noFill/>
+          <a:ln/>
+        </p:spPr>
+        <p:txBody>
+          <a:bodyPr wrap="square" lIns="0" tIns="0" rIns="0" bIns="0" rtlCol="0" anchor="ctr"/>
+          <a:lstStyle/>
+          <a:p>
+            <a:pPr indent="0" marL="0">
+              <a:buNone/>
+            </a:pPr>
+            <a:r>
+              <a:rPr lang="en-US" sz="1100" b="1" dirty="0">
+                <a:solidFill>
+                  <a:srgbClr val="1E2761"/>
+                </a:solidFill>
+              </a:rPr>
+              <a:t>📋 API映射 (重复查询开销)</a:t>
             </a:r>
             <a:endParaRPr lang="en-US" sz="1100" dirty="0"/>
           </a:p>
@@ -14576,7 +14643,99 @@
       </p:sp>
       <p:sp>
         <p:nvSpPr>
-          <p:cNvPr id="22" name="Shape 20"/>
+          <p:cNvPr id="28" name="Text 26"/>
+          <p:cNvSpPr/>
+          <p:nvPr/>
+        </p:nvSpPr>
+        <p:spPr>
+          <a:xfrm>
+            <a:off x="4937760" y="3063240"/>
+            <a:ext cx="3474720" cy="457200"/>
+          </a:xfrm>
+          <a:prstGeom prst="rect">
+            <a:avLst/>
+          </a:prstGeom>
+          <a:noFill/>
+          <a:ln/>
+        </p:spPr>
+        <p:txBody>
+          <a:bodyPr wrap="square" lIns="0" tIns="0" rIns="0" bIns="0" rtlCol="0" anchor="t"/>
+          <a:lstStyle/>
+          <a:p>
+            <a:pPr indent="0" marL="0">
+              <a:buNone/>
+            </a:pPr>
+            <a:r>
+              <a:rPr lang="en-US" sz="900" dirty="0">
+                <a:solidFill>
+                  <a:srgbClr val="64748B"/>
+                </a:solidFill>
+              </a:rPr>
+              <a:t>12模块×5次API查询×1K/次&lt;br/&gt;= 60K token隐性浪费</a:t>
+            </a:r>
+            <a:endParaRPr lang="en-US" sz="900" dirty="0"/>
+          </a:p>
+        </p:txBody>
+      </p:sp>
+      <p:sp>
+        <p:nvSpPr>
+          <p:cNvPr id="29" name="Shape 27"/>
+          <p:cNvSpPr/>
+          <p:nvPr/>
+        </p:nvSpPr>
+        <p:spPr>
+          <a:xfrm>
+            <a:off x="4937760" y="3611880"/>
+            <a:ext cx="3474720" cy="320040"/>
+          </a:xfrm>
+          <a:prstGeom prst="rect">
+            <a:avLst/>
+          </a:prstGeom>
+          <a:solidFill>
+            <a:srgbClr val="028090"/>
+          </a:solidFill>
+          <a:ln/>
+        </p:spPr>
+      </p:sp>
+      <p:sp>
+        <p:nvSpPr>
+          <p:cNvPr id="30" name="Text 28"/>
+          <p:cNvSpPr/>
+          <p:nvPr/>
+        </p:nvSpPr>
+        <p:spPr>
+          <a:xfrm>
+            <a:off x="5029200" y="3639312"/>
+            <a:ext cx="3291840" cy="274320"/>
+          </a:xfrm>
+          <a:prstGeom prst="rect">
+            <a:avLst/>
+          </a:prstGeom>
+          <a:noFill/>
+          <a:ln/>
+        </p:spPr>
+        <p:txBody>
+          <a:bodyPr wrap="square" lIns="0" tIns="0" rIns="0" bIns="0" rtlCol="0" anchor="ctr"/>
+          <a:lstStyle/>
+          <a:p>
+            <a:pPr indent="0" marL="0">
+              <a:buNone/>
+            </a:pPr>
+            <a:r>
+              <a:rPr lang="en-US" sz="900" b="1" dirty="0">
+                <a:solidFill>
+                  <a:srgbClr val="FFFFFF"/>
+                </a:solidFill>
+              </a:rPr>
+              <a:t>策略: CLAUDE.md内置映射表+缓存&lt;br/&gt;节省: API查询 ↓94%</a:t>
+            </a:r>
+            <a:endParaRPr lang="en-US" sz="900" dirty="0"/>
+          </a:p>
+        </p:txBody>
+      </p:sp>
+      <p:sp>
+        <p:nvSpPr>
+          <p:cNvPr id="31" name="Shape 29"/>
           <p:cNvSpPr/>
           <p:nvPr/>
         </p:nvSpPr>
@@ -14596,7 +14755,7 @@
       </p:sp>
       <p:sp>
         <p:nvSpPr>
-          <p:cNvPr id="23" name="Text 21"/>
+          <p:cNvPr id="32" name="Text 30"/>
           <p:cNvSpPr/>
           <p:nvPr/>
         </p:nvSpPr>
@@ -14624,7 +14783,7 @@
                   <a:srgbClr val="FFFFFF"/>
                 </a:solidFill>
               </a:rPr>
-              <a:t>迁移项目(12模块):  未优化 $1,440(Opus) → 优化后 $22(混合)  =  节省 98.5%</a:t>
+              <a:t>12模块迁移: 未优化$1,440(纯Opus) → 混合模型+特征优化 $3.50 = 节省99.76%</a:t>
             </a:r>
             <a:endParaRPr lang="en-US" sz="1300" dirty="0"/>
           </a:p>

--- a/Claude-Token优化最佳实践.pptx
+++ b/Claude-Token优化最佳实践.pptx
@@ -19,9 +19,10 @@
     <p:sldId id="267" r:id="rId13"/>
     <p:sldId id="268" r:id="rId14"/>
     <p:sldId id="269" r:id="rId15"/>
+    <p:sldId id="270" r:id="rId16"/>
   </p:sldIdLst>
   <p:notesMasterIdLst>
-    <p:notesMasterId r:id="rId16"/>
+    <p:notesMasterId r:id="rId17"/>
   </p:notesMasterIdLst>
   <p:sldSz cx="9144000" cy="5143500"/>
   <p:notesSz cx="5143500" cy="9144000"/>
@@ -2161,6 +2162,94 @@
 </p:notes>
 </file>
 
+<file path=ppt/notesSlides/notesSlide15.xml><?xml version="1.0" encoding="utf-8"?>
+<p:notes xmlns:a="http://schemas.openxmlformats.org/drawingml/2006/main" xmlns:r="http://schemas.openxmlformats.org/officeDocument/2006/relationships" xmlns:p="http://schemas.openxmlformats.org/presentationml/2006/main">
+  <p:cSld>
+    <p:spTree>
+      <p:nvGrpSpPr>
+        <p:cNvPr id="1" name=""/>
+        <p:cNvGrpSpPr/>
+        <p:nvPr/>
+      </p:nvGrpSpPr>
+      <p:grpSpPr>
+        <a:xfrm>
+          <a:off x="0" y="0"/>
+          <a:ext cx="0" cy="0"/>
+          <a:chOff x="0" y="0"/>
+          <a:chExt cx="0" cy="0"/>
+        </a:xfrm>
+      </p:grpSpPr>
+      <p:sp>
+        <p:nvSpPr>
+          <p:cNvPr id="2" name="Slide Image Placeholder 1"/>
+          <p:cNvSpPr>
+            <a:spLocks noGrp="1" noRot="1" noChangeAspect="1"/>
+          </p:cNvSpPr>
+          <p:nvPr>
+            <p:ph type="sldImg"/>
+          </p:nvPr>
+        </p:nvSpPr>
+        <p:spPr/>
+      </p:sp>
+      <p:sp>
+        <p:nvSpPr>
+          <p:cNvPr id="3" name="Notes Placeholder 2"/>
+          <p:cNvSpPr>
+            <a:spLocks noGrp="1"/>
+          </p:cNvSpPr>
+          <p:nvPr>
+            <p:ph type="body" idx="1"/>
+          </p:nvPr>
+        </p:nvSpPr>
+        <p:spPr/>
+        <p:txBody>
+          <a:bodyPr/>
+          <a:lstStyle/>
+          <a:p>
+            <a:r>
+              <a:rPr lang="en-US" dirty="0"/>
+              <a:t/>
+            </a:r>
+            <a:endParaRPr lang="en-US" dirty="0"/>
+          </a:p>
+        </p:txBody>
+      </p:sp>
+      <p:sp>
+        <p:nvSpPr>
+          <p:cNvPr id="4" name="Slide Number Placeholder 3"/>
+          <p:cNvSpPr>
+            <a:spLocks noGrp="1"/>
+          </p:cNvSpPr>
+          <p:nvPr>
+            <p:ph type="sldNum" sz="quarter" idx="10"/>
+          </p:nvPr>
+        </p:nvSpPr>
+        <p:spPr/>
+        <p:txBody>
+          <a:bodyPr/>
+          <a:lstStyle/>
+          <a:p>
+            <a:fld id="{F7021451-1387-4CA6-816F-3879F97B5CBC}" type="slidenum">
+              <a:rPr lang="en-US"/>
+              <a:t>15</a:t>
+            </a:fld>
+            <a:endParaRPr lang="en-US"/>
+          </a:p>
+        </p:txBody>
+      </p:sp>
+    </p:spTree>
+    <p:extLst>
+      <p:ext uri="{BB962C8B-B14F-4D97-AF65-F5344CB8AC3E}">
+        <p14:creationId xmlns:p14="http://schemas.microsoft.com/office/powerpoint/2010/main" val="1024086991"/>
+      </p:ext>
+    </p:extLst>
+  </p:cSld>
+  <p:clrMapOvr>
+    <a:masterClrMapping/>
+  </p:clrMapOvr>
+</p:notes>
+</file>
+
 <file path=ppt/notesSlides/notesSlide2.xml><?xml version="1.0" encoding="utf-8"?>
 <p:notes xmlns:a="http://schemas.openxmlformats.org/drawingml/2006/main" xmlns:r="http://schemas.openxmlformats.org/officeDocument/2006/relationships" xmlns:p="http://schemas.openxmlformats.org/presentationml/2006/main">
   <p:cSld>
@@ -6440,7 +6529,7 @@
                 <a:ea typeface="Arial" pitchFamily="34" charset="-122"/>
                 <a:cs typeface="Arial" pitchFamily="34" charset="-120"/>
               </a:rPr>
-              <a:t>行动清单</a:t>
+              <a:t>Token监控与对比工具 — 度量才能优化</a:t>
             </a:r>
             <a:endParaRPr lang="en-US" sz="2800" dirty="0"/>
           </a:p>
@@ -6550,7 +6639,34 @@
         <p:spPr>
           <a:xfrm>
             <a:off x="640080" y="1097280"/>
-            <a:ext cx="1645920" cy="365760"/>
+            <a:ext cx="7863840" cy="731520"/>
+          </a:xfrm>
+          <a:prstGeom prst="rect">
+            <a:avLst/>
+          </a:prstGeom>
+          <a:solidFill>
+            <a:srgbClr val="FFFFFF"/>
+          </a:solidFill>
+          <a:ln/>
+          <a:effectLst>
+            <a:outerShdw sx="100000" sy="100000" kx="0" ky="0" algn="bl" rotWithShape="0" blurRad="76200" dist="25400" dir="8100000">
+              <a:srgbClr val="000000">
+                <a:alpha val="12000"/>
+              </a:srgbClr>
+            </a:outerShdw>
+          </a:effectLst>
+        </p:spPr>
+      </p:sp>
+      <p:sp>
+        <p:nvSpPr>
+          <p:cNvPr id="8" name="Shape 6"/>
+          <p:cNvSpPr/>
+          <p:nvPr/>
+        </p:nvSpPr>
+        <p:spPr>
+          <a:xfrm>
+            <a:off x="640080" y="1097280"/>
+            <a:ext cx="54864" cy="731520"/>
           </a:xfrm>
           <a:prstGeom prst="rect">
             <a:avLst/>
@@ -6563,50 +6679,14 @@
       </p:sp>
       <p:sp>
         <p:nvSpPr>
-          <p:cNvPr id="8" name="Text 6"/>
-          <p:cNvSpPr/>
-          <p:nvPr/>
-        </p:nvSpPr>
-        <p:spPr>
-          <a:xfrm>
-            <a:off x="640080" y="1115568"/>
-            <a:ext cx="1645920" cy="329184"/>
-          </a:xfrm>
-          <a:prstGeom prst="rect">
-            <a:avLst/>
-          </a:prstGeom>
-          <a:noFill/>
-          <a:ln/>
-        </p:spPr>
-        <p:txBody>
-          <a:bodyPr wrap="square" lIns="0" tIns="0" rIns="0" bIns="0" rtlCol="0" anchor="ctr"/>
-          <a:lstStyle/>
-          <a:p>
-            <a:pPr algn="ctr" indent="0" marL="0">
-              <a:buNone/>
-            </a:pPr>
-            <a:r>
-              <a:rPr lang="en-US" sz="1200" b="1" dirty="0">
-                <a:solidFill>
-                  <a:srgbClr val="FFFFFF"/>
-                </a:solidFill>
-              </a:rPr>
-              <a:t>今天 (10分钟)</a:t>
-            </a:r>
-            <a:endParaRPr lang="en-US" sz="1200" dirty="0"/>
-          </a:p>
-        </p:txBody>
-      </p:sp>
-      <p:sp>
-        <p:nvSpPr>
           <p:cNvPr id="9" name="Shape 7"/>
           <p:cNvSpPr/>
           <p:nvPr/>
         </p:nvSpPr>
         <p:spPr>
           <a:xfrm>
-            <a:off x="7589520" y="1097280"/>
-            <a:ext cx="914400" cy="365760"/>
+            <a:off x="822960" y="1188720"/>
+            <a:ext cx="1463040" cy="502920"/>
           </a:xfrm>
           <a:prstGeom prst="rect">
             <a:avLst/>
@@ -6625,29 +6705,29 @@
         </p:nvSpPr>
         <p:spPr>
           <a:xfrm>
-            <a:off x="6400800" y="1115568"/>
-            <a:ext cx="2103120" cy="329184"/>
-          </a:xfrm>
-          <a:prstGeom prst="rect">
-            <a:avLst/>
-          </a:prstGeom>
-          <a:noFill/>
-          <a:ln/>
-        </p:spPr>
-        <p:txBody>
-          <a:bodyPr wrap="square" lIns="0" tIns="0" rIns="0" bIns="0" rtlCol="0" anchor="ctr"/>
-          <a:lstStyle/>
-          <a:p>
-            <a:pPr algn="r" indent="0" marL="0">
+            <a:off x="822960" y="1234440"/>
+            <a:ext cx="1463040" cy="411480"/>
+          </a:xfrm>
+          <a:prstGeom prst="rect">
+            <a:avLst/>
+          </a:prstGeom>
+          <a:noFill/>
+          <a:ln/>
+        </p:spPr>
+        <p:txBody>
+          <a:bodyPr wrap="square" lIns="0" tIns="0" rIns="0" bIns="0" rtlCol="0" anchor="ctr"/>
+          <a:lstStyle/>
+          <a:p>
+            <a:pPr algn="ctr" indent="0" marL="0">
               <a:buNone/>
             </a:pPr>
             <a:r>
               <a:rPr lang="en-US" sz="1100" b="1" dirty="0">
                 <a:solidFill>
-                  <a:srgbClr val="059669"/>
-                </a:solidFill>
-              </a:rPr>
-              <a:t>→ 立即省 20%</a:t>
+                  <a:srgbClr val="FFFFFF"/>
+                </a:solidFill>
+              </a:rPr>
+              <a:t>🟢 即时查看</a:t>
             </a:r>
             <a:endParaRPr lang="en-US" sz="1100" dirty="0"/>
           </a:p>
@@ -6661,25 +6741,57 @@
         </p:nvSpPr>
         <p:spPr>
           <a:xfrm>
-            <a:off x="822960" y="1508760"/>
-            <a:ext cx="7315200" cy="822960"/>
-          </a:xfrm>
-          <a:prstGeom prst="rect">
-            <a:avLst/>
-          </a:prstGeom>
-          <a:noFill/>
-          <a:ln/>
-        </p:spPr>
-        <p:txBody>
-          <a:bodyPr wrap="square" rtlCol="0" anchor="t"/>
-          <a:lstStyle/>
-          <a:p>
-            <a:pPr marL="342900" indent="-342900">
-              <a:spcAft>
-                <a:spcPts val="200"/>
-              </a:spcAft>
-              <a:buSzPct val="100000"/>
-              <a:buChar char="•"/>
+            <a:off x="2468880" y="1234440"/>
+            <a:ext cx="1097280" cy="411480"/>
+          </a:xfrm>
+          <a:prstGeom prst="rect">
+            <a:avLst/>
+          </a:prstGeom>
+          <a:noFill/>
+          <a:ln/>
+        </p:spPr>
+        <p:txBody>
+          <a:bodyPr wrap="square" lIns="0" tIns="0" rIns="0" bIns="0" rtlCol="0" anchor="ctr"/>
+          <a:lstStyle/>
+          <a:p>
+            <a:pPr indent="0" marL="0">
+              <a:buNone/>
+            </a:pPr>
+            <a:r>
+              <a:rPr lang="en-US" sz="1000" dirty="0">
+                <a:solidFill>
+                  <a:srgbClr val="64748B"/>
+                </a:solidFill>
+              </a:rPr>
+              <a:t>10秒</a:t>
+            </a:r>
+            <a:endParaRPr lang="en-US" sz="1000" dirty="0"/>
+          </a:p>
+        </p:txBody>
+      </p:sp>
+      <p:sp>
+        <p:nvSpPr>
+          <p:cNvPr id="12" name="Text 10"/>
+          <p:cNvSpPr/>
+          <p:nvPr/>
+        </p:nvSpPr>
+        <p:spPr>
+          <a:xfrm>
+            <a:off x="3566160" y="1143000"/>
+            <a:ext cx="4754880" cy="640080"/>
+          </a:xfrm>
+          <a:prstGeom prst="rect">
+            <a:avLst/>
+          </a:prstGeom>
+          <a:noFill/>
+          <a:ln/>
+        </p:spPr>
+        <p:txBody>
+          <a:bodyPr wrap="square" lIns="0" tIns="0" rIns="0" bIns="0" rtlCol="0" anchor="ctr"/>
+          <a:lstStyle/>
+          <a:p>
+            <a:pPr indent="0" marL="0">
+              <a:buNone/>
             </a:pPr>
             <a:r>
               <a:rPr lang="en-US" sz="1100" dirty="0">
@@ -6687,17 +6799,174 @@
                   <a:srgbClr val="1E293B"/>
                 </a:solidFill>
               </a:rPr>
-              <a:t>export CLAUDE_CODE_ENABLE_THINKING=false</a:t>
+              <a:t>/tokens + /cost + opencode stats</a:t>
             </a:r>
             <a:endParaRPr lang="en-US" sz="1100" dirty="0"/>
           </a:p>
-          <a:p>
-            <a:pPr marL="342900" indent="-342900">
-              <a:spcAft>
-                <a:spcPts val="200"/>
-              </a:spcAft>
-              <a:buSzPct val="100000"/>
-              <a:buChar char="•"/>
+        </p:txBody>
+      </p:sp>
+      <p:sp>
+        <p:nvSpPr>
+          <p:cNvPr id="13" name="Shape 11"/>
+          <p:cNvSpPr/>
+          <p:nvPr/>
+        </p:nvSpPr>
+        <p:spPr>
+          <a:xfrm>
+            <a:off x="640080" y="1965960"/>
+            <a:ext cx="7863840" cy="731520"/>
+          </a:xfrm>
+          <a:prstGeom prst="rect">
+            <a:avLst/>
+          </a:prstGeom>
+          <a:solidFill>
+            <a:srgbClr val="FFFFFF"/>
+          </a:solidFill>
+          <a:ln/>
+          <a:effectLst>
+            <a:outerShdw sx="100000" sy="100000" kx="0" ky="0" algn="bl" rotWithShape="0" blurRad="76200" dist="25400" dir="8100000">
+              <a:srgbClr val="000000">
+                <a:alpha val="12000"/>
+              </a:srgbClr>
+            </a:outerShdw>
+          </a:effectLst>
+        </p:spPr>
+      </p:sp>
+      <p:sp>
+        <p:nvSpPr>
+          <p:cNvPr id="14" name="Shape 12"/>
+          <p:cNvSpPr/>
+          <p:nvPr/>
+        </p:nvSpPr>
+        <p:spPr>
+          <a:xfrm>
+            <a:off x="640080" y="1965960"/>
+            <a:ext cx="54864" cy="731520"/>
+          </a:xfrm>
+          <a:prstGeom prst="rect">
+            <a:avLst/>
+          </a:prstGeom>
+          <a:solidFill>
+            <a:srgbClr val="028090"/>
+          </a:solidFill>
+          <a:ln/>
+        </p:spPr>
+      </p:sp>
+      <p:sp>
+        <p:nvSpPr>
+          <p:cNvPr id="15" name="Shape 13"/>
+          <p:cNvSpPr/>
+          <p:nvPr/>
+        </p:nvSpPr>
+        <p:spPr>
+          <a:xfrm>
+            <a:off x="822960" y="2057400"/>
+            <a:ext cx="1463040" cy="502920"/>
+          </a:xfrm>
+          <a:prstGeom prst="rect">
+            <a:avLst/>
+          </a:prstGeom>
+          <a:solidFill>
+            <a:srgbClr val="028090"/>
+          </a:solidFill>
+          <a:ln/>
+        </p:spPr>
+      </p:sp>
+      <p:sp>
+        <p:nvSpPr>
+          <p:cNvPr id="16" name="Text 14"/>
+          <p:cNvSpPr/>
+          <p:nvPr/>
+        </p:nvSpPr>
+        <p:spPr>
+          <a:xfrm>
+            <a:off x="822960" y="2103120"/>
+            <a:ext cx="1463040" cy="411480"/>
+          </a:xfrm>
+          <a:prstGeom prst="rect">
+            <a:avLst/>
+          </a:prstGeom>
+          <a:noFill/>
+          <a:ln/>
+        </p:spPr>
+        <p:txBody>
+          <a:bodyPr wrap="square" lIns="0" tIns="0" rIns="0" bIns="0" rtlCol="0" anchor="ctr"/>
+          <a:lstStyle/>
+          <a:p>
+            <a:pPr algn="ctr" indent="0" marL="0">
+              <a:buNone/>
+            </a:pPr>
+            <a:r>
+              <a:rPr lang="en-US" sz="1100" b="1" dirty="0">
+                <a:solidFill>
+                  <a:srgbClr val="FFFFFF"/>
+                </a:solidFill>
+              </a:rPr>
+              <a:t>🟡 会话分析</a:t>
+            </a:r>
+            <a:endParaRPr lang="en-US" sz="1100" dirty="0"/>
+          </a:p>
+        </p:txBody>
+      </p:sp>
+      <p:sp>
+        <p:nvSpPr>
+          <p:cNvPr id="17" name="Text 15"/>
+          <p:cNvSpPr/>
+          <p:nvPr/>
+        </p:nvSpPr>
+        <p:spPr>
+          <a:xfrm>
+            <a:off x="2468880" y="2103120"/>
+            <a:ext cx="1097280" cy="411480"/>
+          </a:xfrm>
+          <a:prstGeom prst="rect">
+            <a:avLst/>
+          </a:prstGeom>
+          <a:noFill/>
+          <a:ln/>
+        </p:spPr>
+        <p:txBody>
+          <a:bodyPr wrap="square" lIns="0" tIns="0" rIns="0" bIns="0" rtlCol="0" anchor="ctr"/>
+          <a:lstStyle/>
+          <a:p>
+            <a:pPr indent="0" marL="0">
+              <a:buNone/>
+            </a:pPr>
+            <a:r>
+              <a:rPr lang="en-US" sz="1000" dirty="0">
+                <a:solidFill>
+                  <a:srgbClr val="64748B"/>
+                </a:solidFill>
+              </a:rPr>
+              <a:t>5分钟</a:t>
+            </a:r>
+            <a:endParaRPr lang="en-US" sz="1000" dirty="0"/>
+          </a:p>
+        </p:txBody>
+      </p:sp>
+      <p:sp>
+        <p:nvSpPr>
+          <p:cNvPr id="18" name="Text 16"/>
+          <p:cNvSpPr/>
+          <p:nvPr/>
+        </p:nvSpPr>
+        <p:spPr>
+          <a:xfrm>
+            <a:off x="3566160" y="2011680"/>
+            <a:ext cx="4754880" cy="640080"/>
+          </a:xfrm>
+          <a:prstGeom prst="rect">
+            <a:avLst/>
+          </a:prstGeom>
+          <a:noFill/>
+          <a:ln/>
+        </p:spPr>
+        <p:txBody>
+          <a:bodyPr wrap="square" lIns="0" tIns="0" rIns="0" bIns="0" rtlCol="0" anchor="ctr"/>
+          <a:lstStyle/>
+          <a:p>
+            <a:pPr indent="0" marL="0">
+              <a:buNone/>
             </a:pPr>
             <a:r>
               <a:rPr lang="en-US" sz="1100" dirty="0">
@@ -6705,40 +6974,49 @@
                   <a:srgbClr val="1E293B"/>
                 </a:solidFill>
               </a:rPr>
-              <a:t>export CLAUDE_CODE_AUTO_COMPACT=true</a:t>
+              <a:t>cc-cost 费用拆解 + ttok 预估 + usage.json 分析</a:t>
             </a:r>
             <a:endParaRPr lang="en-US" sz="1100" dirty="0"/>
           </a:p>
-          <a:p>
-            <a:pPr marL="342900" indent="-342900">
-              <a:spcAft>
-                <a:spcPts val="200"/>
-              </a:spcAft>
-              <a:buSzPct val="100000"/>
-              <a:buChar char="•"/>
-            </a:pPr>
-            <a:r>
-              <a:rPr lang="en-US" sz="1100" dirty="0">
-                <a:solidFill>
-                  <a:srgbClr val="1E293B"/>
-                </a:solidFill>
-              </a:rPr>
-              <a:t>export CLAUDE_CODE_MAX_TOKENS=4096</a:t>
-            </a:r>
-            <a:endParaRPr lang="en-US" sz="1100" dirty="0"/>
-          </a:p>
-        </p:txBody>
-      </p:sp>
-      <p:sp>
-        <p:nvSpPr>
-          <p:cNvPr id="12" name="Shape 10"/>
-          <p:cNvSpPr/>
-          <p:nvPr/>
-        </p:nvSpPr>
-        <p:spPr>
-          <a:xfrm>
-            <a:off x="640080" y="2377440"/>
-            <a:ext cx="1645920" cy="365760"/>
+        </p:txBody>
+      </p:sp>
+      <p:sp>
+        <p:nvSpPr>
+          <p:cNvPr id="19" name="Shape 17"/>
+          <p:cNvSpPr/>
+          <p:nvPr/>
+        </p:nvSpPr>
+        <p:spPr>
+          <a:xfrm>
+            <a:off x="640080" y="2834640"/>
+            <a:ext cx="7863840" cy="731520"/>
+          </a:xfrm>
+          <a:prstGeom prst="rect">
+            <a:avLst/>
+          </a:prstGeom>
+          <a:solidFill>
+            <a:srgbClr val="FFFFFF"/>
+          </a:solidFill>
+          <a:ln/>
+          <a:effectLst>
+            <a:outerShdw sx="100000" sy="100000" kx="0" ky="0" algn="bl" rotWithShape="0" blurRad="76200" dist="25400" dir="8100000">
+              <a:srgbClr val="000000">
+                <a:alpha val="12000"/>
+              </a:srgbClr>
+            </a:outerShdw>
+          </a:effectLst>
+        </p:spPr>
+      </p:sp>
+      <p:sp>
+        <p:nvSpPr>
+          <p:cNvPr id="20" name="Shape 18"/>
+          <p:cNvSpPr/>
+          <p:nvPr/>
+        </p:nvSpPr>
+        <p:spPr>
+          <a:xfrm>
+            <a:off x="640080" y="2834640"/>
+            <a:ext cx="54864" cy="731520"/>
           </a:xfrm>
           <a:prstGeom prst="rect">
             <a:avLst/>
@@ -6751,50 +7029,14 @@
       </p:sp>
       <p:sp>
         <p:nvSpPr>
-          <p:cNvPr id="13" name="Text 11"/>
-          <p:cNvSpPr/>
-          <p:nvPr/>
-        </p:nvSpPr>
-        <p:spPr>
-          <a:xfrm>
-            <a:off x="640080" y="2395728"/>
-            <a:ext cx="1645920" cy="329184"/>
-          </a:xfrm>
-          <a:prstGeom prst="rect">
-            <a:avLst/>
-          </a:prstGeom>
-          <a:noFill/>
-          <a:ln/>
-        </p:spPr>
-        <p:txBody>
-          <a:bodyPr wrap="square" lIns="0" tIns="0" rIns="0" bIns="0" rtlCol="0" anchor="ctr"/>
-          <a:lstStyle/>
-          <a:p>
-            <a:pPr algn="ctr" indent="0" marL="0">
-              <a:buNone/>
-            </a:pPr>
-            <a:r>
-              <a:rPr lang="en-US" sz="1200" b="1" dirty="0">
-                <a:solidFill>
-                  <a:srgbClr val="FFFFFF"/>
-                </a:solidFill>
-              </a:rPr>
-              <a:t>本周 (40分钟)</a:t>
-            </a:r>
-            <a:endParaRPr lang="en-US" sz="1200" dirty="0"/>
-          </a:p>
-        </p:txBody>
-      </p:sp>
-      <p:sp>
-        <p:nvSpPr>
-          <p:cNvPr id="14" name="Shape 12"/>
-          <p:cNvSpPr/>
-          <p:nvPr/>
-        </p:nvSpPr>
-        <p:spPr>
-          <a:xfrm>
-            <a:off x="7589520" y="2377440"/>
-            <a:ext cx="914400" cy="365760"/>
+          <p:cNvPr id="21" name="Shape 19"/>
+          <p:cNvSpPr/>
+          <p:nvPr/>
+        </p:nvSpPr>
+        <p:spPr>
+          <a:xfrm>
+            <a:off x="822960" y="2926080"/>
+            <a:ext cx="1463040" cy="502920"/>
           </a:xfrm>
           <a:prstGeom prst="rect">
             <a:avLst/>
@@ -6807,35 +7049,35 @@
       </p:sp>
       <p:sp>
         <p:nvSpPr>
-          <p:cNvPr id="15" name="Text 13"/>
-          <p:cNvSpPr/>
-          <p:nvPr/>
-        </p:nvSpPr>
-        <p:spPr>
-          <a:xfrm>
-            <a:off x="6400800" y="2395728"/>
-            <a:ext cx="2103120" cy="329184"/>
-          </a:xfrm>
-          <a:prstGeom prst="rect">
-            <a:avLst/>
-          </a:prstGeom>
-          <a:noFill/>
-          <a:ln/>
-        </p:spPr>
-        <p:txBody>
-          <a:bodyPr wrap="square" lIns="0" tIns="0" rIns="0" bIns="0" rtlCol="0" anchor="ctr"/>
-          <a:lstStyle/>
-          <a:p>
-            <a:pPr algn="r" indent="0" marL="0">
+          <p:cNvPr id="22" name="Text 20"/>
+          <p:cNvSpPr/>
+          <p:nvPr/>
+        </p:nvSpPr>
+        <p:spPr>
+          <a:xfrm>
+            <a:off x="822960" y="2971800"/>
+            <a:ext cx="1463040" cy="411480"/>
+          </a:xfrm>
+          <a:prstGeom prst="rect">
+            <a:avLst/>
+          </a:prstGeom>
+          <a:noFill/>
+          <a:ln/>
+        </p:spPr>
+        <p:txBody>
+          <a:bodyPr wrap="square" lIns="0" tIns="0" rIns="0" bIns="0" rtlCol="0" anchor="ctr"/>
+          <a:lstStyle/>
+          <a:p>
+            <a:pPr algn="ctr" indent="0" marL="0">
               <a:buNone/>
             </a:pPr>
             <a:r>
               <a:rPr lang="en-US" sz="1100" b="1" dirty="0">
                 <a:solidFill>
-                  <a:srgbClr val="D97706"/>
-                </a:solidFill>
-              </a:rPr>
-              <a:t>→ 累计省 42%</a:t>
+                  <a:srgbClr val="FFFFFF"/>
+                </a:solidFill>
+              </a:rPr>
+              <a:t>🟠 持续监控</a:t>
             </a:r>
             <a:endParaRPr lang="en-US" sz="1100" dirty="0"/>
           </a:p>
@@ -6843,31 +7085,63 @@
       </p:sp>
       <p:sp>
         <p:nvSpPr>
-          <p:cNvPr id="16" name="Text 14"/>
-          <p:cNvSpPr/>
-          <p:nvPr/>
-        </p:nvSpPr>
-        <p:spPr>
-          <a:xfrm>
-            <a:off x="822960" y="2788920"/>
-            <a:ext cx="7315200" cy="822960"/>
-          </a:xfrm>
-          <a:prstGeom prst="rect">
-            <a:avLst/>
-          </a:prstGeom>
-          <a:noFill/>
-          <a:ln/>
-        </p:spPr>
-        <p:txBody>
-          <a:bodyPr wrap="square" rtlCol="0" anchor="t"/>
-          <a:lstStyle/>
-          <a:p>
-            <a:pPr marL="342900" indent="-342900">
-              <a:spcAft>
-                <a:spcPts val="200"/>
-              </a:spcAft>
-              <a:buSzPct val="100000"/>
-              <a:buChar char="•"/>
+          <p:cNvPr id="23" name="Text 21"/>
+          <p:cNvSpPr/>
+          <p:nvPr/>
+        </p:nvSpPr>
+        <p:spPr>
+          <a:xfrm>
+            <a:off x="2468880" y="2971800"/>
+            <a:ext cx="1097280" cy="411480"/>
+          </a:xfrm>
+          <a:prstGeom prst="rect">
+            <a:avLst/>
+          </a:prstGeom>
+          <a:noFill/>
+          <a:ln/>
+        </p:spPr>
+        <p:txBody>
+          <a:bodyPr wrap="square" lIns="0" tIns="0" rIns="0" bIns="0" rtlCol="0" anchor="ctr"/>
+          <a:lstStyle/>
+          <a:p>
+            <a:pPr indent="0" marL="0">
+              <a:buNone/>
+            </a:pPr>
+            <a:r>
+              <a:rPr lang="en-US" sz="1000" dirty="0">
+                <a:solidFill>
+                  <a:srgbClr val="64748B"/>
+                </a:solidFill>
+              </a:rPr>
+              <a:t>30分钟部署</a:t>
+            </a:r>
+            <a:endParaRPr lang="en-US" sz="1000" dirty="0"/>
+          </a:p>
+        </p:txBody>
+      </p:sp>
+      <p:sp>
+        <p:nvSpPr>
+          <p:cNvPr id="24" name="Text 22"/>
+          <p:cNvSpPr/>
+          <p:nvPr/>
+        </p:nvSpPr>
+        <p:spPr>
+          <a:xfrm>
+            <a:off x="3566160" y="2880360"/>
+            <a:ext cx="4754880" cy="640080"/>
+          </a:xfrm>
+          <a:prstGeom prst="rect">
+            <a:avLst/>
+          </a:prstGeom>
+          <a:noFill/>
+          <a:ln/>
+        </p:spPr>
+        <p:txBody>
+          <a:bodyPr wrap="square" lIns="0" tIns="0" rIns="0" bIns="0" rtlCol="0" anchor="ctr"/>
+          <a:lstStyle/>
+          <a:p>
+            <a:pPr indent="0" marL="0">
+              <a:buNone/>
             </a:pPr>
             <a:r>
               <a:rPr lang="en-US" sz="1100" dirty="0">
@@ -6875,17 +7149,174 @@
                   <a:srgbClr val="1E293B"/>
                 </a:solidFill>
               </a:rPr>
-              <a:t>创建 .claudeignore 排除 build/oh_modules/</a:t>
+              <a:t>Langfuse 仪表盘 + LiteLLM Proxy 网关</a:t>
             </a:r>
             <a:endParaRPr lang="en-US" sz="1100" dirty="0"/>
           </a:p>
-          <a:p>
-            <a:pPr marL="342900" indent="-342900">
-              <a:spcAft>
-                <a:spcPts val="200"/>
-              </a:spcAft>
-              <a:buSzPct val="100000"/>
-              <a:buChar char="•"/>
+        </p:txBody>
+      </p:sp>
+      <p:sp>
+        <p:nvSpPr>
+          <p:cNvPr id="25" name="Shape 23"/>
+          <p:cNvSpPr/>
+          <p:nvPr/>
+        </p:nvSpPr>
+        <p:spPr>
+          <a:xfrm>
+            <a:off x="640080" y="3703320"/>
+            <a:ext cx="7863840" cy="731520"/>
+          </a:xfrm>
+          <a:prstGeom prst="rect">
+            <a:avLst/>
+          </a:prstGeom>
+          <a:solidFill>
+            <a:srgbClr val="FFFFFF"/>
+          </a:solidFill>
+          <a:ln/>
+          <a:effectLst>
+            <a:outerShdw sx="100000" sy="100000" kx="0" ky="0" algn="bl" rotWithShape="0" blurRad="76200" dist="25400" dir="8100000">
+              <a:srgbClr val="000000">
+                <a:alpha val="12000"/>
+              </a:srgbClr>
+            </a:outerShdw>
+          </a:effectLst>
+        </p:spPr>
+      </p:sp>
+      <p:sp>
+        <p:nvSpPr>
+          <p:cNvPr id="26" name="Shape 24"/>
+          <p:cNvSpPr/>
+          <p:nvPr/>
+        </p:nvSpPr>
+        <p:spPr>
+          <a:xfrm>
+            <a:off x="640080" y="3703320"/>
+            <a:ext cx="54864" cy="731520"/>
+          </a:xfrm>
+          <a:prstGeom prst="rect">
+            <a:avLst/>
+          </a:prstGeom>
+          <a:solidFill>
+            <a:srgbClr val="DC2626"/>
+          </a:solidFill>
+          <a:ln/>
+        </p:spPr>
+      </p:sp>
+      <p:sp>
+        <p:nvSpPr>
+          <p:cNvPr id="27" name="Shape 25"/>
+          <p:cNvSpPr/>
+          <p:nvPr/>
+        </p:nvSpPr>
+        <p:spPr>
+          <a:xfrm>
+            <a:off x="822960" y="3794760"/>
+            <a:ext cx="1463040" cy="502920"/>
+          </a:xfrm>
+          <a:prstGeom prst="rect">
+            <a:avLst/>
+          </a:prstGeom>
+          <a:solidFill>
+            <a:srgbClr val="DC2626"/>
+          </a:solidFill>
+          <a:ln/>
+        </p:spPr>
+      </p:sp>
+      <p:sp>
+        <p:nvSpPr>
+          <p:cNvPr id="28" name="Text 26"/>
+          <p:cNvSpPr/>
+          <p:nvPr/>
+        </p:nvSpPr>
+        <p:spPr>
+          <a:xfrm>
+            <a:off x="822960" y="3840480"/>
+            <a:ext cx="1463040" cy="411480"/>
+          </a:xfrm>
+          <a:prstGeom prst="rect">
+            <a:avLst/>
+          </a:prstGeom>
+          <a:noFill/>
+          <a:ln/>
+        </p:spPr>
+        <p:txBody>
+          <a:bodyPr wrap="square" lIns="0" tIns="0" rIns="0" bIns="0" rtlCol="0" anchor="ctr"/>
+          <a:lstStyle/>
+          <a:p>
+            <a:pPr algn="ctr" indent="0" marL="0">
+              <a:buNone/>
+            </a:pPr>
+            <a:r>
+              <a:rPr lang="en-US" sz="1100" b="1" dirty="0">
+                <a:solidFill>
+                  <a:srgbClr val="FFFFFF"/>
+                </a:solidFill>
+              </a:rPr>
+              <a:t>🔴 A/B对比</a:t>
+            </a:r>
+            <a:endParaRPr lang="en-US" sz="1100" dirty="0"/>
+          </a:p>
+        </p:txBody>
+      </p:sp>
+      <p:sp>
+        <p:nvSpPr>
+          <p:cNvPr id="29" name="Text 27"/>
+          <p:cNvSpPr/>
+          <p:nvPr/>
+        </p:nvSpPr>
+        <p:spPr>
+          <a:xfrm>
+            <a:off x="2468880" y="3840480"/>
+            <a:ext cx="1097280" cy="411480"/>
+          </a:xfrm>
+          <a:prstGeom prst="rect">
+            <a:avLst/>
+          </a:prstGeom>
+          <a:noFill/>
+          <a:ln/>
+        </p:spPr>
+        <p:txBody>
+          <a:bodyPr wrap="square" lIns="0" tIns="0" rIns="0" bIns="0" rtlCol="0" anchor="ctr"/>
+          <a:lstStyle/>
+          <a:p>
+            <a:pPr indent="0" marL="0">
+              <a:buNone/>
+            </a:pPr>
+            <a:r>
+              <a:rPr lang="en-US" sz="1000" dirty="0">
+                <a:solidFill>
+                  <a:srgbClr val="64748B"/>
+                </a:solidFill>
+              </a:rPr>
+              <a:t>1小时搭建</a:t>
+            </a:r>
+            <a:endParaRPr lang="en-US" sz="1000" dirty="0"/>
+          </a:p>
+        </p:txBody>
+      </p:sp>
+      <p:sp>
+        <p:nvSpPr>
+          <p:cNvPr id="30" name="Text 28"/>
+          <p:cNvSpPr/>
+          <p:nvPr/>
+        </p:nvSpPr>
+        <p:spPr>
+          <a:xfrm>
+            <a:off x="3566160" y="3749040"/>
+            <a:ext cx="4754880" cy="640080"/>
+          </a:xfrm>
+          <a:prstGeom prst="rect">
+            <a:avLst/>
+          </a:prstGeom>
+          <a:noFill/>
+          <a:ln/>
+        </p:spPr>
+        <p:txBody>
+          <a:bodyPr wrap="square" lIns="0" tIns="0" rIns="0" bIns="0" rtlCol="0" anchor="ctr"/>
+          <a:lstStyle/>
+          <a:p>
+            <a:pPr indent="0" marL="0">
+              <a:buNone/>
             </a:pPr>
             <a:r>
               <a:rPr lang="en-US" sz="1100" dirty="0">
@@ -6893,60 +7324,42 @@
                   <a:srgbClr val="1E293B"/>
                 </a:solidFill>
               </a:rPr>
-              <a:t>精简 CLAUDE.md 至 &lt;1,500 tokens</a:t>
+              <a:t>自定义回放脚本 + tokencost 基准测试</a:t>
             </a:r>
             <a:endParaRPr lang="en-US" sz="1100" dirty="0"/>
           </a:p>
-          <a:p>
-            <a:pPr marL="342900" indent="-342900">
-              <a:spcAft>
-                <a:spcPts val="200"/>
-              </a:spcAft>
-              <a:buSzPct val="100000"/>
-              <a:buChar char="•"/>
-            </a:pPr>
-            <a:r>
-              <a:rPr lang="en-US" sz="1100" dirty="0">
-                <a:solidFill>
-                  <a:srgbClr val="1E293B"/>
-                </a:solidFill>
-              </a:rPr>
-              <a:t>安装 DeepSeek V4 模型配置</a:t>
-            </a:r>
-            <a:endParaRPr lang="en-US" sz="1100" dirty="0"/>
-          </a:p>
-        </p:txBody>
-      </p:sp>
-      <p:sp>
-        <p:nvSpPr>
-          <p:cNvPr id="17" name="Shape 15"/>
-          <p:cNvSpPr/>
-          <p:nvPr/>
-        </p:nvSpPr>
-        <p:spPr>
-          <a:xfrm>
-            <a:off x="640080" y="3657600"/>
-            <a:ext cx="1645920" cy="365760"/>
+        </p:txBody>
+      </p:sp>
+      <p:sp>
+        <p:nvSpPr>
+          <p:cNvPr id="31" name="Shape 29"/>
+          <p:cNvSpPr/>
+          <p:nvPr/>
+        </p:nvSpPr>
+        <p:spPr>
+          <a:xfrm>
+            <a:off x="640080" y="4160520"/>
+            <a:ext cx="7863840" cy="685800"/>
           </a:xfrm>
           <a:prstGeom prst="rect">
             <a:avLst/>
           </a:prstGeom>
           <a:solidFill>
-            <a:srgbClr val="028090"/>
+            <a:srgbClr val="1E2761"/>
           </a:solidFill>
           <a:ln/>
         </p:spPr>
       </p:sp>
       <p:sp>
         <p:nvSpPr>
-          <p:cNvPr id="18" name="Text 16"/>
-          <p:cNvSpPr/>
-          <p:nvPr/>
-        </p:nvSpPr>
-        <p:spPr>
-          <a:xfrm>
-            <a:off x="640080" y="3675888"/>
-            <a:ext cx="1645920" cy="329184"/>
+          <p:cNvPr id="32" name="Text 30"/>
+          <p:cNvSpPr/>
+          <p:nvPr/>
+        </p:nvSpPr>
+        <p:spPr>
+          <a:xfrm>
+            <a:off x="822960" y="4206240"/>
+            <a:ext cx="7498080" cy="274320"/>
           </a:xfrm>
           <a:prstGeom prst="rect">
             <a:avLst/>
@@ -6967,7 +7380,7 @@
                   <a:srgbClr val="FFFFFF"/>
                 </a:solidFill>
               </a:rPr>
-              <a:t>持续养成</a:t>
+              <a:t>核心指标: Token效率(行/token) | 单模块成本 | 优化节省率 | 误修复率</a:t>
             </a:r>
             <a:endParaRPr lang="en-US" sz="1200" dirty="0"/>
           </a:p>
@@ -6975,151 +7388,37 @@
       </p:sp>
       <p:sp>
         <p:nvSpPr>
-          <p:cNvPr id="19" name="Shape 17"/>
-          <p:cNvSpPr/>
-          <p:nvPr/>
-        </p:nvSpPr>
-        <p:spPr>
-          <a:xfrm>
-            <a:off x="7589520" y="3657600"/>
-            <a:ext cx="914400" cy="365760"/>
-          </a:xfrm>
-          <a:prstGeom prst="rect">
-            <a:avLst/>
-          </a:prstGeom>
-          <a:solidFill>
-            <a:srgbClr val="028090"/>
-          </a:solidFill>
-          <a:ln/>
-        </p:spPr>
-      </p:sp>
-      <p:sp>
-        <p:nvSpPr>
-          <p:cNvPr id="20" name="Text 18"/>
-          <p:cNvSpPr/>
-          <p:nvPr/>
-        </p:nvSpPr>
-        <p:spPr>
-          <a:xfrm>
-            <a:off x="6400800" y="3675888"/>
-            <a:ext cx="2103120" cy="329184"/>
-          </a:xfrm>
-          <a:prstGeom prst="rect">
-            <a:avLst/>
-          </a:prstGeom>
-          <a:noFill/>
-          <a:ln/>
-        </p:spPr>
-        <p:txBody>
-          <a:bodyPr wrap="square" lIns="0" tIns="0" rIns="0" bIns="0" rtlCol="0" anchor="ctr"/>
-          <a:lstStyle/>
-          <a:p>
-            <a:pPr algn="r" indent="0" marL="0">
-              <a:buNone/>
-            </a:pPr>
-            <a:r>
-              <a:rPr lang="en-US" sz="1100" b="1" dirty="0">
-                <a:solidFill>
-                  <a:srgbClr val="028090"/>
-                </a:solidFill>
-              </a:rPr>
-              <a:t>→ 累计省 91%</a:t>
-            </a:r>
-            <a:endParaRPr lang="en-US" sz="1100" dirty="0"/>
-          </a:p>
-        </p:txBody>
-      </p:sp>
-      <p:sp>
-        <p:nvSpPr>
-          <p:cNvPr id="21" name="Text 19"/>
-          <p:cNvSpPr/>
-          <p:nvPr/>
-        </p:nvSpPr>
-        <p:spPr>
-          <a:xfrm>
-            <a:off x="822960" y="4069080"/>
-            <a:ext cx="7315200" cy="822960"/>
-          </a:xfrm>
-          <a:prstGeom prst="rect">
-            <a:avLst/>
-          </a:prstGeom>
-          <a:noFill/>
-          <a:ln/>
-        </p:spPr>
-        <p:txBody>
-          <a:bodyPr wrap="square" rtlCol="0" anchor="t"/>
-          <a:lstStyle/>
-          <a:p>
-            <a:pPr marL="342900" indent="-342900">
-              <a:spcAft>
-                <a:spcPts val="200"/>
-              </a:spcAft>
-              <a:buSzPct val="100000"/>
-              <a:buChar char="•"/>
-            </a:pPr>
-            <a:r>
-              <a:rPr lang="en-US" sz="1100" dirty="0">
-                <a:solidFill>
-                  <a:srgbClr val="1E293B"/>
-                </a:solidFill>
-              </a:rPr>
-              <a:t>每10-15轮执行 /compact</a:t>
-            </a:r>
-            <a:endParaRPr lang="en-US" sz="1100" dirty="0"/>
-          </a:p>
-          <a:p>
-            <a:pPr marL="342900" indent="-342900">
-              <a:spcAft>
-                <a:spcPts val="200"/>
-              </a:spcAft>
-              <a:buSzPct val="100000"/>
-              <a:buChar char="•"/>
-            </a:pPr>
-            <a:r>
-              <a:rPr lang="en-US" sz="1100" dirty="0">
-                <a:solidFill>
-                  <a:srgbClr val="1E293B"/>
-                </a:solidFill>
-              </a:rPr>
-              <a:t>一个模块一个会话</a:t>
-            </a:r>
-            <a:endParaRPr lang="en-US" sz="1100" dirty="0"/>
-          </a:p>
-          <a:p>
-            <a:pPr marL="342900" indent="-342900">
-              <a:spcAft>
-                <a:spcPts val="200"/>
-              </a:spcAft>
-              <a:buSzPct val="100000"/>
-              <a:buChar char="•"/>
-            </a:pPr>
-            <a:r>
-              <a:rPr lang="en-US" sz="1100" dirty="0">
-                <a:solidFill>
-                  <a:srgbClr val="1E293B"/>
-                </a:solidFill>
-              </a:rPr>
-              <a:t>简单任务用 DeepSeek，架构用 Opus</a:t>
-            </a:r>
-            <a:endParaRPr lang="en-US" sz="1100" dirty="0"/>
-          </a:p>
-          <a:p>
-            <a:pPr marL="342900" indent="-342900">
-              <a:spcAft>
-                <a:spcPts val="200"/>
-              </a:spcAft>
-              <a:buSzPct val="100000"/>
-              <a:buChar char="•"/>
-            </a:pPr>
-            <a:r>
-              <a:rPr lang="en-US" sz="1100" dirty="0">
-                <a:solidFill>
-                  <a:srgbClr val="1E293B"/>
-                </a:solidFill>
-              </a:rPr>
-              <a:t>用高效提问模板 （列表 + @引用）</a:t>
-            </a:r>
-            <a:endParaRPr lang="en-US" sz="1100" dirty="0"/>
+          <p:cNvPr id="33" name="Text 31"/>
+          <p:cNvSpPr/>
+          <p:nvPr/>
+        </p:nvSpPr>
+        <p:spPr>
+          <a:xfrm>
+            <a:off x="822960" y="4480560"/>
+            <a:ext cx="7498080" cy="274320"/>
+          </a:xfrm>
+          <a:prstGeom prst="rect">
+            <a:avLst/>
+          </a:prstGeom>
+          <a:noFill/>
+          <a:ln/>
+        </p:spPr>
+        <p:txBody>
+          <a:bodyPr wrap="square" lIns="0" tIns="0" rIns="0" bIns="0" rtlCol="0" anchor="ctr"/>
+          <a:lstStyle/>
+          <a:p>
+            <a:pPr algn="ctr" indent="0" marL="0">
+              <a:buNone/>
+            </a:pPr>
+            <a:r>
+              <a:rPr lang="en-US" sz="1000" dirty="0">
+                <a:solidFill>
+                  <a:srgbClr val="CADCFC"/>
+                </a:solidFill>
+              </a:rPr>
+              <a:t>P0: 每次用 /tokens看消耗 → P1: cc-cost拆解费用 → P2: 部署Langfuse团队监控</a:t>
+            </a:r>
+            <a:endParaRPr lang="en-US" sz="1000" dirty="0"/>
           </a:p>
         </p:txBody>
       </p:sp>
@@ -7164,6 +7463,767 @@
         <p:spPr>
           <a:xfrm>
             <a:off x="0" y="0"/>
+            <a:ext cx="9144000" cy="54864"/>
+          </a:xfrm>
+          <a:prstGeom prst="rect">
+            <a:avLst/>
+          </a:prstGeom>
+          <a:solidFill>
+            <a:srgbClr val="028090"/>
+          </a:solidFill>
+          <a:ln/>
+        </p:spPr>
+      </p:sp>
+      <p:sp>
+        <p:nvSpPr>
+          <p:cNvPr id="3" name="Text 1"/>
+          <p:cNvSpPr/>
+          <p:nvPr/>
+        </p:nvSpPr>
+        <p:spPr>
+          <a:xfrm>
+            <a:off x="640080" y="228600"/>
+            <a:ext cx="7863840" cy="594360"/>
+          </a:xfrm>
+          <a:prstGeom prst="rect">
+            <a:avLst/>
+          </a:prstGeom>
+          <a:noFill/>
+          <a:ln/>
+        </p:spPr>
+        <p:txBody>
+          <a:bodyPr wrap="square" lIns="0" tIns="0" rIns="0" bIns="0" rtlCol="0" anchor="ctr"/>
+          <a:lstStyle/>
+          <a:p>
+            <a:pPr indent="0" marL="0">
+              <a:buNone/>
+            </a:pPr>
+            <a:r>
+              <a:rPr lang="en-US" sz="2800" b="1" dirty="0">
+                <a:solidFill>
+                  <a:srgbClr val="1E2761"/>
+                </a:solidFill>
+                <a:latin typeface="Arial" pitchFamily="34" charset="0"/>
+                <a:ea typeface="Arial" pitchFamily="34" charset="-122"/>
+                <a:cs typeface="Arial" pitchFamily="34" charset="-120"/>
+              </a:rPr>
+              <a:t>行动清单</a:t>
+            </a:r>
+            <a:endParaRPr lang="en-US" sz="2800" dirty="0"/>
+          </a:p>
+        </p:txBody>
+      </p:sp>
+      <p:sp>
+        <p:nvSpPr>
+          <p:cNvPr id="4" name="Shape 2"/>
+          <p:cNvSpPr/>
+          <p:nvPr/>
+        </p:nvSpPr>
+        <p:spPr>
+          <a:xfrm>
+            <a:off x="640080" y="868680"/>
+            <a:ext cx="7863840" cy="0"/>
+          </a:xfrm>
+          <a:prstGeom prst="line">
+            <a:avLst/>
+          </a:prstGeom>
+          <a:noFill/>
+          <a:ln w="25400">
+            <a:solidFill>
+              <a:srgbClr val="028090"/>
+            </a:solidFill>
+            <a:prstDash val="solid"/>
+          </a:ln>
+        </p:spPr>
+      </p:sp>
+      <p:sp>
+        <p:nvSpPr>
+          <p:cNvPr id="5" name="Text 3"/>
+          <p:cNvSpPr/>
+          <p:nvPr/>
+        </p:nvSpPr>
+        <p:spPr>
+          <a:xfrm>
+            <a:off x="7772400" y="4800600"/>
+            <a:ext cx="914400" cy="274320"/>
+          </a:xfrm>
+          <a:prstGeom prst="rect">
+            <a:avLst/>
+          </a:prstGeom>
+          <a:noFill/>
+          <a:ln/>
+        </p:spPr>
+        <p:txBody>
+          <a:bodyPr wrap="square" rtlCol="0" anchor="ctr"/>
+          <a:lstStyle/>
+          <a:p>
+            <a:pPr algn="r" indent="0" marL="0">
+              <a:buNone/>
+            </a:pPr>
+            <a:r>
+              <a:rPr lang="en-US" sz="900" dirty="0">
+                <a:solidFill>
+                  <a:srgbClr val="64748B"/>
+                </a:solidFill>
+              </a:rPr>
+              <a:t>14</a:t>
+            </a:r>
+            <a:endParaRPr lang="en-US" sz="900" dirty="0"/>
+          </a:p>
+        </p:txBody>
+      </p:sp>
+      <p:sp>
+        <p:nvSpPr>
+          <p:cNvPr id="6" name="Text 4"/>
+          <p:cNvSpPr/>
+          <p:nvPr/>
+        </p:nvSpPr>
+        <p:spPr>
+          <a:xfrm>
+            <a:off x="457200" y="4800600"/>
+            <a:ext cx="3657600" cy="274320"/>
+          </a:xfrm>
+          <a:prstGeom prst="rect">
+            <a:avLst/>
+          </a:prstGeom>
+          <a:noFill/>
+          <a:ln/>
+        </p:spPr>
+        <p:txBody>
+          <a:bodyPr wrap="square" rtlCol="0" anchor="ctr"/>
+          <a:lstStyle/>
+          <a:p>
+            <a:pPr indent="0" marL="0">
+              <a:buNone/>
+            </a:pPr>
+            <a:r>
+              <a:rPr lang="en-US" sz="900" dirty="0">
+                <a:solidFill>
+                  <a:srgbClr val="64748B"/>
+                </a:solidFill>
+              </a:rPr>
+              <a:t>Claude Token 优化最佳实践</a:t>
+            </a:r>
+            <a:endParaRPr lang="en-US" sz="900" dirty="0"/>
+          </a:p>
+        </p:txBody>
+      </p:sp>
+      <p:sp>
+        <p:nvSpPr>
+          <p:cNvPr id="7" name="Shape 5"/>
+          <p:cNvSpPr/>
+          <p:nvPr/>
+        </p:nvSpPr>
+        <p:spPr>
+          <a:xfrm>
+            <a:off x="640080" y="1097280"/>
+            <a:ext cx="1645920" cy="365760"/>
+          </a:xfrm>
+          <a:prstGeom prst="rect">
+            <a:avLst/>
+          </a:prstGeom>
+          <a:solidFill>
+            <a:srgbClr val="059669"/>
+          </a:solidFill>
+          <a:ln/>
+        </p:spPr>
+      </p:sp>
+      <p:sp>
+        <p:nvSpPr>
+          <p:cNvPr id="8" name="Text 6"/>
+          <p:cNvSpPr/>
+          <p:nvPr/>
+        </p:nvSpPr>
+        <p:spPr>
+          <a:xfrm>
+            <a:off x="640080" y="1115568"/>
+            <a:ext cx="1645920" cy="329184"/>
+          </a:xfrm>
+          <a:prstGeom prst="rect">
+            <a:avLst/>
+          </a:prstGeom>
+          <a:noFill/>
+          <a:ln/>
+        </p:spPr>
+        <p:txBody>
+          <a:bodyPr wrap="square" lIns="0" tIns="0" rIns="0" bIns="0" rtlCol="0" anchor="ctr"/>
+          <a:lstStyle/>
+          <a:p>
+            <a:pPr algn="ctr" indent="0" marL="0">
+              <a:buNone/>
+            </a:pPr>
+            <a:r>
+              <a:rPr lang="en-US" sz="1200" b="1" dirty="0">
+                <a:solidFill>
+                  <a:srgbClr val="FFFFFF"/>
+                </a:solidFill>
+              </a:rPr>
+              <a:t>今天 (10分钟)</a:t>
+            </a:r>
+            <a:endParaRPr lang="en-US" sz="1200" dirty="0"/>
+          </a:p>
+        </p:txBody>
+      </p:sp>
+      <p:sp>
+        <p:nvSpPr>
+          <p:cNvPr id="9" name="Shape 7"/>
+          <p:cNvSpPr/>
+          <p:nvPr/>
+        </p:nvSpPr>
+        <p:spPr>
+          <a:xfrm>
+            <a:off x="7589520" y="1097280"/>
+            <a:ext cx="914400" cy="365760"/>
+          </a:xfrm>
+          <a:prstGeom prst="rect">
+            <a:avLst/>
+          </a:prstGeom>
+          <a:solidFill>
+            <a:srgbClr val="059669"/>
+          </a:solidFill>
+          <a:ln/>
+        </p:spPr>
+      </p:sp>
+      <p:sp>
+        <p:nvSpPr>
+          <p:cNvPr id="10" name="Text 8"/>
+          <p:cNvSpPr/>
+          <p:nvPr/>
+        </p:nvSpPr>
+        <p:spPr>
+          <a:xfrm>
+            <a:off x="6400800" y="1115568"/>
+            <a:ext cx="2103120" cy="329184"/>
+          </a:xfrm>
+          <a:prstGeom prst="rect">
+            <a:avLst/>
+          </a:prstGeom>
+          <a:noFill/>
+          <a:ln/>
+        </p:spPr>
+        <p:txBody>
+          <a:bodyPr wrap="square" lIns="0" tIns="0" rIns="0" bIns="0" rtlCol="0" anchor="ctr"/>
+          <a:lstStyle/>
+          <a:p>
+            <a:pPr algn="r" indent="0" marL="0">
+              <a:buNone/>
+            </a:pPr>
+            <a:r>
+              <a:rPr lang="en-US" sz="1100" b="1" dirty="0">
+                <a:solidFill>
+                  <a:srgbClr val="059669"/>
+                </a:solidFill>
+              </a:rPr>
+              <a:t>→ 立即省 20%</a:t>
+            </a:r>
+            <a:endParaRPr lang="en-US" sz="1100" dirty="0"/>
+          </a:p>
+        </p:txBody>
+      </p:sp>
+      <p:sp>
+        <p:nvSpPr>
+          <p:cNvPr id="11" name="Text 9"/>
+          <p:cNvSpPr/>
+          <p:nvPr/>
+        </p:nvSpPr>
+        <p:spPr>
+          <a:xfrm>
+            <a:off x="822960" y="1508760"/>
+            <a:ext cx="7315200" cy="822960"/>
+          </a:xfrm>
+          <a:prstGeom prst="rect">
+            <a:avLst/>
+          </a:prstGeom>
+          <a:noFill/>
+          <a:ln/>
+        </p:spPr>
+        <p:txBody>
+          <a:bodyPr wrap="square" rtlCol="0" anchor="t"/>
+          <a:lstStyle/>
+          <a:p>
+            <a:pPr marL="342900" indent="-342900">
+              <a:spcAft>
+                <a:spcPts val="200"/>
+              </a:spcAft>
+              <a:buSzPct val="100000"/>
+              <a:buChar char="•"/>
+            </a:pPr>
+            <a:r>
+              <a:rPr lang="en-US" sz="1100" dirty="0">
+                <a:solidFill>
+                  <a:srgbClr val="1E293B"/>
+                </a:solidFill>
+              </a:rPr>
+              <a:t>export CLAUDE_CODE_ENABLE_THINKING=false</a:t>
+            </a:r>
+            <a:endParaRPr lang="en-US" sz="1100" dirty="0"/>
+          </a:p>
+          <a:p>
+            <a:pPr marL="342900" indent="-342900">
+              <a:spcAft>
+                <a:spcPts val="200"/>
+              </a:spcAft>
+              <a:buSzPct val="100000"/>
+              <a:buChar char="•"/>
+            </a:pPr>
+            <a:r>
+              <a:rPr lang="en-US" sz="1100" dirty="0">
+                <a:solidFill>
+                  <a:srgbClr val="1E293B"/>
+                </a:solidFill>
+              </a:rPr>
+              <a:t>export CLAUDE_CODE_AUTO_COMPACT=true</a:t>
+            </a:r>
+            <a:endParaRPr lang="en-US" sz="1100" dirty="0"/>
+          </a:p>
+          <a:p>
+            <a:pPr marL="342900" indent="-342900">
+              <a:spcAft>
+                <a:spcPts val="200"/>
+              </a:spcAft>
+              <a:buSzPct val="100000"/>
+              <a:buChar char="•"/>
+            </a:pPr>
+            <a:r>
+              <a:rPr lang="en-US" sz="1100" dirty="0">
+                <a:solidFill>
+                  <a:srgbClr val="1E293B"/>
+                </a:solidFill>
+              </a:rPr>
+              <a:t>export CLAUDE_CODE_MAX_TOKENS=4096</a:t>
+            </a:r>
+            <a:endParaRPr lang="en-US" sz="1100" dirty="0"/>
+          </a:p>
+        </p:txBody>
+      </p:sp>
+      <p:sp>
+        <p:nvSpPr>
+          <p:cNvPr id="12" name="Shape 10"/>
+          <p:cNvSpPr/>
+          <p:nvPr/>
+        </p:nvSpPr>
+        <p:spPr>
+          <a:xfrm>
+            <a:off x="640080" y="2377440"/>
+            <a:ext cx="1645920" cy="365760"/>
+          </a:xfrm>
+          <a:prstGeom prst="rect">
+            <a:avLst/>
+          </a:prstGeom>
+          <a:solidFill>
+            <a:srgbClr val="D97706"/>
+          </a:solidFill>
+          <a:ln/>
+        </p:spPr>
+      </p:sp>
+      <p:sp>
+        <p:nvSpPr>
+          <p:cNvPr id="13" name="Text 11"/>
+          <p:cNvSpPr/>
+          <p:nvPr/>
+        </p:nvSpPr>
+        <p:spPr>
+          <a:xfrm>
+            <a:off x="640080" y="2395728"/>
+            <a:ext cx="1645920" cy="329184"/>
+          </a:xfrm>
+          <a:prstGeom prst="rect">
+            <a:avLst/>
+          </a:prstGeom>
+          <a:noFill/>
+          <a:ln/>
+        </p:spPr>
+        <p:txBody>
+          <a:bodyPr wrap="square" lIns="0" tIns="0" rIns="0" bIns="0" rtlCol="0" anchor="ctr"/>
+          <a:lstStyle/>
+          <a:p>
+            <a:pPr algn="ctr" indent="0" marL="0">
+              <a:buNone/>
+            </a:pPr>
+            <a:r>
+              <a:rPr lang="en-US" sz="1200" b="1" dirty="0">
+                <a:solidFill>
+                  <a:srgbClr val="FFFFFF"/>
+                </a:solidFill>
+              </a:rPr>
+              <a:t>本周 (40分钟)</a:t>
+            </a:r>
+            <a:endParaRPr lang="en-US" sz="1200" dirty="0"/>
+          </a:p>
+        </p:txBody>
+      </p:sp>
+      <p:sp>
+        <p:nvSpPr>
+          <p:cNvPr id="14" name="Shape 12"/>
+          <p:cNvSpPr/>
+          <p:nvPr/>
+        </p:nvSpPr>
+        <p:spPr>
+          <a:xfrm>
+            <a:off x="7589520" y="2377440"/>
+            <a:ext cx="914400" cy="365760"/>
+          </a:xfrm>
+          <a:prstGeom prst="rect">
+            <a:avLst/>
+          </a:prstGeom>
+          <a:solidFill>
+            <a:srgbClr val="D97706"/>
+          </a:solidFill>
+          <a:ln/>
+        </p:spPr>
+      </p:sp>
+      <p:sp>
+        <p:nvSpPr>
+          <p:cNvPr id="15" name="Text 13"/>
+          <p:cNvSpPr/>
+          <p:nvPr/>
+        </p:nvSpPr>
+        <p:spPr>
+          <a:xfrm>
+            <a:off x="6400800" y="2395728"/>
+            <a:ext cx="2103120" cy="329184"/>
+          </a:xfrm>
+          <a:prstGeom prst="rect">
+            <a:avLst/>
+          </a:prstGeom>
+          <a:noFill/>
+          <a:ln/>
+        </p:spPr>
+        <p:txBody>
+          <a:bodyPr wrap="square" lIns="0" tIns="0" rIns="0" bIns="0" rtlCol="0" anchor="ctr"/>
+          <a:lstStyle/>
+          <a:p>
+            <a:pPr algn="r" indent="0" marL="0">
+              <a:buNone/>
+            </a:pPr>
+            <a:r>
+              <a:rPr lang="en-US" sz="1100" b="1" dirty="0">
+                <a:solidFill>
+                  <a:srgbClr val="D97706"/>
+                </a:solidFill>
+              </a:rPr>
+              <a:t>→ 累计省 42%</a:t>
+            </a:r>
+            <a:endParaRPr lang="en-US" sz="1100" dirty="0"/>
+          </a:p>
+        </p:txBody>
+      </p:sp>
+      <p:sp>
+        <p:nvSpPr>
+          <p:cNvPr id="16" name="Text 14"/>
+          <p:cNvSpPr/>
+          <p:nvPr/>
+        </p:nvSpPr>
+        <p:spPr>
+          <a:xfrm>
+            <a:off x="822960" y="2788920"/>
+            <a:ext cx="7315200" cy="822960"/>
+          </a:xfrm>
+          <a:prstGeom prst="rect">
+            <a:avLst/>
+          </a:prstGeom>
+          <a:noFill/>
+          <a:ln/>
+        </p:spPr>
+        <p:txBody>
+          <a:bodyPr wrap="square" rtlCol="0" anchor="t"/>
+          <a:lstStyle/>
+          <a:p>
+            <a:pPr marL="342900" indent="-342900">
+              <a:spcAft>
+                <a:spcPts val="200"/>
+              </a:spcAft>
+              <a:buSzPct val="100000"/>
+              <a:buChar char="•"/>
+            </a:pPr>
+            <a:r>
+              <a:rPr lang="en-US" sz="1100" dirty="0">
+                <a:solidFill>
+                  <a:srgbClr val="1E293B"/>
+                </a:solidFill>
+              </a:rPr>
+              <a:t>创建 .claudeignore 排除 build/oh_modules/</a:t>
+            </a:r>
+            <a:endParaRPr lang="en-US" sz="1100" dirty="0"/>
+          </a:p>
+          <a:p>
+            <a:pPr marL="342900" indent="-342900">
+              <a:spcAft>
+                <a:spcPts val="200"/>
+              </a:spcAft>
+              <a:buSzPct val="100000"/>
+              <a:buChar char="•"/>
+            </a:pPr>
+            <a:r>
+              <a:rPr lang="en-US" sz="1100" dirty="0">
+                <a:solidFill>
+                  <a:srgbClr val="1E293B"/>
+                </a:solidFill>
+              </a:rPr>
+              <a:t>精简 CLAUDE.md 至 &lt;1,500 tokens</a:t>
+            </a:r>
+            <a:endParaRPr lang="en-US" sz="1100" dirty="0"/>
+          </a:p>
+          <a:p>
+            <a:pPr marL="342900" indent="-342900">
+              <a:spcAft>
+                <a:spcPts val="200"/>
+              </a:spcAft>
+              <a:buSzPct val="100000"/>
+              <a:buChar char="•"/>
+            </a:pPr>
+            <a:r>
+              <a:rPr lang="en-US" sz="1100" dirty="0">
+                <a:solidFill>
+                  <a:srgbClr val="1E293B"/>
+                </a:solidFill>
+              </a:rPr>
+              <a:t>安装 DeepSeek V4 模型配置</a:t>
+            </a:r>
+            <a:endParaRPr lang="en-US" sz="1100" dirty="0"/>
+          </a:p>
+        </p:txBody>
+      </p:sp>
+      <p:sp>
+        <p:nvSpPr>
+          <p:cNvPr id="17" name="Shape 15"/>
+          <p:cNvSpPr/>
+          <p:nvPr/>
+        </p:nvSpPr>
+        <p:spPr>
+          <a:xfrm>
+            <a:off x="640080" y="3657600"/>
+            <a:ext cx="1645920" cy="365760"/>
+          </a:xfrm>
+          <a:prstGeom prst="rect">
+            <a:avLst/>
+          </a:prstGeom>
+          <a:solidFill>
+            <a:srgbClr val="028090"/>
+          </a:solidFill>
+          <a:ln/>
+        </p:spPr>
+      </p:sp>
+      <p:sp>
+        <p:nvSpPr>
+          <p:cNvPr id="18" name="Text 16"/>
+          <p:cNvSpPr/>
+          <p:nvPr/>
+        </p:nvSpPr>
+        <p:spPr>
+          <a:xfrm>
+            <a:off x="640080" y="3675888"/>
+            <a:ext cx="1645920" cy="329184"/>
+          </a:xfrm>
+          <a:prstGeom prst="rect">
+            <a:avLst/>
+          </a:prstGeom>
+          <a:noFill/>
+          <a:ln/>
+        </p:spPr>
+        <p:txBody>
+          <a:bodyPr wrap="square" lIns="0" tIns="0" rIns="0" bIns="0" rtlCol="0" anchor="ctr"/>
+          <a:lstStyle/>
+          <a:p>
+            <a:pPr algn="ctr" indent="0" marL="0">
+              <a:buNone/>
+            </a:pPr>
+            <a:r>
+              <a:rPr lang="en-US" sz="1200" b="1" dirty="0">
+                <a:solidFill>
+                  <a:srgbClr val="FFFFFF"/>
+                </a:solidFill>
+              </a:rPr>
+              <a:t>持续养成</a:t>
+            </a:r>
+            <a:endParaRPr lang="en-US" sz="1200" dirty="0"/>
+          </a:p>
+        </p:txBody>
+      </p:sp>
+      <p:sp>
+        <p:nvSpPr>
+          <p:cNvPr id="19" name="Shape 17"/>
+          <p:cNvSpPr/>
+          <p:nvPr/>
+        </p:nvSpPr>
+        <p:spPr>
+          <a:xfrm>
+            <a:off x="7589520" y="3657600"/>
+            <a:ext cx="914400" cy="365760"/>
+          </a:xfrm>
+          <a:prstGeom prst="rect">
+            <a:avLst/>
+          </a:prstGeom>
+          <a:solidFill>
+            <a:srgbClr val="028090"/>
+          </a:solidFill>
+          <a:ln/>
+        </p:spPr>
+      </p:sp>
+      <p:sp>
+        <p:nvSpPr>
+          <p:cNvPr id="20" name="Text 18"/>
+          <p:cNvSpPr/>
+          <p:nvPr/>
+        </p:nvSpPr>
+        <p:spPr>
+          <a:xfrm>
+            <a:off x="6400800" y="3675888"/>
+            <a:ext cx="2103120" cy="329184"/>
+          </a:xfrm>
+          <a:prstGeom prst="rect">
+            <a:avLst/>
+          </a:prstGeom>
+          <a:noFill/>
+          <a:ln/>
+        </p:spPr>
+        <p:txBody>
+          <a:bodyPr wrap="square" lIns="0" tIns="0" rIns="0" bIns="0" rtlCol="0" anchor="ctr"/>
+          <a:lstStyle/>
+          <a:p>
+            <a:pPr algn="r" indent="0" marL="0">
+              <a:buNone/>
+            </a:pPr>
+            <a:r>
+              <a:rPr lang="en-US" sz="1100" b="1" dirty="0">
+                <a:solidFill>
+                  <a:srgbClr val="028090"/>
+                </a:solidFill>
+              </a:rPr>
+              <a:t>→ 累计省 91%</a:t>
+            </a:r>
+            <a:endParaRPr lang="en-US" sz="1100" dirty="0"/>
+          </a:p>
+        </p:txBody>
+      </p:sp>
+      <p:sp>
+        <p:nvSpPr>
+          <p:cNvPr id="21" name="Text 19"/>
+          <p:cNvSpPr/>
+          <p:nvPr/>
+        </p:nvSpPr>
+        <p:spPr>
+          <a:xfrm>
+            <a:off x="822960" y="4069080"/>
+            <a:ext cx="7315200" cy="822960"/>
+          </a:xfrm>
+          <a:prstGeom prst="rect">
+            <a:avLst/>
+          </a:prstGeom>
+          <a:noFill/>
+          <a:ln/>
+        </p:spPr>
+        <p:txBody>
+          <a:bodyPr wrap="square" rtlCol="0" anchor="t"/>
+          <a:lstStyle/>
+          <a:p>
+            <a:pPr marL="342900" indent="-342900">
+              <a:spcAft>
+                <a:spcPts val="200"/>
+              </a:spcAft>
+              <a:buSzPct val="100000"/>
+              <a:buChar char="•"/>
+            </a:pPr>
+            <a:r>
+              <a:rPr lang="en-US" sz="1100" dirty="0">
+                <a:solidFill>
+                  <a:srgbClr val="1E293B"/>
+                </a:solidFill>
+              </a:rPr>
+              <a:t>每10-15轮执行 /compact</a:t>
+            </a:r>
+            <a:endParaRPr lang="en-US" sz="1100" dirty="0"/>
+          </a:p>
+          <a:p>
+            <a:pPr marL="342900" indent="-342900">
+              <a:spcAft>
+                <a:spcPts val="200"/>
+              </a:spcAft>
+              <a:buSzPct val="100000"/>
+              <a:buChar char="•"/>
+            </a:pPr>
+            <a:r>
+              <a:rPr lang="en-US" sz="1100" dirty="0">
+                <a:solidFill>
+                  <a:srgbClr val="1E293B"/>
+                </a:solidFill>
+              </a:rPr>
+              <a:t>一个模块一个会话</a:t>
+            </a:r>
+            <a:endParaRPr lang="en-US" sz="1100" dirty="0"/>
+          </a:p>
+          <a:p>
+            <a:pPr marL="342900" indent="-342900">
+              <a:spcAft>
+                <a:spcPts val="200"/>
+              </a:spcAft>
+              <a:buSzPct val="100000"/>
+              <a:buChar char="•"/>
+            </a:pPr>
+            <a:r>
+              <a:rPr lang="en-US" sz="1100" dirty="0">
+                <a:solidFill>
+                  <a:srgbClr val="1E293B"/>
+                </a:solidFill>
+              </a:rPr>
+              <a:t>简单任务用 DeepSeek，架构用 Opus</a:t>
+            </a:r>
+            <a:endParaRPr lang="en-US" sz="1100" dirty="0"/>
+          </a:p>
+          <a:p>
+            <a:pPr marL="342900" indent="-342900">
+              <a:spcAft>
+                <a:spcPts val="200"/>
+              </a:spcAft>
+              <a:buSzPct val="100000"/>
+              <a:buChar char="•"/>
+            </a:pPr>
+            <a:r>
+              <a:rPr lang="en-US" sz="1100" dirty="0">
+                <a:solidFill>
+                  <a:srgbClr val="1E293B"/>
+                </a:solidFill>
+              </a:rPr>
+              <a:t>用高效提问模板 （列表 + @引用）</a:t>
+            </a:r>
+            <a:endParaRPr lang="en-US" sz="1100" dirty="0"/>
+          </a:p>
+        </p:txBody>
+      </p:sp>
+    </p:spTree>
+  </p:cSld>
+  <p:clrMapOvr>
+    <a:masterClrMapping/>
+  </p:clrMapOvr>
+</p:sld>
+</file>
+
+<file path=ppt/slides/slide15.xml><?xml version="1.0" encoding="utf-8"?>
+<p:sld xmlns:a="http://schemas.openxmlformats.org/drawingml/2006/main" xmlns:r="http://schemas.openxmlformats.org/officeDocument/2006/relationships" xmlns:p="http://schemas.openxmlformats.org/presentationml/2006/main">
+  <p:cSld name="Slide 15">
+    <p:spTree>
+      <p:nvGrpSpPr>
+        <p:cNvPr id="1" name=""/>
+        <p:cNvGrpSpPr/>
+        <p:nvPr/>
+      </p:nvGrpSpPr>
+      <p:grpSpPr>
+        <a:xfrm>
+          <a:off x="0" y="0"/>
+          <a:ext cx="0" cy="0"/>
+          <a:chOff x="0" y="0"/>
+          <a:chExt cx="0" cy="0"/>
+        </a:xfrm>
+      </p:grpSpPr>
+      <p:sp>
+        <p:nvSpPr>
+          <p:cNvPr id="2" name="Shape 0"/>
+          <p:cNvSpPr/>
+          <p:nvPr/>
+        </p:nvSpPr>
+        <p:spPr>
+          <a:xfrm>
+            <a:off x="0" y="0"/>
             <a:ext cx="3200400" cy="5143500"/>
           </a:xfrm>
           <a:prstGeom prst="rect">
@@ -8912,6 +9972,137 @@
                 </a:solidFill>
               </a:rPr>
               <a:t>今天/本周/持续要做的事</a:t>
+            </a:r>
+            <a:endParaRPr lang="en-US" sz="1300" dirty="0"/>
+          </a:p>
+        </p:txBody>
+      </p:sp>
+      <p:sp>
+        <p:nvSpPr>
+          <p:cNvPr id="42" name="Shape 40"/>
+          <p:cNvSpPr/>
+          <p:nvPr/>
+        </p:nvSpPr>
+        <p:spPr>
+          <a:xfrm>
+            <a:off x="1554480" y="6446520"/>
+            <a:ext cx="5943600" cy="0"/>
+          </a:xfrm>
+          <a:prstGeom prst="line">
+            <a:avLst/>
+          </a:prstGeom>
+          <a:noFill/>
+          <a:ln w="6350">
+            <a:solidFill>
+              <a:srgbClr val="E2E8F0"/>
+            </a:solidFill>
+            <a:prstDash val="solid"/>
+          </a:ln>
+        </p:spPr>
+      </p:sp>
+      <p:sp>
+        <p:nvSpPr>
+          <p:cNvPr id="43" name="Text 41"/>
+          <p:cNvSpPr/>
+          <p:nvPr/>
+        </p:nvSpPr>
+        <p:spPr>
+          <a:xfrm>
+            <a:off x="914400" y="6537960"/>
+            <a:ext cx="548640" cy="411480"/>
+          </a:xfrm>
+          <a:prstGeom prst="rect">
+            <a:avLst/>
+          </a:prstGeom>
+          <a:noFill/>
+          <a:ln/>
+        </p:spPr>
+        <p:txBody>
+          <a:bodyPr wrap="square" lIns="0" tIns="0" rIns="0" bIns="0" rtlCol="0" anchor="ctr"/>
+          <a:lstStyle/>
+          <a:p>
+            <a:pPr indent="0" marL="0">
+              <a:buNone/>
+            </a:pPr>
+            <a:r>
+              <a:rPr lang="en-US" sz="1800" b="1" dirty="0">
+                <a:solidFill>
+                  <a:srgbClr val="028090"/>
+                </a:solidFill>
+              </a:rPr>
+              <a:t>10</a:t>
+            </a:r>
+            <a:endParaRPr lang="en-US" sz="1800" dirty="0"/>
+          </a:p>
+        </p:txBody>
+      </p:sp>
+      <p:sp>
+        <p:nvSpPr>
+          <p:cNvPr id="44" name="Text 42"/>
+          <p:cNvSpPr/>
+          <p:nvPr/>
+        </p:nvSpPr>
+        <p:spPr>
+          <a:xfrm>
+            <a:off x="1554480" y="6537960"/>
+            <a:ext cx="2286000" cy="411480"/>
+          </a:xfrm>
+          <a:prstGeom prst="rect">
+            <a:avLst/>
+          </a:prstGeom>
+          <a:noFill/>
+          <a:ln/>
+        </p:spPr>
+        <p:txBody>
+          <a:bodyPr wrap="square" lIns="0" tIns="0" rIns="0" bIns="0" rtlCol="0" anchor="ctr"/>
+          <a:lstStyle/>
+          <a:p>
+            <a:pPr indent="0" marL="0">
+              <a:buNone/>
+            </a:pPr>
+            <a:r>
+              <a:rPr lang="en-US" sz="1500" b="1" dirty="0">
+                <a:solidFill>
+                  <a:srgbClr val="1E2761"/>
+                </a:solidFill>
+              </a:rPr>
+              <a:t>Token监控工具</a:t>
+            </a:r>
+            <a:endParaRPr lang="en-US" sz="1500" dirty="0"/>
+          </a:p>
+        </p:txBody>
+      </p:sp>
+      <p:sp>
+        <p:nvSpPr>
+          <p:cNvPr id="45" name="Text 43"/>
+          <p:cNvSpPr/>
+          <p:nvPr/>
+        </p:nvSpPr>
+        <p:spPr>
+          <a:xfrm>
+            <a:off x="3931920" y="6537960"/>
+            <a:ext cx="3657600" cy="411480"/>
+          </a:xfrm>
+          <a:prstGeom prst="rect">
+            <a:avLst/>
+          </a:prstGeom>
+          <a:noFill/>
+          <a:ln/>
+        </p:spPr>
+        <p:txBody>
+          <a:bodyPr wrap="square" lIns="0" tIns="0" rIns="0" bIns="0" rtlCol="0" anchor="ctr"/>
+          <a:lstStyle/>
+          <a:p>
+            <a:pPr indent="0" marL="0">
+              <a:buNone/>
+            </a:pPr>
+            <a:r>
+              <a:rPr lang="en-US" sz="1300" dirty="0">
+                <a:solidFill>
+                  <a:srgbClr val="64748B"/>
+                </a:solidFill>
+              </a:rPr>
+              <a:t>度量才能优化 — 四层工具体系</a:t>
             </a:r>
             <a:endParaRPr lang="en-US" sz="1300" dirty="0"/>
           </a:p>

--- a/Claude-Token优化最佳实践.pptx
+++ b/Claude-Token优化最佳实践.pptx
@@ -7617,7 +7617,34 @@
         <p:spPr>
           <a:xfrm>
             <a:off x="640080" y="1097280"/>
-            <a:ext cx="1645920" cy="365760"/>
+            <a:ext cx="7863840" cy="1097280"/>
+          </a:xfrm>
+          <a:prstGeom prst="rect">
+            <a:avLst/>
+          </a:prstGeom>
+          <a:solidFill>
+            <a:srgbClr val="FFFFFF"/>
+          </a:solidFill>
+          <a:ln/>
+          <a:effectLst>
+            <a:outerShdw sx="100000" sy="100000" kx="0" ky="0" algn="bl" rotWithShape="0" blurRad="76200" dist="25400" dir="8100000">
+              <a:srgbClr val="000000">
+                <a:alpha val="12000"/>
+              </a:srgbClr>
+            </a:outerShdw>
+          </a:effectLst>
+        </p:spPr>
+      </p:sp>
+      <p:sp>
+        <p:nvSpPr>
+          <p:cNvPr id="8" name="Shape 6"/>
+          <p:cNvSpPr/>
+          <p:nvPr/>
+        </p:nvSpPr>
+        <p:spPr>
+          <a:xfrm>
+            <a:off x="640080" y="1097280"/>
+            <a:ext cx="54864" cy="1097280"/>
           </a:xfrm>
           <a:prstGeom prst="rect">
             <a:avLst/>
@@ -7630,50 +7657,14 @@
       </p:sp>
       <p:sp>
         <p:nvSpPr>
-          <p:cNvPr id="8" name="Text 6"/>
-          <p:cNvSpPr/>
-          <p:nvPr/>
-        </p:nvSpPr>
-        <p:spPr>
-          <a:xfrm>
-            <a:off x="640080" y="1115568"/>
-            <a:ext cx="1645920" cy="329184"/>
-          </a:xfrm>
-          <a:prstGeom prst="rect">
-            <a:avLst/>
-          </a:prstGeom>
-          <a:noFill/>
-          <a:ln/>
-        </p:spPr>
-        <p:txBody>
-          <a:bodyPr wrap="square" lIns="0" tIns="0" rIns="0" bIns="0" rtlCol="0" anchor="ctr"/>
-          <a:lstStyle/>
-          <a:p>
-            <a:pPr algn="ctr" indent="0" marL="0">
-              <a:buNone/>
-            </a:pPr>
-            <a:r>
-              <a:rPr lang="en-US" sz="1200" b="1" dirty="0">
-                <a:solidFill>
-                  <a:srgbClr val="FFFFFF"/>
-                </a:solidFill>
-              </a:rPr>
-              <a:t>今天 (10分钟)</a:t>
-            </a:r>
-            <a:endParaRPr lang="en-US" sz="1200" dirty="0"/>
-          </a:p>
-        </p:txBody>
-      </p:sp>
-      <p:sp>
-        <p:nvSpPr>
           <p:cNvPr id="9" name="Shape 7"/>
           <p:cNvSpPr/>
           <p:nvPr/>
         </p:nvSpPr>
         <p:spPr>
           <a:xfrm>
-            <a:off x="7589520" y="1097280"/>
-            <a:ext cx="914400" cy="365760"/>
+            <a:off x="822960" y="1188720"/>
+            <a:ext cx="1463040" cy="365760"/>
           </a:xfrm>
           <a:prstGeom prst="rect">
             <a:avLst/>
@@ -7692,25 +7683,61 @@
         </p:nvSpPr>
         <p:spPr>
           <a:xfrm>
-            <a:off x="6400800" y="1115568"/>
-            <a:ext cx="2103120" cy="329184"/>
-          </a:xfrm>
-          <a:prstGeom prst="rect">
-            <a:avLst/>
-          </a:prstGeom>
-          <a:noFill/>
-          <a:ln/>
-        </p:spPr>
-        <p:txBody>
-          <a:bodyPr wrap="square" lIns="0" tIns="0" rIns="0" bIns="0" rtlCol="0" anchor="ctr"/>
-          <a:lstStyle/>
-          <a:p>
-            <a:pPr algn="r" indent="0" marL="0">
+            <a:off x="822960" y="1207008"/>
+            <a:ext cx="1463040" cy="329184"/>
+          </a:xfrm>
+          <a:prstGeom prst="rect">
+            <a:avLst/>
+          </a:prstGeom>
+          <a:noFill/>
+          <a:ln/>
+        </p:spPr>
+        <p:txBody>
+          <a:bodyPr wrap="square" lIns="0" tIns="0" rIns="0" bIns="0" rtlCol="0" anchor="ctr"/>
+          <a:lstStyle/>
+          <a:p>
+            <a:pPr algn="ctr" indent="0" marL="0">
               <a:buNone/>
             </a:pPr>
             <a:r>
               <a:rPr lang="en-US" sz="1100" b="1" dirty="0">
                 <a:solidFill>
+                  <a:srgbClr val="FFFFFF"/>
+                </a:solidFill>
+              </a:rPr>
+              <a:t>今天 (10分钟)</a:t>
+            </a:r>
+            <a:endParaRPr lang="en-US" sz="1100" dirty="0"/>
+          </a:p>
+        </p:txBody>
+      </p:sp>
+      <p:sp>
+        <p:nvSpPr>
+          <p:cNvPr id="11" name="Text 9"/>
+          <p:cNvSpPr/>
+          <p:nvPr/>
+        </p:nvSpPr>
+        <p:spPr>
+          <a:xfrm>
+            <a:off x="2468880" y="1207008"/>
+            <a:ext cx="1645920" cy="329184"/>
+          </a:xfrm>
+          <a:prstGeom prst="rect">
+            <a:avLst/>
+          </a:prstGeom>
+          <a:noFill/>
+          <a:ln/>
+        </p:spPr>
+        <p:txBody>
+          <a:bodyPr wrap="square" lIns="0" tIns="0" rIns="0" bIns="0" rtlCol="0" anchor="ctr"/>
+          <a:lstStyle/>
+          <a:p>
+            <a:pPr indent="0" marL="0">
+              <a:buNone/>
+            </a:pPr>
+            <a:r>
+              <a:rPr lang="en-US" sz="1100" b="1" dirty="0">
+                <a:solidFill>
                   <a:srgbClr val="059669"/>
                 </a:solidFill>
               </a:rPr>
@@ -7722,23 +7749,23 @@
       </p:sp>
       <p:sp>
         <p:nvSpPr>
-          <p:cNvPr id="11" name="Text 9"/>
-          <p:cNvSpPr/>
-          <p:nvPr/>
-        </p:nvSpPr>
-        <p:spPr>
-          <a:xfrm>
-            <a:off x="822960" y="1508760"/>
-            <a:ext cx="7315200" cy="822960"/>
-          </a:xfrm>
-          <a:prstGeom prst="rect">
-            <a:avLst/>
-          </a:prstGeom>
-          <a:noFill/>
-          <a:ln/>
-        </p:spPr>
-        <p:txBody>
-          <a:bodyPr wrap="square" rtlCol="0" anchor="t"/>
+          <p:cNvPr id="12" name="Text 10"/>
+          <p:cNvSpPr/>
+          <p:nvPr/>
+        </p:nvSpPr>
+        <p:spPr>
+          <a:xfrm>
+            <a:off x="4114800" y="1170432"/>
+            <a:ext cx="4206240" cy="960120"/>
+          </a:xfrm>
+          <a:prstGeom prst="rect">
+            <a:avLst/>
+          </a:prstGeom>
+          <a:noFill/>
+          <a:ln/>
+        </p:spPr>
+        <p:txBody>
+          <a:bodyPr wrap="square" rtlCol="0" anchor="ctr"/>
           <a:lstStyle/>
           <a:p>
             <a:pPr marL="342900" indent="-342900">
@@ -7798,14 +7825,41 @@
       </p:sp>
       <p:sp>
         <p:nvSpPr>
-          <p:cNvPr id="12" name="Shape 10"/>
+          <p:cNvPr id="13" name="Shape 11"/>
           <p:cNvSpPr/>
           <p:nvPr/>
         </p:nvSpPr>
         <p:spPr>
           <a:xfrm>
             <a:off x="640080" y="2377440"/>
-            <a:ext cx="1645920" cy="365760"/>
+            <a:ext cx="7863840" cy="1097280"/>
+          </a:xfrm>
+          <a:prstGeom prst="rect">
+            <a:avLst/>
+          </a:prstGeom>
+          <a:solidFill>
+            <a:srgbClr val="FFFFFF"/>
+          </a:solidFill>
+          <a:ln/>
+          <a:effectLst>
+            <a:outerShdw sx="100000" sy="100000" kx="0" ky="0" algn="bl" rotWithShape="0" blurRad="76200" dist="25400" dir="8100000">
+              <a:srgbClr val="000000">
+                <a:alpha val="12000"/>
+              </a:srgbClr>
+            </a:outerShdw>
+          </a:effectLst>
+        </p:spPr>
+      </p:sp>
+      <p:sp>
+        <p:nvSpPr>
+          <p:cNvPr id="14" name="Shape 12"/>
+          <p:cNvSpPr/>
+          <p:nvPr/>
+        </p:nvSpPr>
+        <p:spPr>
+          <a:xfrm>
+            <a:off x="640080" y="2377440"/>
+            <a:ext cx="54864" cy="1097280"/>
           </a:xfrm>
           <a:prstGeom prst="rect">
             <a:avLst/>
@@ -7818,50 +7872,14 @@
       </p:sp>
       <p:sp>
         <p:nvSpPr>
-          <p:cNvPr id="13" name="Text 11"/>
-          <p:cNvSpPr/>
-          <p:nvPr/>
-        </p:nvSpPr>
-        <p:spPr>
-          <a:xfrm>
-            <a:off x="640080" y="2395728"/>
-            <a:ext cx="1645920" cy="329184"/>
-          </a:xfrm>
-          <a:prstGeom prst="rect">
-            <a:avLst/>
-          </a:prstGeom>
-          <a:noFill/>
-          <a:ln/>
-        </p:spPr>
-        <p:txBody>
-          <a:bodyPr wrap="square" lIns="0" tIns="0" rIns="0" bIns="0" rtlCol="0" anchor="ctr"/>
-          <a:lstStyle/>
-          <a:p>
-            <a:pPr algn="ctr" indent="0" marL="0">
-              <a:buNone/>
-            </a:pPr>
-            <a:r>
-              <a:rPr lang="en-US" sz="1200" b="1" dirty="0">
-                <a:solidFill>
-                  <a:srgbClr val="FFFFFF"/>
-                </a:solidFill>
-              </a:rPr>
-              <a:t>本周 (40分钟)</a:t>
-            </a:r>
-            <a:endParaRPr lang="en-US" sz="1200" dirty="0"/>
-          </a:p>
-        </p:txBody>
-      </p:sp>
-      <p:sp>
-        <p:nvSpPr>
-          <p:cNvPr id="14" name="Shape 12"/>
-          <p:cNvSpPr/>
-          <p:nvPr/>
-        </p:nvSpPr>
-        <p:spPr>
-          <a:xfrm>
-            <a:off x="7589520" y="2377440"/>
-            <a:ext cx="914400" cy="365760"/>
+          <p:cNvPr id="15" name="Shape 13"/>
+          <p:cNvSpPr/>
+          <p:nvPr/>
+        </p:nvSpPr>
+        <p:spPr>
+          <a:xfrm>
+            <a:off x="822960" y="2468880"/>
+            <a:ext cx="1463040" cy="365760"/>
           </a:xfrm>
           <a:prstGeom prst="rect">
             <a:avLst/>
@@ -7874,31 +7892,67 @@
       </p:sp>
       <p:sp>
         <p:nvSpPr>
-          <p:cNvPr id="15" name="Text 13"/>
-          <p:cNvSpPr/>
-          <p:nvPr/>
-        </p:nvSpPr>
-        <p:spPr>
-          <a:xfrm>
-            <a:off x="6400800" y="2395728"/>
-            <a:ext cx="2103120" cy="329184"/>
-          </a:xfrm>
-          <a:prstGeom prst="rect">
-            <a:avLst/>
-          </a:prstGeom>
-          <a:noFill/>
-          <a:ln/>
-        </p:spPr>
-        <p:txBody>
-          <a:bodyPr wrap="square" lIns="0" tIns="0" rIns="0" bIns="0" rtlCol="0" anchor="ctr"/>
-          <a:lstStyle/>
-          <a:p>
-            <a:pPr algn="r" indent="0" marL="0">
+          <p:cNvPr id="16" name="Text 14"/>
+          <p:cNvSpPr/>
+          <p:nvPr/>
+        </p:nvSpPr>
+        <p:spPr>
+          <a:xfrm>
+            <a:off x="822960" y="2487168"/>
+            <a:ext cx="1463040" cy="329184"/>
+          </a:xfrm>
+          <a:prstGeom prst="rect">
+            <a:avLst/>
+          </a:prstGeom>
+          <a:noFill/>
+          <a:ln/>
+        </p:spPr>
+        <p:txBody>
+          <a:bodyPr wrap="square" lIns="0" tIns="0" rIns="0" bIns="0" rtlCol="0" anchor="ctr"/>
+          <a:lstStyle/>
+          <a:p>
+            <a:pPr algn="ctr" indent="0" marL="0">
               <a:buNone/>
             </a:pPr>
             <a:r>
               <a:rPr lang="en-US" sz="1100" b="1" dirty="0">
                 <a:solidFill>
+                  <a:srgbClr val="FFFFFF"/>
+                </a:solidFill>
+              </a:rPr>
+              <a:t>本周 (40分钟)</a:t>
+            </a:r>
+            <a:endParaRPr lang="en-US" sz="1100" dirty="0"/>
+          </a:p>
+        </p:txBody>
+      </p:sp>
+      <p:sp>
+        <p:nvSpPr>
+          <p:cNvPr id="17" name="Text 15"/>
+          <p:cNvSpPr/>
+          <p:nvPr/>
+        </p:nvSpPr>
+        <p:spPr>
+          <a:xfrm>
+            <a:off x="2468880" y="2487168"/>
+            <a:ext cx="1645920" cy="329184"/>
+          </a:xfrm>
+          <a:prstGeom prst="rect">
+            <a:avLst/>
+          </a:prstGeom>
+          <a:noFill/>
+          <a:ln/>
+        </p:spPr>
+        <p:txBody>
+          <a:bodyPr wrap="square" lIns="0" tIns="0" rIns="0" bIns="0" rtlCol="0" anchor="ctr"/>
+          <a:lstStyle/>
+          <a:p>
+            <a:pPr indent="0" marL="0">
+              <a:buNone/>
+            </a:pPr>
+            <a:r>
+              <a:rPr lang="en-US" sz="1100" b="1" dirty="0">
+                <a:solidFill>
                   <a:srgbClr val="D97706"/>
                 </a:solidFill>
               </a:rPr>
@@ -7910,23 +7964,23 @@
       </p:sp>
       <p:sp>
         <p:nvSpPr>
-          <p:cNvPr id="16" name="Text 14"/>
-          <p:cNvSpPr/>
-          <p:nvPr/>
-        </p:nvSpPr>
-        <p:spPr>
-          <a:xfrm>
-            <a:off x="822960" y="2788920"/>
-            <a:ext cx="7315200" cy="822960"/>
-          </a:xfrm>
-          <a:prstGeom prst="rect">
-            <a:avLst/>
-          </a:prstGeom>
-          <a:noFill/>
-          <a:ln/>
-        </p:spPr>
-        <p:txBody>
-          <a:bodyPr wrap="square" rtlCol="0" anchor="t"/>
+          <p:cNvPr id="18" name="Text 16"/>
+          <p:cNvSpPr/>
+          <p:nvPr/>
+        </p:nvSpPr>
+        <p:spPr>
+          <a:xfrm>
+            <a:off x="4114800" y="2450592"/>
+            <a:ext cx="4206240" cy="960120"/>
+          </a:xfrm>
+          <a:prstGeom prst="rect">
+            <a:avLst/>
+          </a:prstGeom>
+          <a:noFill/>
+          <a:ln/>
+        </p:spPr>
+        <p:txBody>
+          <a:bodyPr wrap="square" rtlCol="0" anchor="ctr"/>
           <a:lstStyle/>
           <a:p>
             <a:pPr marL="342900" indent="-342900">
@@ -7986,14 +8040,41 @@
       </p:sp>
       <p:sp>
         <p:nvSpPr>
-          <p:cNvPr id="17" name="Shape 15"/>
+          <p:cNvPr id="19" name="Shape 17"/>
           <p:cNvSpPr/>
           <p:nvPr/>
         </p:nvSpPr>
         <p:spPr>
           <a:xfrm>
             <a:off x="640080" y="3657600"/>
-            <a:ext cx="1645920" cy="365760"/>
+            <a:ext cx="7863840" cy="1097280"/>
+          </a:xfrm>
+          <a:prstGeom prst="rect">
+            <a:avLst/>
+          </a:prstGeom>
+          <a:solidFill>
+            <a:srgbClr val="FFFFFF"/>
+          </a:solidFill>
+          <a:ln/>
+          <a:effectLst>
+            <a:outerShdw sx="100000" sy="100000" kx="0" ky="0" algn="bl" rotWithShape="0" blurRad="76200" dist="25400" dir="8100000">
+              <a:srgbClr val="000000">
+                <a:alpha val="12000"/>
+              </a:srgbClr>
+            </a:outerShdw>
+          </a:effectLst>
+        </p:spPr>
+      </p:sp>
+      <p:sp>
+        <p:nvSpPr>
+          <p:cNvPr id="20" name="Shape 18"/>
+          <p:cNvSpPr/>
+          <p:nvPr/>
+        </p:nvSpPr>
+        <p:spPr>
+          <a:xfrm>
+            <a:off x="640080" y="3657600"/>
+            <a:ext cx="54864" cy="1097280"/>
           </a:xfrm>
           <a:prstGeom prst="rect">
             <a:avLst/>
@@ -8006,50 +8087,14 @@
       </p:sp>
       <p:sp>
         <p:nvSpPr>
-          <p:cNvPr id="18" name="Text 16"/>
-          <p:cNvSpPr/>
-          <p:nvPr/>
-        </p:nvSpPr>
-        <p:spPr>
-          <a:xfrm>
-            <a:off x="640080" y="3675888"/>
-            <a:ext cx="1645920" cy="329184"/>
-          </a:xfrm>
-          <a:prstGeom prst="rect">
-            <a:avLst/>
-          </a:prstGeom>
-          <a:noFill/>
-          <a:ln/>
-        </p:spPr>
-        <p:txBody>
-          <a:bodyPr wrap="square" lIns="0" tIns="0" rIns="0" bIns="0" rtlCol="0" anchor="ctr"/>
-          <a:lstStyle/>
-          <a:p>
-            <a:pPr algn="ctr" indent="0" marL="0">
-              <a:buNone/>
-            </a:pPr>
-            <a:r>
-              <a:rPr lang="en-US" sz="1200" b="1" dirty="0">
-                <a:solidFill>
-                  <a:srgbClr val="FFFFFF"/>
-                </a:solidFill>
-              </a:rPr>
-              <a:t>持续养成</a:t>
-            </a:r>
-            <a:endParaRPr lang="en-US" sz="1200" dirty="0"/>
-          </a:p>
-        </p:txBody>
-      </p:sp>
-      <p:sp>
-        <p:nvSpPr>
-          <p:cNvPr id="19" name="Shape 17"/>
-          <p:cNvSpPr/>
-          <p:nvPr/>
-        </p:nvSpPr>
-        <p:spPr>
-          <a:xfrm>
-            <a:off x="7589520" y="3657600"/>
-            <a:ext cx="914400" cy="365760"/>
+          <p:cNvPr id="21" name="Shape 19"/>
+          <p:cNvSpPr/>
+          <p:nvPr/>
+        </p:nvSpPr>
+        <p:spPr>
+          <a:xfrm>
+            <a:off x="822960" y="3749040"/>
+            <a:ext cx="1463040" cy="365760"/>
           </a:xfrm>
           <a:prstGeom prst="rect">
             <a:avLst/>
@@ -8062,31 +8107,67 @@
       </p:sp>
       <p:sp>
         <p:nvSpPr>
-          <p:cNvPr id="20" name="Text 18"/>
-          <p:cNvSpPr/>
-          <p:nvPr/>
-        </p:nvSpPr>
-        <p:spPr>
-          <a:xfrm>
-            <a:off x="6400800" y="3675888"/>
-            <a:ext cx="2103120" cy="329184"/>
-          </a:xfrm>
-          <a:prstGeom prst="rect">
-            <a:avLst/>
-          </a:prstGeom>
-          <a:noFill/>
-          <a:ln/>
-        </p:spPr>
-        <p:txBody>
-          <a:bodyPr wrap="square" lIns="0" tIns="0" rIns="0" bIns="0" rtlCol="0" anchor="ctr"/>
-          <a:lstStyle/>
-          <a:p>
-            <a:pPr algn="r" indent="0" marL="0">
+          <p:cNvPr id="22" name="Text 20"/>
+          <p:cNvSpPr/>
+          <p:nvPr/>
+        </p:nvSpPr>
+        <p:spPr>
+          <a:xfrm>
+            <a:off x="822960" y="3767328"/>
+            <a:ext cx="1463040" cy="329184"/>
+          </a:xfrm>
+          <a:prstGeom prst="rect">
+            <a:avLst/>
+          </a:prstGeom>
+          <a:noFill/>
+          <a:ln/>
+        </p:spPr>
+        <p:txBody>
+          <a:bodyPr wrap="square" lIns="0" tIns="0" rIns="0" bIns="0" rtlCol="0" anchor="ctr"/>
+          <a:lstStyle/>
+          <a:p>
+            <a:pPr algn="ctr" indent="0" marL="0">
               <a:buNone/>
             </a:pPr>
             <a:r>
               <a:rPr lang="en-US" sz="1100" b="1" dirty="0">
                 <a:solidFill>
+                  <a:srgbClr val="FFFFFF"/>
+                </a:solidFill>
+              </a:rPr>
+              <a:t>持续养成</a:t>
+            </a:r>
+            <a:endParaRPr lang="en-US" sz="1100" dirty="0"/>
+          </a:p>
+        </p:txBody>
+      </p:sp>
+      <p:sp>
+        <p:nvSpPr>
+          <p:cNvPr id="23" name="Text 21"/>
+          <p:cNvSpPr/>
+          <p:nvPr/>
+        </p:nvSpPr>
+        <p:spPr>
+          <a:xfrm>
+            <a:off x="2468880" y="3767328"/>
+            <a:ext cx="1645920" cy="329184"/>
+          </a:xfrm>
+          <a:prstGeom prst="rect">
+            <a:avLst/>
+          </a:prstGeom>
+          <a:noFill/>
+          <a:ln/>
+        </p:spPr>
+        <p:txBody>
+          <a:bodyPr wrap="square" lIns="0" tIns="0" rIns="0" bIns="0" rtlCol="0" anchor="ctr"/>
+          <a:lstStyle/>
+          <a:p>
+            <a:pPr indent="0" marL="0">
+              <a:buNone/>
+            </a:pPr>
+            <a:r>
+              <a:rPr lang="en-US" sz="1100" b="1" dirty="0">
+                <a:solidFill>
                   <a:srgbClr val="028090"/>
                 </a:solidFill>
               </a:rPr>
@@ -8098,23 +8179,23 @@
       </p:sp>
       <p:sp>
         <p:nvSpPr>
-          <p:cNvPr id="21" name="Text 19"/>
-          <p:cNvSpPr/>
-          <p:nvPr/>
-        </p:nvSpPr>
-        <p:spPr>
-          <a:xfrm>
-            <a:off x="822960" y="4069080"/>
-            <a:ext cx="7315200" cy="822960"/>
-          </a:xfrm>
-          <a:prstGeom prst="rect">
-            <a:avLst/>
-          </a:prstGeom>
-          <a:noFill/>
-          <a:ln/>
-        </p:spPr>
-        <p:txBody>
-          <a:bodyPr wrap="square" rtlCol="0" anchor="t"/>
+          <p:cNvPr id="24" name="Text 22"/>
+          <p:cNvSpPr/>
+          <p:nvPr/>
+        </p:nvSpPr>
+        <p:spPr>
+          <a:xfrm>
+            <a:off x="4114800" y="3730752"/>
+            <a:ext cx="4206240" cy="960120"/>
+          </a:xfrm>
+          <a:prstGeom prst="rect">
+            <a:avLst/>
+          </a:prstGeom>
+          <a:noFill/>
+          <a:ln/>
+        </p:spPr>
+        <p:txBody>
+          <a:bodyPr wrap="square" rtlCol="0" anchor="ctr"/>
           <a:lstStyle/>
           <a:p>
             <a:pPr marL="342900" indent="-342900">

--- a/Claude-Token优化最佳实践.pptx
+++ b/Claude-Token优化最佳实践.pptx
@@ -7436,7 +7436,7 @@
     <p:bg>
       <p:bgPr>
         <a:solidFill>
-          <a:srgbClr val="1E2761"/>
+          <a:srgbClr val="F5F7FA"/>
         </a:solidFill>
       </p:bgPr>
     </p:bg>
@@ -8282,6 +8282,13 @@
 <file path=ppt/slides/slide15.xml><?xml version="1.0" encoding="utf-8"?>
 <p:sld xmlns:a="http://schemas.openxmlformats.org/drawingml/2006/main" xmlns:r="http://schemas.openxmlformats.org/officeDocument/2006/relationships" xmlns:p="http://schemas.openxmlformats.org/presentationml/2006/main">
   <p:cSld name="Slide 15">
+    <p:bg>
+      <p:bgPr>
+        <a:solidFill>
+          <a:srgbClr val="1E2761"/>
+        </a:solidFill>
+      </p:bgPr>
+    </p:bg>
     <p:spTree>
       <p:nvGrpSpPr>
         <p:cNvPr id="1" name=""/>

--- a/Claude-Token优化最佳实践.pptx
+++ b/Claude-Token优化最佳实践.pptx
@@ -7436,7 +7436,7 @@
     <p:bg>
       <p:bgPr>
         <a:solidFill>
-          <a:srgbClr val="F5F7FA"/>
+          <a:srgbClr val="FFFFFF"/>
         </a:solidFill>
       </p:bgPr>
     </p:bg>
